--- a/FixNPresent_v2 .pptx
+++ b/FixNPresent_v2 .pptx
@@ -5,7 +5,7 @@
     <p:sldMasterId id="2147483648" r:id="rId1"/>
   </p:sldMasterIdLst>
   <p:notesMasterIdLst>
-    <p:notesMasterId r:id="rId14"/>
+    <p:notesMasterId r:id="rId18"/>
   </p:notesMasterIdLst>
   <p:sldIdLst>
     <p:sldId id="256" r:id="rId2"/>
@@ -15,11 +15,15 @@
     <p:sldId id="261" r:id="rId6"/>
     <p:sldId id="259" r:id="rId7"/>
     <p:sldId id="260" r:id="rId8"/>
-    <p:sldId id="262" r:id="rId9"/>
-    <p:sldId id="268" r:id="rId10"/>
-    <p:sldId id="264" r:id="rId11"/>
-    <p:sldId id="265" r:id="rId12"/>
-    <p:sldId id="266" r:id="rId13"/>
+    <p:sldId id="271" r:id="rId9"/>
+    <p:sldId id="270" r:id="rId10"/>
+    <p:sldId id="269" r:id="rId11"/>
+    <p:sldId id="272" r:id="rId12"/>
+    <p:sldId id="262" r:id="rId13"/>
+    <p:sldId id="268" r:id="rId14"/>
+    <p:sldId id="264" r:id="rId15"/>
+    <p:sldId id="265" r:id="rId16"/>
+    <p:sldId id="266" r:id="rId17"/>
   </p:sldIdLst>
   <p:sldSz cx="9144000" cy="5143500" type="screen16x9"/>
   <p:notesSz cx="5143500" cy="9144000"/>
@@ -337,7 +341,13 @@
   <p:cSld>
     <p:spTree>
       <p:nvGrpSpPr>
-        <p:cNvPr id="1" name=""/>
+        <p:cNvPr id="1" name="">
+          <a:extLst>
+            <a:ext uri="{FF2B5EF4-FFF2-40B4-BE49-F238E27FC236}">
+              <a16:creationId xmlns:a16="http://schemas.microsoft.com/office/drawing/2014/main" id="{368B7625-A897-B27C-C973-3FF7EFB44874}"/>
+            </a:ext>
+          </a:extLst>
+        </p:cNvPr>
         <p:cNvGrpSpPr/>
         <p:nvPr/>
       </p:nvGrpSpPr>
@@ -351,7 +361,13 @@
       </p:grpSpPr>
       <p:sp>
         <p:nvSpPr>
-          <p:cNvPr id="2" name="Slide Image Placeholder 1"/>
+          <p:cNvPr id="2" name="Slide Image Placeholder 1">
+            <a:extLst>
+              <a:ext uri="{FF2B5EF4-FFF2-40B4-BE49-F238E27FC236}">
+                <a16:creationId xmlns:a16="http://schemas.microsoft.com/office/drawing/2014/main" id="{27F079A7-F5D2-A147-25EB-DF5C032A71B2}"/>
+              </a:ext>
+            </a:extLst>
+          </p:cNvPr>
           <p:cNvSpPr>
             <a:spLocks noGrp="1" noRot="1" noChangeAspect="1"/>
           </p:cNvSpPr>
@@ -363,7 +379,13 @@
       </p:sp>
       <p:sp>
         <p:nvSpPr>
-          <p:cNvPr id="3" name="Notes Placeholder 2"/>
+          <p:cNvPr id="3" name="Notes Placeholder 2">
+            <a:extLst>
+              <a:ext uri="{FF2B5EF4-FFF2-40B4-BE49-F238E27FC236}">
+                <a16:creationId xmlns:a16="http://schemas.microsoft.com/office/drawing/2014/main" id="{3B89B21B-6F65-3E73-1FF0-797CD244F3BE}"/>
+              </a:ext>
+            </a:extLst>
+          </p:cNvPr>
           <p:cNvSpPr>
             <a:spLocks noGrp="1"/>
           </p:cNvSpPr>
@@ -382,7 +404,13 @@
       </p:sp>
       <p:sp>
         <p:nvSpPr>
-          <p:cNvPr id="4" name="Slide Number Placeholder 3"/>
+          <p:cNvPr id="4" name="Slide Number Placeholder 3">
+            <a:extLst>
+              <a:ext uri="{FF2B5EF4-FFF2-40B4-BE49-F238E27FC236}">
+                <a16:creationId xmlns:a16="http://schemas.microsoft.com/office/drawing/2014/main" id="{91DA024F-640E-895C-8C33-C452E77D325F}"/>
+              </a:ext>
+            </a:extLst>
+          </p:cNvPr>
           <p:cNvSpPr>
             <a:spLocks noGrp="1"/>
           </p:cNvSpPr>
@@ -397,7 +425,7 @@
           <a:p>
             <a:fld id="{F7021451-1387-4CA6-816F-3879F97B5CBC}" type="slidenum">
               <a:rPr lang="en-US"/>
-              <a:t>11</a:t>
+              <a:t>10</a:t>
             </a:fld>
             <a:endParaRPr lang="en-US"/>
           </a:p>
@@ -406,7 +434,7 @@
     </p:spTree>
     <p:extLst>
       <p:ext uri="{BB962C8B-B14F-4D97-AF65-F5344CB8AC3E}">
-        <p14:creationId xmlns:p14="http://schemas.microsoft.com/office/powerpoint/2010/main" val="1024086991"/>
+        <p14:creationId xmlns:p14="http://schemas.microsoft.com/office/powerpoint/2010/main" val="4199270327"/>
       </p:ext>
     </p:extLst>
   </p:cSld>
@@ -417,6 +445,114 @@
 </file>
 
 <file path=ppt/notesSlides/notesSlide11.xml><?xml version="1.0" encoding="utf-8"?>
+<p:notes xmlns:a="http://schemas.openxmlformats.org/drawingml/2006/main" xmlns:r="http://schemas.openxmlformats.org/officeDocument/2006/relationships" xmlns:p="http://schemas.openxmlformats.org/presentationml/2006/main">
+  <p:cSld>
+    <p:spTree>
+      <p:nvGrpSpPr>
+        <p:cNvPr id="1" name="">
+          <a:extLst>
+            <a:ext uri="{FF2B5EF4-FFF2-40B4-BE49-F238E27FC236}">
+              <a16:creationId xmlns:a16="http://schemas.microsoft.com/office/drawing/2014/main" id="{2E54A519-9FD0-83FE-E270-3E6A9DD3CBF8}"/>
+            </a:ext>
+          </a:extLst>
+        </p:cNvPr>
+        <p:cNvGrpSpPr/>
+        <p:nvPr/>
+      </p:nvGrpSpPr>
+      <p:grpSpPr>
+        <a:xfrm>
+          <a:off x="0" y="0"/>
+          <a:ext cx="0" cy="0"/>
+          <a:chOff x="0" y="0"/>
+          <a:chExt cx="0" cy="0"/>
+        </a:xfrm>
+      </p:grpSpPr>
+      <p:sp>
+        <p:nvSpPr>
+          <p:cNvPr id="2" name="Slide Image Placeholder 1">
+            <a:extLst>
+              <a:ext uri="{FF2B5EF4-FFF2-40B4-BE49-F238E27FC236}">
+                <a16:creationId xmlns:a16="http://schemas.microsoft.com/office/drawing/2014/main" id="{6D1F1B29-7034-6A31-A032-198D1B0215AB}"/>
+              </a:ext>
+            </a:extLst>
+          </p:cNvPr>
+          <p:cNvSpPr>
+            <a:spLocks noGrp="1" noRot="1" noChangeAspect="1"/>
+          </p:cNvSpPr>
+          <p:nvPr>
+            <p:ph type="sldImg"/>
+          </p:nvPr>
+        </p:nvSpPr>
+        <p:spPr/>
+      </p:sp>
+      <p:sp>
+        <p:nvSpPr>
+          <p:cNvPr id="3" name="Notes Placeholder 2">
+            <a:extLst>
+              <a:ext uri="{FF2B5EF4-FFF2-40B4-BE49-F238E27FC236}">
+                <a16:creationId xmlns:a16="http://schemas.microsoft.com/office/drawing/2014/main" id="{25DB5D2E-068C-4B01-BFD1-3AD71B9E0DC2}"/>
+              </a:ext>
+            </a:extLst>
+          </p:cNvPr>
+          <p:cNvSpPr>
+            <a:spLocks noGrp="1"/>
+          </p:cNvSpPr>
+          <p:nvPr>
+            <p:ph type="body" idx="1"/>
+          </p:nvPr>
+        </p:nvSpPr>
+        <p:spPr/>
+        <p:txBody>
+          <a:bodyPr/>
+          <a:lstStyle/>
+          <a:p>
+            <a:endParaRPr lang="en-US" dirty="0"/>
+          </a:p>
+        </p:txBody>
+      </p:sp>
+      <p:sp>
+        <p:nvSpPr>
+          <p:cNvPr id="4" name="Slide Number Placeholder 3">
+            <a:extLst>
+              <a:ext uri="{FF2B5EF4-FFF2-40B4-BE49-F238E27FC236}">
+                <a16:creationId xmlns:a16="http://schemas.microsoft.com/office/drawing/2014/main" id="{F1485242-E8D4-45BC-AFBC-CAC67B2F5982}"/>
+              </a:ext>
+            </a:extLst>
+          </p:cNvPr>
+          <p:cNvSpPr>
+            <a:spLocks noGrp="1"/>
+          </p:cNvSpPr>
+          <p:nvPr>
+            <p:ph type="sldNum" sz="quarter" idx="10"/>
+          </p:nvPr>
+        </p:nvSpPr>
+        <p:spPr/>
+        <p:txBody>
+          <a:bodyPr/>
+          <a:lstStyle/>
+          <a:p>
+            <a:fld id="{F7021451-1387-4CA6-816F-3879F97B5CBC}" type="slidenum">
+              <a:rPr lang="en-US"/>
+              <a:t>11</a:t>
+            </a:fld>
+            <a:endParaRPr lang="en-US"/>
+          </a:p>
+        </p:txBody>
+      </p:sp>
+    </p:spTree>
+    <p:extLst>
+      <p:ext uri="{BB962C8B-B14F-4D97-AF65-F5344CB8AC3E}">
+        <p14:creationId xmlns:p14="http://schemas.microsoft.com/office/powerpoint/2010/main" val="3858623397"/>
+      </p:ext>
+    </p:extLst>
+  </p:cSld>
+  <p:clrMapOvr>
+    <a:masterClrMapping/>
+  </p:clrMapOvr>
+</p:notes>
+</file>
+
+<file path=ppt/notesSlides/notesSlide12.xml><?xml version="1.0" encoding="utf-8"?>
 <p:notes xmlns:a="http://schemas.openxmlformats.org/drawingml/2006/main" xmlns:r="http://schemas.openxmlformats.org/officeDocument/2006/relationships" xmlns:p="http://schemas.openxmlformats.org/presentationml/2006/main">
   <p:cSld>
     <p:spTree>
@@ -482,6 +618,258 @@
             <a:fld id="{F7021451-1387-4CA6-816F-3879F97B5CBC}" type="slidenum">
               <a:rPr lang="en-US"/>
               <a:t>12</a:t>
+            </a:fld>
+            <a:endParaRPr lang="en-US"/>
+          </a:p>
+        </p:txBody>
+      </p:sp>
+    </p:spTree>
+    <p:extLst>
+      <p:ext uri="{BB962C8B-B14F-4D97-AF65-F5344CB8AC3E}">
+        <p14:creationId xmlns:p14="http://schemas.microsoft.com/office/powerpoint/2010/main" val="1024086991"/>
+      </p:ext>
+    </p:extLst>
+  </p:cSld>
+  <p:clrMapOvr>
+    <a:masterClrMapping/>
+  </p:clrMapOvr>
+</p:notes>
+</file>
+
+<file path=ppt/notesSlides/notesSlide13.xml><?xml version="1.0" encoding="utf-8"?>
+<p:notes xmlns:a="http://schemas.openxmlformats.org/drawingml/2006/main" xmlns:r="http://schemas.openxmlformats.org/officeDocument/2006/relationships" xmlns:p="http://schemas.openxmlformats.org/presentationml/2006/main">
+  <p:cSld>
+    <p:spTree>
+      <p:nvGrpSpPr>
+        <p:cNvPr id="1" name=""/>
+        <p:cNvGrpSpPr/>
+        <p:nvPr/>
+      </p:nvGrpSpPr>
+      <p:grpSpPr>
+        <a:xfrm>
+          <a:off x="0" y="0"/>
+          <a:ext cx="0" cy="0"/>
+          <a:chOff x="0" y="0"/>
+          <a:chExt cx="0" cy="0"/>
+        </a:xfrm>
+      </p:grpSpPr>
+      <p:sp>
+        <p:nvSpPr>
+          <p:cNvPr id="2" name="Slide Image Placeholder 1"/>
+          <p:cNvSpPr>
+            <a:spLocks noGrp="1" noRot="1" noChangeAspect="1"/>
+          </p:cNvSpPr>
+          <p:nvPr>
+            <p:ph type="sldImg"/>
+          </p:nvPr>
+        </p:nvSpPr>
+        <p:spPr/>
+      </p:sp>
+      <p:sp>
+        <p:nvSpPr>
+          <p:cNvPr id="3" name="Notes Placeholder 2"/>
+          <p:cNvSpPr>
+            <a:spLocks noGrp="1"/>
+          </p:cNvSpPr>
+          <p:nvPr>
+            <p:ph type="body" idx="1"/>
+          </p:nvPr>
+        </p:nvSpPr>
+        <p:spPr/>
+        <p:txBody>
+          <a:bodyPr/>
+          <a:lstStyle/>
+          <a:p>
+            <a:endParaRPr lang="en-US" dirty="0"/>
+          </a:p>
+        </p:txBody>
+      </p:sp>
+      <p:sp>
+        <p:nvSpPr>
+          <p:cNvPr id="4" name="Slide Number Placeholder 3"/>
+          <p:cNvSpPr>
+            <a:spLocks noGrp="1"/>
+          </p:cNvSpPr>
+          <p:nvPr>
+            <p:ph type="sldNum" sz="quarter" idx="10"/>
+          </p:nvPr>
+        </p:nvSpPr>
+        <p:spPr/>
+        <p:txBody>
+          <a:bodyPr/>
+          <a:lstStyle/>
+          <a:p>
+            <a:fld id="{F7021451-1387-4CA6-816F-3879F97B5CBC}" type="slidenum">
+              <a:rPr lang="en-US"/>
+              <a:t>14</a:t>
+            </a:fld>
+            <a:endParaRPr lang="en-US"/>
+          </a:p>
+        </p:txBody>
+      </p:sp>
+    </p:spTree>
+    <p:extLst>
+      <p:ext uri="{BB962C8B-B14F-4D97-AF65-F5344CB8AC3E}">
+        <p14:creationId xmlns:p14="http://schemas.microsoft.com/office/powerpoint/2010/main" val="1024086991"/>
+      </p:ext>
+    </p:extLst>
+  </p:cSld>
+  <p:clrMapOvr>
+    <a:masterClrMapping/>
+  </p:clrMapOvr>
+</p:notes>
+</file>
+
+<file path=ppt/notesSlides/notesSlide14.xml><?xml version="1.0" encoding="utf-8"?>
+<p:notes xmlns:a="http://schemas.openxmlformats.org/drawingml/2006/main" xmlns:r="http://schemas.openxmlformats.org/officeDocument/2006/relationships" xmlns:p="http://schemas.openxmlformats.org/presentationml/2006/main">
+  <p:cSld>
+    <p:spTree>
+      <p:nvGrpSpPr>
+        <p:cNvPr id="1" name=""/>
+        <p:cNvGrpSpPr/>
+        <p:nvPr/>
+      </p:nvGrpSpPr>
+      <p:grpSpPr>
+        <a:xfrm>
+          <a:off x="0" y="0"/>
+          <a:ext cx="0" cy="0"/>
+          <a:chOff x="0" y="0"/>
+          <a:chExt cx="0" cy="0"/>
+        </a:xfrm>
+      </p:grpSpPr>
+      <p:sp>
+        <p:nvSpPr>
+          <p:cNvPr id="2" name="Slide Image Placeholder 1"/>
+          <p:cNvSpPr>
+            <a:spLocks noGrp="1" noRot="1" noChangeAspect="1"/>
+          </p:cNvSpPr>
+          <p:nvPr>
+            <p:ph type="sldImg"/>
+          </p:nvPr>
+        </p:nvSpPr>
+        <p:spPr/>
+      </p:sp>
+      <p:sp>
+        <p:nvSpPr>
+          <p:cNvPr id="3" name="Notes Placeholder 2"/>
+          <p:cNvSpPr>
+            <a:spLocks noGrp="1"/>
+          </p:cNvSpPr>
+          <p:nvPr>
+            <p:ph type="body" idx="1"/>
+          </p:nvPr>
+        </p:nvSpPr>
+        <p:spPr/>
+        <p:txBody>
+          <a:bodyPr/>
+          <a:lstStyle/>
+          <a:p>
+            <a:endParaRPr lang="en-US" dirty="0"/>
+          </a:p>
+        </p:txBody>
+      </p:sp>
+      <p:sp>
+        <p:nvSpPr>
+          <p:cNvPr id="4" name="Slide Number Placeholder 3"/>
+          <p:cNvSpPr>
+            <a:spLocks noGrp="1"/>
+          </p:cNvSpPr>
+          <p:nvPr>
+            <p:ph type="sldNum" sz="quarter" idx="10"/>
+          </p:nvPr>
+        </p:nvSpPr>
+        <p:spPr/>
+        <p:txBody>
+          <a:bodyPr/>
+          <a:lstStyle/>
+          <a:p>
+            <a:fld id="{F7021451-1387-4CA6-816F-3879F97B5CBC}" type="slidenum">
+              <a:rPr lang="en-US"/>
+              <a:t>15</a:t>
+            </a:fld>
+            <a:endParaRPr lang="en-US"/>
+          </a:p>
+        </p:txBody>
+      </p:sp>
+    </p:spTree>
+    <p:extLst>
+      <p:ext uri="{BB962C8B-B14F-4D97-AF65-F5344CB8AC3E}">
+        <p14:creationId xmlns:p14="http://schemas.microsoft.com/office/powerpoint/2010/main" val="1024086991"/>
+      </p:ext>
+    </p:extLst>
+  </p:cSld>
+  <p:clrMapOvr>
+    <a:masterClrMapping/>
+  </p:clrMapOvr>
+</p:notes>
+</file>
+
+<file path=ppt/notesSlides/notesSlide15.xml><?xml version="1.0" encoding="utf-8"?>
+<p:notes xmlns:a="http://schemas.openxmlformats.org/drawingml/2006/main" xmlns:r="http://schemas.openxmlformats.org/officeDocument/2006/relationships" xmlns:p="http://schemas.openxmlformats.org/presentationml/2006/main">
+  <p:cSld>
+    <p:spTree>
+      <p:nvGrpSpPr>
+        <p:cNvPr id="1" name=""/>
+        <p:cNvGrpSpPr/>
+        <p:nvPr/>
+      </p:nvGrpSpPr>
+      <p:grpSpPr>
+        <a:xfrm>
+          <a:off x="0" y="0"/>
+          <a:ext cx="0" cy="0"/>
+          <a:chOff x="0" y="0"/>
+          <a:chExt cx="0" cy="0"/>
+        </a:xfrm>
+      </p:grpSpPr>
+      <p:sp>
+        <p:nvSpPr>
+          <p:cNvPr id="2" name="Slide Image Placeholder 1"/>
+          <p:cNvSpPr>
+            <a:spLocks noGrp="1" noRot="1" noChangeAspect="1"/>
+          </p:cNvSpPr>
+          <p:nvPr>
+            <p:ph type="sldImg"/>
+          </p:nvPr>
+        </p:nvSpPr>
+        <p:spPr/>
+      </p:sp>
+      <p:sp>
+        <p:nvSpPr>
+          <p:cNvPr id="3" name="Notes Placeholder 2"/>
+          <p:cNvSpPr>
+            <a:spLocks noGrp="1"/>
+          </p:cNvSpPr>
+          <p:nvPr>
+            <p:ph type="body" idx="1"/>
+          </p:nvPr>
+        </p:nvSpPr>
+        <p:spPr/>
+        <p:txBody>
+          <a:bodyPr/>
+          <a:lstStyle/>
+          <a:p>
+            <a:endParaRPr lang="en-US" dirty="0"/>
+          </a:p>
+        </p:txBody>
+      </p:sp>
+      <p:sp>
+        <p:nvSpPr>
+          <p:cNvPr id="4" name="Slide Number Placeholder 3"/>
+          <p:cNvSpPr>
+            <a:spLocks noGrp="1"/>
+          </p:cNvSpPr>
+          <p:nvPr>
+            <p:ph type="sldNum" sz="quarter" idx="10"/>
+          </p:nvPr>
+        </p:nvSpPr>
+        <p:spPr/>
+        <p:txBody>
+          <a:bodyPr/>
+          <a:lstStyle/>
+          <a:p>
+            <a:fld id="{F7021451-1387-4CA6-816F-3879F97B5CBC}" type="slidenum">
+              <a:rPr lang="en-US"/>
+              <a:t>16</a:t>
             </a:fld>
             <a:endParaRPr lang="en-US"/>
           </a:p>
@@ -1009,7 +1397,13 @@
   <p:cSld>
     <p:spTree>
       <p:nvGrpSpPr>
-        <p:cNvPr id="1" name=""/>
+        <p:cNvPr id="1" name="">
+          <a:extLst>
+            <a:ext uri="{FF2B5EF4-FFF2-40B4-BE49-F238E27FC236}">
+              <a16:creationId xmlns:a16="http://schemas.microsoft.com/office/drawing/2014/main" id="{3BDFD1E8-E968-0D4A-AEFF-72170C274B6F}"/>
+            </a:ext>
+          </a:extLst>
+        </p:cNvPr>
         <p:cNvGrpSpPr/>
         <p:nvPr/>
       </p:nvGrpSpPr>
@@ -1023,7 +1417,13 @@
       </p:grpSpPr>
       <p:sp>
         <p:nvSpPr>
-          <p:cNvPr id="2" name="Slide Image Placeholder 1"/>
+          <p:cNvPr id="2" name="Slide Image Placeholder 1">
+            <a:extLst>
+              <a:ext uri="{FF2B5EF4-FFF2-40B4-BE49-F238E27FC236}">
+                <a16:creationId xmlns:a16="http://schemas.microsoft.com/office/drawing/2014/main" id="{697E43CE-5F1A-B6BC-6F3B-91D81018C2E3}"/>
+              </a:ext>
+            </a:extLst>
+          </p:cNvPr>
           <p:cNvSpPr>
             <a:spLocks noGrp="1" noRot="1" noChangeAspect="1"/>
           </p:cNvSpPr>
@@ -1035,7 +1435,13 @@
       </p:sp>
       <p:sp>
         <p:nvSpPr>
-          <p:cNvPr id="3" name="Notes Placeholder 2"/>
+          <p:cNvPr id="3" name="Notes Placeholder 2">
+            <a:extLst>
+              <a:ext uri="{FF2B5EF4-FFF2-40B4-BE49-F238E27FC236}">
+                <a16:creationId xmlns:a16="http://schemas.microsoft.com/office/drawing/2014/main" id="{CA9C24B2-815F-DDE4-D668-0547B4DC9DDC}"/>
+              </a:ext>
+            </a:extLst>
+          </p:cNvPr>
           <p:cNvSpPr>
             <a:spLocks noGrp="1"/>
           </p:cNvSpPr>
@@ -1054,7 +1460,13 @@
       </p:sp>
       <p:sp>
         <p:nvSpPr>
-          <p:cNvPr id="4" name="Slide Number Placeholder 3"/>
+          <p:cNvPr id="4" name="Slide Number Placeholder 3">
+            <a:extLst>
+              <a:ext uri="{FF2B5EF4-FFF2-40B4-BE49-F238E27FC236}">
+                <a16:creationId xmlns:a16="http://schemas.microsoft.com/office/drawing/2014/main" id="{07CC9E83-9439-1AC0-4919-B47E43C5F2D3}"/>
+              </a:ext>
+            </a:extLst>
+          </p:cNvPr>
           <p:cNvSpPr>
             <a:spLocks noGrp="1"/>
           </p:cNvSpPr>
@@ -1078,7 +1490,7 @@
     </p:spTree>
     <p:extLst>
       <p:ext uri="{BB962C8B-B14F-4D97-AF65-F5344CB8AC3E}">
-        <p14:creationId xmlns:p14="http://schemas.microsoft.com/office/powerpoint/2010/main" val="1024086991"/>
+        <p14:creationId xmlns:p14="http://schemas.microsoft.com/office/powerpoint/2010/main" val="1190655307"/>
       </p:ext>
     </p:extLst>
   </p:cSld>
@@ -1093,7 +1505,13 @@
   <p:cSld>
     <p:spTree>
       <p:nvGrpSpPr>
-        <p:cNvPr id="1" name=""/>
+        <p:cNvPr id="1" name="">
+          <a:extLst>
+            <a:ext uri="{FF2B5EF4-FFF2-40B4-BE49-F238E27FC236}">
+              <a16:creationId xmlns:a16="http://schemas.microsoft.com/office/drawing/2014/main" id="{1F18E4D6-5669-D1AA-583B-5E95C29B5011}"/>
+            </a:ext>
+          </a:extLst>
+        </p:cNvPr>
         <p:cNvGrpSpPr/>
         <p:nvPr/>
       </p:nvGrpSpPr>
@@ -1107,7 +1525,13 @@
       </p:grpSpPr>
       <p:sp>
         <p:nvSpPr>
-          <p:cNvPr id="2" name="Slide Image Placeholder 1"/>
+          <p:cNvPr id="2" name="Slide Image Placeholder 1">
+            <a:extLst>
+              <a:ext uri="{FF2B5EF4-FFF2-40B4-BE49-F238E27FC236}">
+                <a16:creationId xmlns:a16="http://schemas.microsoft.com/office/drawing/2014/main" id="{A5D9AA60-679A-9A69-7FC7-B20CCEE7997E}"/>
+              </a:ext>
+            </a:extLst>
+          </p:cNvPr>
           <p:cNvSpPr>
             <a:spLocks noGrp="1" noRot="1" noChangeAspect="1"/>
           </p:cNvSpPr>
@@ -1119,7 +1543,13 @@
       </p:sp>
       <p:sp>
         <p:nvSpPr>
-          <p:cNvPr id="3" name="Notes Placeholder 2"/>
+          <p:cNvPr id="3" name="Notes Placeholder 2">
+            <a:extLst>
+              <a:ext uri="{FF2B5EF4-FFF2-40B4-BE49-F238E27FC236}">
+                <a16:creationId xmlns:a16="http://schemas.microsoft.com/office/drawing/2014/main" id="{1DEB955C-2397-8728-4C64-466BEC613BF9}"/>
+              </a:ext>
+            </a:extLst>
+          </p:cNvPr>
           <p:cNvSpPr>
             <a:spLocks noGrp="1"/>
           </p:cNvSpPr>
@@ -1138,7 +1568,13 @@
       </p:sp>
       <p:sp>
         <p:nvSpPr>
-          <p:cNvPr id="4" name="Slide Number Placeholder 3"/>
+          <p:cNvPr id="4" name="Slide Number Placeholder 3">
+            <a:extLst>
+              <a:ext uri="{FF2B5EF4-FFF2-40B4-BE49-F238E27FC236}">
+                <a16:creationId xmlns:a16="http://schemas.microsoft.com/office/drawing/2014/main" id="{C980EDE7-B3EC-E265-F269-23F6FB94EC70}"/>
+              </a:ext>
+            </a:extLst>
+          </p:cNvPr>
           <p:cNvSpPr>
             <a:spLocks noGrp="1"/>
           </p:cNvSpPr>
@@ -1153,7 +1589,7 @@
           <a:p>
             <a:fld id="{F7021451-1387-4CA6-816F-3879F97B5CBC}" type="slidenum">
               <a:rPr lang="en-US"/>
-              <a:t>10</a:t>
+              <a:t>9</a:t>
             </a:fld>
             <a:endParaRPr lang="en-US"/>
           </a:p>
@@ -1162,7 +1598,7 @@
     </p:spTree>
     <p:extLst>
       <p:ext uri="{BB962C8B-B14F-4D97-AF65-F5344CB8AC3E}">
-        <p14:creationId xmlns:p14="http://schemas.microsoft.com/office/powerpoint/2010/main" val="1024086991"/>
+        <p14:creationId xmlns:p14="http://schemas.microsoft.com/office/powerpoint/2010/main" val="2310609797"/>
       </p:ext>
     </p:extLst>
   </p:cSld>
@@ -1854,6 +2290,4215 @@
 
 <file path=ppt/slides/slide10.xml><?xml version="1.0" encoding="utf-8"?>
 <p:sld xmlns:a="http://schemas.openxmlformats.org/drawingml/2006/main" xmlns:r="http://schemas.openxmlformats.org/officeDocument/2006/relationships" xmlns:p="http://schemas.openxmlformats.org/presentationml/2006/main">
+  <p:cSld>
+    <p:bg>
+      <p:bgPr>
+        <a:solidFill>
+          <a:srgbClr val="0F172A"/>
+        </a:solidFill>
+        <a:effectLst/>
+      </p:bgPr>
+    </p:bg>
+    <p:spTree>
+      <p:nvGrpSpPr>
+        <p:cNvPr id="1" name="">
+          <a:extLst>
+            <a:ext uri="{FF2B5EF4-FFF2-40B4-BE49-F238E27FC236}">
+              <a16:creationId xmlns:a16="http://schemas.microsoft.com/office/drawing/2014/main" id="{E8523366-CAA4-B1DF-7808-E5FD25BA29C3}"/>
+            </a:ext>
+          </a:extLst>
+        </p:cNvPr>
+        <p:cNvGrpSpPr/>
+        <p:nvPr/>
+      </p:nvGrpSpPr>
+      <p:grpSpPr>
+        <a:xfrm>
+          <a:off x="0" y="0"/>
+          <a:ext cx="0" cy="0"/>
+          <a:chOff x="0" y="0"/>
+          <a:chExt cx="0" cy="0"/>
+        </a:xfrm>
+      </p:grpSpPr>
+      <p:sp>
+        <p:nvSpPr>
+          <p:cNvPr id="2" name="Shape 0">
+            <a:extLst>
+              <a:ext uri="{FF2B5EF4-FFF2-40B4-BE49-F238E27FC236}">
+                <a16:creationId xmlns:a16="http://schemas.microsoft.com/office/drawing/2014/main" id="{4772CC17-B1F7-C3F5-3781-53B0456D184E}"/>
+              </a:ext>
+            </a:extLst>
+          </p:cNvPr>
+          <p:cNvSpPr/>
+          <p:nvPr/>
+        </p:nvSpPr>
+        <p:spPr>
+          <a:xfrm>
+            <a:off x="0" y="0"/>
+            <a:ext cx="9144000" cy="64008"/>
+          </a:xfrm>
+          <a:prstGeom prst="rect">
+            <a:avLst/>
+          </a:prstGeom>
+          <a:solidFill>
+            <a:srgbClr val="0EA5E9"/>
+          </a:solidFill>
+          <a:ln w="12700">
+            <a:solidFill>
+              <a:srgbClr val="0EA5E9"/>
+            </a:solidFill>
+            <a:prstDash val="solid"/>
+          </a:ln>
+        </p:spPr>
+        <p:txBody>
+          <a:bodyPr/>
+          <a:lstStyle/>
+          <a:p>
+            <a:endParaRPr lang="en-US"/>
+          </a:p>
+        </p:txBody>
+      </p:sp>
+      <p:sp>
+        <p:nvSpPr>
+          <p:cNvPr id="3" name="Text 1">
+            <a:extLst>
+              <a:ext uri="{FF2B5EF4-FFF2-40B4-BE49-F238E27FC236}">
+                <a16:creationId xmlns:a16="http://schemas.microsoft.com/office/drawing/2014/main" id="{BF8887B1-15F3-24EB-FF87-B05F6DB61090}"/>
+              </a:ext>
+            </a:extLst>
+          </p:cNvPr>
+          <p:cNvSpPr/>
+          <p:nvPr/>
+        </p:nvSpPr>
+        <p:spPr>
+          <a:xfrm>
+            <a:off x="457200" y="164592"/>
+            <a:ext cx="8229600" cy="594360"/>
+          </a:xfrm>
+          <a:prstGeom prst="rect">
+            <a:avLst/>
+          </a:prstGeom>
+          <a:noFill/>
+          <a:ln/>
+        </p:spPr>
+        <p:txBody>
+          <a:bodyPr wrap="square" rtlCol="0" anchor="ctr"/>
+          <a:lstStyle/>
+          <a:p>
+            <a:pPr marL="0" indent="0">
+              <a:buNone/>
+            </a:pPr>
+            <a:r>
+              <a:rPr lang="en-US" sz="2800" b="1" dirty="0">
+                <a:solidFill>
+                  <a:srgbClr val="FFFFFF"/>
+                </a:solidFill>
+                <a:latin typeface="Calibri" pitchFamily="34" charset="0"/>
+                <a:ea typeface="Calibri" pitchFamily="34" charset="-122"/>
+                <a:cs typeface="Calibri" pitchFamily="34" charset="-120"/>
+              </a:rPr>
+              <a:t>Design da API de dados e Schemas Mongoose</a:t>
+            </a:r>
+            <a:endParaRPr lang="en-US" sz="2800" dirty="0"/>
+          </a:p>
+        </p:txBody>
+      </p:sp>
+      <p:sp>
+        <p:nvSpPr>
+          <p:cNvPr id="44" name="Shape 32">
+            <a:extLst>
+              <a:ext uri="{FF2B5EF4-FFF2-40B4-BE49-F238E27FC236}">
+                <a16:creationId xmlns:a16="http://schemas.microsoft.com/office/drawing/2014/main" id="{2F4CE170-2DDB-05EA-F017-909E7C1BE798}"/>
+              </a:ext>
+            </a:extLst>
+          </p:cNvPr>
+          <p:cNvSpPr/>
+          <p:nvPr/>
+        </p:nvSpPr>
+        <p:spPr>
+          <a:xfrm>
+            <a:off x="0" y="5074920"/>
+            <a:ext cx="9144000" cy="68580"/>
+          </a:xfrm>
+          <a:prstGeom prst="rect">
+            <a:avLst/>
+          </a:prstGeom>
+          <a:solidFill>
+            <a:srgbClr val="6366F1"/>
+          </a:solidFill>
+          <a:ln w="12700">
+            <a:solidFill>
+              <a:srgbClr val="6366F1"/>
+            </a:solidFill>
+            <a:prstDash val="solid"/>
+          </a:ln>
+        </p:spPr>
+        <p:txBody>
+          <a:bodyPr/>
+          <a:lstStyle/>
+          <a:p>
+            <a:endParaRPr lang="en-US"/>
+          </a:p>
+        </p:txBody>
+      </p:sp>
+      <p:sp>
+        <p:nvSpPr>
+          <p:cNvPr id="45" name="Shape 14">
+            <a:extLst>
+              <a:ext uri="{FF2B5EF4-FFF2-40B4-BE49-F238E27FC236}">
+                <a16:creationId xmlns:a16="http://schemas.microsoft.com/office/drawing/2014/main" id="{BB54A324-2DBF-C584-734C-DBDF3344BC94}"/>
+              </a:ext>
+            </a:extLst>
+          </p:cNvPr>
+          <p:cNvSpPr/>
+          <p:nvPr/>
+        </p:nvSpPr>
+        <p:spPr>
+          <a:xfrm>
+            <a:off x="457201" y="859535"/>
+            <a:ext cx="3653406" cy="2982623"/>
+          </a:xfrm>
+          <a:prstGeom prst="rect">
+            <a:avLst/>
+          </a:prstGeom>
+          <a:solidFill>
+            <a:srgbClr val="1E293B"/>
+          </a:solidFill>
+          <a:ln w="12700">
+            <a:solidFill>
+              <a:srgbClr val="334155"/>
+            </a:solidFill>
+            <a:prstDash val="solid"/>
+          </a:ln>
+        </p:spPr>
+        <p:txBody>
+          <a:bodyPr/>
+          <a:lstStyle/>
+          <a:p>
+            <a:pPr marL="285750" indent="-285750">
+              <a:buFont typeface="Arial" panose="020B0604020202020204" pitchFamily="34" charset="0"/>
+              <a:buChar char="•"/>
+            </a:pPr>
+            <a:r>
+              <a:rPr lang="en-US" sz="1400" dirty="0" err="1">
+                <a:solidFill>
+                  <a:schemeClr val="bg1"/>
+                </a:solidFill>
+              </a:rPr>
+              <a:t>Identificação</a:t>
+            </a:r>
+            <a:r>
+              <a:rPr lang="en-US" sz="1400" dirty="0">
+                <a:solidFill>
+                  <a:schemeClr val="bg1"/>
+                </a:solidFill>
+              </a:rPr>
+              <a:t> das </a:t>
+            </a:r>
+            <a:r>
+              <a:rPr lang="en-US" sz="1400" dirty="0" err="1">
+                <a:solidFill>
+                  <a:schemeClr val="bg1"/>
+                </a:solidFill>
+              </a:rPr>
+              <a:t>Coleções</a:t>
+            </a:r>
+            <a:endParaRPr lang="en-US" sz="1400" dirty="0">
+              <a:solidFill>
+                <a:schemeClr val="bg1"/>
+              </a:solidFill>
+            </a:endParaRPr>
+          </a:p>
+          <a:p>
+            <a:pPr marL="285750" indent="-285750">
+              <a:buFont typeface="Arial" panose="020B0604020202020204" pitchFamily="34" charset="0"/>
+              <a:buChar char="•"/>
+            </a:pPr>
+            <a:endParaRPr lang="en-US" sz="1400" dirty="0">
+              <a:solidFill>
+                <a:schemeClr val="bg1"/>
+              </a:solidFill>
+            </a:endParaRPr>
+          </a:p>
+          <a:p>
+            <a:pPr marL="285750" indent="-285750">
+              <a:buFont typeface="Arial" panose="020B0604020202020204" pitchFamily="34" charset="0"/>
+              <a:buChar char="•"/>
+            </a:pPr>
+            <a:r>
+              <a:rPr lang="en-US" sz="1400" dirty="0" err="1">
+                <a:solidFill>
+                  <a:schemeClr val="bg1"/>
+                </a:solidFill>
+              </a:rPr>
+              <a:t>Modelação</a:t>
+            </a:r>
+            <a:r>
+              <a:rPr lang="en-US" sz="1400" dirty="0">
+                <a:solidFill>
+                  <a:schemeClr val="bg1"/>
+                </a:solidFill>
+              </a:rPr>
+              <a:t> dos </a:t>
+            </a:r>
+            <a:r>
+              <a:rPr lang="en-US" sz="1400" dirty="0" err="1">
+                <a:solidFill>
+                  <a:schemeClr val="bg1"/>
+                </a:solidFill>
+              </a:rPr>
+              <a:t>atributos</a:t>
+            </a:r>
+            <a:r>
+              <a:rPr lang="en-US" sz="1400" dirty="0">
+                <a:solidFill>
+                  <a:schemeClr val="bg1"/>
+                </a:solidFill>
+              </a:rPr>
+              <a:t> e indices de </a:t>
+            </a:r>
+            <a:r>
+              <a:rPr lang="en-US" sz="1400" dirty="0" err="1">
+                <a:solidFill>
+                  <a:schemeClr val="bg1"/>
+                </a:solidFill>
+              </a:rPr>
+              <a:t>cada</a:t>
+            </a:r>
+            <a:r>
+              <a:rPr lang="en-US" sz="1400" dirty="0">
+                <a:solidFill>
+                  <a:schemeClr val="bg1"/>
+                </a:solidFill>
+              </a:rPr>
+              <a:t> </a:t>
+            </a:r>
+            <a:r>
+              <a:rPr lang="en-US" sz="1400" dirty="0" err="1">
+                <a:solidFill>
+                  <a:schemeClr val="bg1"/>
+                </a:solidFill>
+              </a:rPr>
+              <a:t>coleção</a:t>
+            </a:r>
+            <a:endParaRPr lang="en-US" sz="1400" dirty="0">
+              <a:solidFill>
+                <a:schemeClr val="bg1"/>
+              </a:solidFill>
+            </a:endParaRPr>
+          </a:p>
+          <a:p>
+            <a:pPr marL="285750" indent="-285750">
+              <a:buFont typeface="Arial" panose="020B0604020202020204" pitchFamily="34" charset="0"/>
+              <a:buChar char="•"/>
+            </a:pPr>
+            <a:endParaRPr lang="en-US" sz="1400" dirty="0">
+              <a:solidFill>
+                <a:schemeClr val="bg1"/>
+              </a:solidFill>
+            </a:endParaRPr>
+          </a:p>
+          <a:p>
+            <a:pPr marL="285750" indent="-285750">
+              <a:buFont typeface="Arial" panose="020B0604020202020204" pitchFamily="34" charset="0"/>
+              <a:buChar char="•"/>
+            </a:pPr>
+            <a:r>
+              <a:rPr lang="en-US" sz="1400" dirty="0" err="1">
+                <a:solidFill>
+                  <a:schemeClr val="bg1"/>
+                </a:solidFill>
+              </a:rPr>
+              <a:t>Modelação</a:t>
+            </a:r>
+            <a:r>
+              <a:rPr lang="en-US" sz="1400" dirty="0">
+                <a:solidFill>
+                  <a:schemeClr val="bg1"/>
+                </a:solidFill>
+              </a:rPr>
+              <a:t> dos </a:t>
+            </a:r>
+            <a:r>
+              <a:rPr lang="en-US" sz="1400" dirty="0" err="1">
+                <a:solidFill>
+                  <a:schemeClr val="bg1"/>
+                </a:solidFill>
+              </a:rPr>
+              <a:t>relacionamentos</a:t>
+            </a:r>
+            <a:r>
+              <a:rPr lang="en-US" sz="1400" dirty="0">
+                <a:solidFill>
+                  <a:schemeClr val="bg1"/>
+                </a:solidFill>
+              </a:rPr>
+              <a:t> entre </a:t>
+            </a:r>
+            <a:r>
+              <a:rPr lang="en-US" sz="1400" dirty="0" err="1">
+                <a:solidFill>
+                  <a:schemeClr val="bg1"/>
+                </a:solidFill>
+              </a:rPr>
+              <a:t>coleções</a:t>
+            </a:r>
+            <a:r>
+              <a:rPr lang="en-US" sz="1400" dirty="0">
+                <a:solidFill>
+                  <a:schemeClr val="bg1"/>
+                </a:solidFill>
+              </a:rPr>
+              <a:t> (Referencing vs Embedding)</a:t>
+            </a:r>
+          </a:p>
+          <a:p>
+            <a:pPr marL="285750" indent="-285750">
+              <a:buFont typeface="Arial" panose="020B0604020202020204" pitchFamily="34" charset="0"/>
+              <a:buChar char="•"/>
+            </a:pPr>
+            <a:endParaRPr lang="en-US" sz="1400" dirty="0">
+              <a:solidFill>
+                <a:schemeClr val="bg1"/>
+              </a:solidFill>
+            </a:endParaRPr>
+          </a:p>
+          <a:p>
+            <a:pPr marL="285750" indent="-285750">
+              <a:buFont typeface="Arial" panose="020B0604020202020204" pitchFamily="34" charset="0"/>
+              <a:buChar char="•"/>
+            </a:pPr>
+            <a:r>
+              <a:rPr lang="en-US" sz="1400" dirty="0" err="1">
+                <a:solidFill>
+                  <a:schemeClr val="bg1"/>
+                </a:solidFill>
+              </a:rPr>
+              <a:t>Modelação</a:t>
+            </a:r>
+            <a:r>
+              <a:rPr lang="en-US" sz="1400" dirty="0">
+                <a:solidFill>
+                  <a:schemeClr val="bg1"/>
+                </a:solidFill>
+              </a:rPr>
+              <a:t> dos schemas mongoose</a:t>
+            </a:r>
+          </a:p>
+          <a:p>
+            <a:pPr marL="285750" indent="-285750">
+              <a:buFont typeface="Arial" panose="020B0604020202020204" pitchFamily="34" charset="0"/>
+              <a:buChar char="•"/>
+            </a:pPr>
+            <a:endParaRPr lang="en-US" sz="1400" dirty="0">
+              <a:solidFill>
+                <a:schemeClr val="bg1"/>
+              </a:solidFill>
+            </a:endParaRPr>
+          </a:p>
+          <a:p>
+            <a:pPr marL="285750" indent="-285750">
+              <a:buFont typeface="Arial" panose="020B0604020202020204" pitchFamily="34" charset="0"/>
+              <a:buChar char="•"/>
+            </a:pPr>
+            <a:r>
+              <a:rPr lang="en-US" sz="1400" dirty="0" err="1">
+                <a:solidFill>
+                  <a:schemeClr val="bg1"/>
+                </a:solidFill>
+              </a:rPr>
+              <a:t>Identificação</a:t>
+            </a:r>
+            <a:r>
+              <a:rPr lang="en-US" sz="1400" dirty="0">
+                <a:solidFill>
+                  <a:schemeClr val="bg1"/>
+                </a:solidFill>
+              </a:rPr>
+              <a:t> do </a:t>
+            </a:r>
+            <a:r>
+              <a:rPr lang="en-US" sz="1400" dirty="0" err="1">
+                <a:solidFill>
+                  <a:schemeClr val="bg1"/>
+                </a:solidFill>
+              </a:rPr>
+              <a:t>dicionário</a:t>
+            </a:r>
+            <a:r>
+              <a:rPr lang="en-US" sz="1400" dirty="0">
+                <a:solidFill>
+                  <a:schemeClr val="bg1"/>
+                </a:solidFill>
+              </a:rPr>
+              <a:t> de endpoints da API</a:t>
+            </a:r>
+          </a:p>
+        </p:txBody>
+      </p:sp>
+      <p:sp>
+        <p:nvSpPr>
+          <p:cNvPr id="48" name="Rectangle 47">
+            <a:extLst>
+              <a:ext uri="{FF2B5EF4-FFF2-40B4-BE49-F238E27FC236}">
+                <a16:creationId xmlns:a16="http://schemas.microsoft.com/office/drawing/2014/main" id="{4C3426CD-BA46-E4B9-9307-1EFC3E539D39}"/>
+              </a:ext>
+            </a:extLst>
+          </p:cNvPr>
+          <p:cNvSpPr/>
+          <p:nvPr/>
+        </p:nvSpPr>
+        <p:spPr>
+          <a:xfrm>
+            <a:off x="4572000" y="859535"/>
+            <a:ext cx="4154979" cy="2982622"/>
+          </a:xfrm>
+          <a:prstGeom prst="rect">
+            <a:avLst/>
+          </a:prstGeom>
+          <a:solidFill>
+            <a:schemeClr val="bg1"/>
+          </a:solidFill>
+          <a:ln>
+            <a:solidFill>
+              <a:schemeClr val="bg1"/>
+            </a:solidFill>
+          </a:ln>
+        </p:spPr>
+        <p:style>
+          <a:lnRef idx="2">
+            <a:schemeClr val="accent1">
+              <a:shade val="15000"/>
+            </a:schemeClr>
+          </a:lnRef>
+          <a:fillRef idx="1">
+            <a:schemeClr val="accent1"/>
+          </a:fillRef>
+          <a:effectRef idx="0">
+            <a:schemeClr val="accent1"/>
+          </a:effectRef>
+          <a:fontRef idx="minor">
+            <a:schemeClr val="lt1"/>
+          </a:fontRef>
+        </p:style>
+        <p:txBody>
+          <a:bodyPr rtlCol="0" anchor="ctr"/>
+          <a:lstStyle/>
+          <a:p>
+            <a:pPr algn="ctr"/>
+            <a:endParaRPr lang="en-US" dirty="0">
+              <a:solidFill>
+                <a:schemeClr val="bg1"/>
+              </a:solidFill>
+            </a:endParaRPr>
+          </a:p>
+        </p:txBody>
+      </p:sp>
+      <p:pic>
+        <p:nvPicPr>
+          <p:cNvPr id="47" name="Picture 46" descr="A computer screen shot of a computer screen&#10;&#10;AI-generated content may be incorrect.">
+            <a:extLst>
+              <a:ext uri="{FF2B5EF4-FFF2-40B4-BE49-F238E27FC236}">
+                <a16:creationId xmlns:a16="http://schemas.microsoft.com/office/drawing/2014/main" id="{A6C6A1B8-529E-4CBA-0CDE-39E13CFC3160}"/>
+              </a:ext>
+            </a:extLst>
+          </p:cNvPr>
+          <p:cNvPicPr>
+            <a:picLocks noChangeAspect="1"/>
+          </p:cNvPicPr>
+          <p:nvPr/>
+        </p:nvPicPr>
+        <p:blipFill>
+          <a:blip r:embed="rId3"/>
+          <a:stretch>
+            <a:fillRect/>
+          </a:stretch>
+        </p:blipFill>
+        <p:spPr>
+          <a:xfrm>
+            <a:off x="4662377" y="1077679"/>
+            <a:ext cx="4154979" cy="2546333"/>
+          </a:xfrm>
+          <a:prstGeom prst="rect">
+            <a:avLst/>
+          </a:prstGeom>
+        </p:spPr>
+      </p:pic>
+    </p:spTree>
+    <p:extLst>
+      <p:ext uri="{BB962C8B-B14F-4D97-AF65-F5344CB8AC3E}">
+        <p14:creationId xmlns:p14="http://schemas.microsoft.com/office/powerpoint/2010/main" val="1902161535"/>
+      </p:ext>
+    </p:extLst>
+  </p:cSld>
+  <p:clrMapOvr>
+    <a:masterClrMapping/>
+  </p:clrMapOvr>
+</p:sld>
+</file>
+
+<file path=ppt/slides/slide11.xml><?xml version="1.0" encoding="utf-8"?>
+<p:sld xmlns:a="http://schemas.openxmlformats.org/drawingml/2006/main" xmlns:r="http://schemas.openxmlformats.org/officeDocument/2006/relationships" xmlns:p="http://schemas.openxmlformats.org/presentationml/2006/main">
+  <p:cSld>
+    <p:bg>
+      <p:bgPr>
+        <a:solidFill>
+          <a:srgbClr val="0F172A"/>
+        </a:solidFill>
+        <a:effectLst/>
+      </p:bgPr>
+    </p:bg>
+    <p:spTree>
+      <p:nvGrpSpPr>
+        <p:cNvPr id="1" name="">
+          <a:extLst>
+            <a:ext uri="{FF2B5EF4-FFF2-40B4-BE49-F238E27FC236}">
+              <a16:creationId xmlns:a16="http://schemas.microsoft.com/office/drawing/2014/main" id="{BE2F7AA3-5409-9572-A811-04E6E28C7C2E}"/>
+            </a:ext>
+          </a:extLst>
+        </p:cNvPr>
+        <p:cNvGrpSpPr/>
+        <p:nvPr/>
+      </p:nvGrpSpPr>
+      <p:grpSpPr>
+        <a:xfrm>
+          <a:off x="0" y="0"/>
+          <a:ext cx="0" cy="0"/>
+          <a:chOff x="0" y="0"/>
+          <a:chExt cx="0" cy="0"/>
+        </a:xfrm>
+      </p:grpSpPr>
+      <p:sp>
+        <p:nvSpPr>
+          <p:cNvPr id="2" name="Shape 0">
+            <a:extLst>
+              <a:ext uri="{FF2B5EF4-FFF2-40B4-BE49-F238E27FC236}">
+                <a16:creationId xmlns:a16="http://schemas.microsoft.com/office/drawing/2014/main" id="{D01F0886-3316-D462-80CB-568E66768DCD}"/>
+              </a:ext>
+            </a:extLst>
+          </p:cNvPr>
+          <p:cNvSpPr/>
+          <p:nvPr/>
+        </p:nvSpPr>
+        <p:spPr>
+          <a:xfrm>
+            <a:off x="0" y="0"/>
+            <a:ext cx="9144000" cy="64008"/>
+          </a:xfrm>
+          <a:prstGeom prst="rect">
+            <a:avLst/>
+          </a:prstGeom>
+          <a:solidFill>
+            <a:srgbClr val="0EA5E9"/>
+          </a:solidFill>
+          <a:ln w="12700">
+            <a:solidFill>
+              <a:srgbClr val="0EA5E9"/>
+            </a:solidFill>
+            <a:prstDash val="solid"/>
+          </a:ln>
+        </p:spPr>
+        <p:txBody>
+          <a:bodyPr/>
+          <a:lstStyle/>
+          <a:p>
+            <a:endParaRPr lang="en-US"/>
+          </a:p>
+        </p:txBody>
+      </p:sp>
+      <p:sp>
+        <p:nvSpPr>
+          <p:cNvPr id="3" name="Text 1">
+            <a:extLst>
+              <a:ext uri="{FF2B5EF4-FFF2-40B4-BE49-F238E27FC236}">
+                <a16:creationId xmlns:a16="http://schemas.microsoft.com/office/drawing/2014/main" id="{343CD633-4A34-A53F-DF9F-377E44ACDCE8}"/>
+              </a:ext>
+            </a:extLst>
+          </p:cNvPr>
+          <p:cNvSpPr/>
+          <p:nvPr/>
+        </p:nvSpPr>
+        <p:spPr>
+          <a:xfrm>
+            <a:off x="457200" y="164592"/>
+            <a:ext cx="8229600" cy="594360"/>
+          </a:xfrm>
+          <a:prstGeom prst="rect">
+            <a:avLst/>
+          </a:prstGeom>
+          <a:noFill/>
+          <a:ln/>
+        </p:spPr>
+        <p:txBody>
+          <a:bodyPr wrap="square" rtlCol="0" anchor="ctr"/>
+          <a:lstStyle/>
+          <a:p>
+            <a:pPr marL="0" indent="0">
+              <a:buNone/>
+            </a:pPr>
+            <a:r>
+              <a:rPr lang="en-US" sz="2800" b="1" dirty="0" err="1">
+                <a:solidFill>
+                  <a:srgbClr val="FFFFFF"/>
+                </a:solidFill>
+                <a:latin typeface="Calibri" pitchFamily="34" charset="0"/>
+                <a:ea typeface="Calibri" pitchFamily="34" charset="-122"/>
+                <a:cs typeface="Calibri" pitchFamily="34" charset="-120"/>
+              </a:rPr>
+              <a:t>Orquestração</a:t>
+            </a:r>
+            <a:r>
+              <a:rPr lang="en-US" sz="2800" b="1" dirty="0">
+                <a:solidFill>
+                  <a:srgbClr val="FFFFFF"/>
+                </a:solidFill>
+                <a:latin typeface="Calibri" pitchFamily="34" charset="0"/>
+                <a:ea typeface="Calibri" pitchFamily="34" charset="-122"/>
+                <a:cs typeface="Calibri" pitchFamily="34" charset="-120"/>
+              </a:rPr>
+              <a:t> de micro-</a:t>
+            </a:r>
+            <a:r>
+              <a:rPr lang="en-US" sz="2800" b="1" dirty="0" err="1">
+                <a:solidFill>
+                  <a:srgbClr val="FFFFFF"/>
+                </a:solidFill>
+                <a:latin typeface="Calibri" pitchFamily="34" charset="0"/>
+                <a:ea typeface="Calibri" pitchFamily="34" charset="-122"/>
+                <a:cs typeface="Calibri" pitchFamily="34" charset="-120"/>
+              </a:rPr>
+              <a:t>serviços</a:t>
+            </a:r>
+            <a:endParaRPr lang="en-US" sz="2800" dirty="0"/>
+          </a:p>
+        </p:txBody>
+      </p:sp>
+      <p:sp>
+        <p:nvSpPr>
+          <p:cNvPr id="44" name="Shape 32">
+            <a:extLst>
+              <a:ext uri="{FF2B5EF4-FFF2-40B4-BE49-F238E27FC236}">
+                <a16:creationId xmlns:a16="http://schemas.microsoft.com/office/drawing/2014/main" id="{9106CEAF-25E4-06ED-FB3C-3E0BE5076279}"/>
+              </a:ext>
+            </a:extLst>
+          </p:cNvPr>
+          <p:cNvSpPr/>
+          <p:nvPr/>
+        </p:nvSpPr>
+        <p:spPr>
+          <a:xfrm>
+            <a:off x="0" y="5074920"/>
+            <a:ext cx="9144000" cy="68580"/>
+          </a:xfrm>
+          <a:prstGeom prst="rect">
+            <a:avLst/>
+          </a:prstGeom>
+          <a:solidFill>
+            <a:srgbClr val="6366F1"/>
+          </a:solidFill>
+          <a:ln w="12700">
+            <a:solidFill>
+              <a:srgbClr val="6366F1"/>
+            </a:solidFill>
+            <a:prstDash val="solid"/>
+          </a:ln>
+        </p:spPr>
+        <p:txBody>
+          <a:bodyPr/>
+          <a:lstStyle/>
+          <a:p>
+            <a:endParaRPr lang="en-US"/>
+          </a:p>
+        </p:txBody>
+      </p:sp>
+      <p:sp>
+        <p:nvSpPr>
+          <p:cNvPr id="45" name="Shape 14">
+            <a:extLst>
+              <a:ext uri="{FF2B5EF4-FFF2-40B4-BE49-F238E27FC236}">
+                <a16:creationId xmlns:a16="http://schemas.microsoft.com/office/drawing/2014/main" id="{8F24E759-4306-3A70-4E14-E95154876BE2}"/>
+              </a:ext>
+            </a:extLst>
+          </p:cNvPr>
+          <p:cNvSpPr/>
+          <p:nvPr/>
+        </p:nvSpPr>
+        <p:spPr>
+          <a:xfrm>
+            <a:off x="457201" y="859535"/>
+            <a:ext cx="3653406" cy="3463290"/>
+          </a:xfrm>
+          <a:prstGeom prst="rect">
+            <a:avLst/>
+          </a:prstGeom>
+          <a:solidFill>
+            <a:srgbClr val="1E293B"/>
+          </a:solidFill>
+          <a:ln w="12700">
+            <a:solidFill>
+              <a:srgbClr val="334155"/>
+            </a:solidFill>
+            <a:prstDash val="solid"/>
+          </a:ln>
+        </p:spPr>
+        <p:txBody>
+          <a:bodyPr/>
+          <a:lstStyle/>
+          <a:p>
+            <a:pPr marL="285750" indent="-285750">
+              <a:buFont typeface="Arial" panose="020B0604020202020204" pitchFamily="34" charset="0"/>
+              <a:buChar char="•"/>
+            </a:pPr>
+            <a:r>
+              <a:rPr lang="en-US" dirty="0" err="1">
+                <a:solidFill>
+                  <a:schemeClr val="bg1"/>
+                </a:solidFill>
+              </a:rPr>
+              <a:t>Separação</a:t>
+            </a:r>
+            <a:r>
+              <a:rPr lang="en-US" dirty="0">
+                <a:solidFill>
+                  <a:schemeClr val="bg1"/>
+                </a:solidFill>
+              </a:rPr>
+              <a:t> de micro-</a:t>
+            </a:r>
+            <a:r>
+              <a:rPr lang="en-US" dirty="0" err="1">
+                <a:solidFill>
+                  <a:schemeClr val="bg1"/>
+                </a:solidFill>
+              </a:rPr>
+              <a:t>serviços</a:t>
+            </a:r>
+            <a:r>
+              <a:rPr lang="en-US" dirty="0">
+                <a:solidFill>
+                  <a:schemeClr val="bg1"/>
+                </a:solidFill>
+              </a:rPr>
+              <a:t> com 4 containers docker</a:t>
+            </a:r>
+          </a:p>
+          <a:p>
+            <a:pPr marL="285750" indent="-285750">
+              <a:buFont typeface="Arial" panose="020B0604020202020204" pitchFamily="34" charset="0"/>
+              <a:buChar char="•"/>
+            </a:pPr>
+            <a:endParaRPr lang="en-US" dirty="0">
+              <a:solidFill>
+                <a:schemeClr val="bg1"/>
+              </a:solidFill>
+            </a:endParaRPr>
+          </a:p>
+          <a:p>
+            <a:pPr marL="285750" indent="-285750">
+              <a:buFont typeface="Arial" panose="020B0604020202020204" pitchFamily="34" charset="0"/>
+              <a:buChar char="•"/>
+            </a:pPr>
+            <a:r>
+              <a:rPr lang="en-US" dirty="0" err="1">
+                <a:solidFill>
+                  <a:schemeClr val="bg1"/>
+                </a:solidFill>
+              </a:rPr>
+              <a:t>Orquestração</a:t>
+            </a:r>
+            <a:r>
+              <a:rPr lang="en-US" dirty="0">
+                <a:solidFill>
+                  <a:schemeClr val="bg1"/>
+                </a:solidFill>
+              </a:rPr>
+              <a:t> </a:t>
+            </a:r>
+            <a:r>
+              <a:rPr lang="en-US" dirty="0" err="1">
+                <a:solidFill>
+                  <a:schemeClr val="bg1"/>
+                </a:solidFill>
+              </a:rPr>
+              <a:t>através</a:t>
+            </a:r>
+            <a:r>
+              <a:rPr lang="en-US" dirty="0">
+                <a:solidFill>
+                  <a:schemeClr val="bg1"/>
+                </a:solidFill>
+              </a:rPr>
+              <a:t> de docker compose</a:t>
+            </a:r>
+          </a:p>
+          <a:p>
+            <a:pPr marL="285750" indent="-285750">
+              <a:buFont typeface="Arial" panose="020B0604020202020204" pitchFamily="34" charset="0"/>
+              <a:buChar char="•"/>
+            </a:pPr>
+            <a:endParaRPr lang="en-US" dirty="0">
+              <a:solidFill>
+                <a:schemeClr val="bg1"/>
+              </a:solidFill>
+            </a:endParaRPr>
+          </a:p>
+          <a:p>
+            <a:pPr marL="285750" indent="-285750">
+              <a:buFont typeface="Arial" panose="020B0604020202020204" pitchFamily="34" charset="0"/>
+              <a:buChar char="•"/>
+            </a:pPr>
+            <a:r>
+              <a:rPr lang="en-US" dirty="0" err="1">
+                <a:solidFill>
+                  <a:schemeClr val="bg1"/>
+                </a:solidFill>
+              </a:rPr>
+              <a:t>Portabilidade</a:t>
+            </a:r>
+            <a:endParaRPr lang="en-US" dirty="0">
+              <a:solidFill>
+                <a:schemeClr val="bg1"/>
+              </a:solidFill>
+            </a:endParaRPr>
+          </a:p>
+          <a:p>
+            <a:pPr marL="285750" indent="-285750">
+              <a:buFont typeface="Arial" panose="020B0604020202020204" pitchFamily="34" charset="0"/>
+              <a:buChar char="•"/>
+            </a:pPr>
+            <a:endParaRPr lang="en-US" dirty="0">
+              <a:solidFill>
+                <a:schemeClr val="bg1"/>
+              </a:solidFill>
+            </a:endParaRPr>
+          </a:p>
+          <a:p>
+            <a:pPr marL="285750" indent="-285750">
+              <a:buFont typeface="Arial" panose="020B0604020202020204" pitchFamily="34" charset="0"/>
+              <a:buChar char="•"/>
+            </a:pPr>
+            <a:r>
+              <a:rPr lang="en-US" dirty="0" err="1">
+                <a:solidFill>
+                  <a:schemeClr val="bg1"/>
+                </a:solidFill>
+              </a:rPr>
+              <a:t>Funcinalidade</a:t>
+            </a:r>
+            <a:r>
+              <a:rPr lang="en-US" dirty="0">
+                <a:solidFill>
+                  <a:schemeClr val="bg1"/>
+                </a:solidFill>
+              </a:rPr>
+              <a:t>: </a:t>
+            </a:r>
+            <a:r>
+              <a:rPr lang="en-US" dirty="0" err="1">
+                <a:solidFill>
+                  <a:schemeClr val="bg1"/>
+                </a:solidFill>
+              </a:rPr>
+              <a:t>todo</a:t>
+            </a:r>
+            <a:r>
+              <a:rPr lang="en-US" dirty="0">
+                <a:solidFill>
+                  <a:schemeClr val="bg1"/>
+                </a:solidFill>
+              </a:rPr>
+              <a:t> o Sistema </a:t>
+            </a:r>
+            <a:r>
+              <a:rPr lang="en-US" dirty="0" err="1">
+                <a:solidFill>
+                  <a:schemeClr val="bg1"/>
+                </a:solidFill>
+              </a:rPr>
+              <a:t>pode</a:t>
+            </a:r>
+            <a:r>
+              <a:rPr lang="en-US" dirty="0">
+                <a:solidFill>
+                  <a:schemeClr val="bg1"/>
+                </a:solidFill>
+              </a:rPr>
+              <a:t> ser </a:t>
+            </a:r>
+            <a:r>
+              <a:rPr lang="en-US" dirty="0" err="1">
+                <a:solidFill>
+                  <a:schemeClr val="bg1"/>
+                </a:solidFill>
+              </a:rPr>
+              <a:t>executado</a:t>
+            </a:r>
+            <a:r>
+              <a:rPr lang="en-US" dirty="0">
+                <a:solidFill>
+                  <a:schemeClr val="bg1"/>
+                </a:solidFill>
+              </a:rPr>
+              <a:t> a </a:t>
+            </a:r>
+            <a:r>
+              <a:rPr lang="en-US" dirty="0" err="1">
+                <a:solidFill>
+                  <a:schemeClr val="bg1"/>
+                </a:solidFill>
+              </a:rPr>
+              <a:t>partir</a:t>
+            </a:r>
+            <a:r>
+              <a:rPr lang="en-US" dirty="0">
+                <a:solidFill>
+                  <a:schemeClr val="bg1"/>
+                </a:solidFill>
+              </a:rPr>
+              <a:t> de 1 </a:t>
+            </a:r>
+            <a:r>
+              <a:rPr lang="en-US" dirty="0" err="1">
+                <a:solidFill>
+                  <a:schemeClr val="bg1"/>
+                </a:solidFill>
+              </a:rPr>
+              <a:t>comando</a:t>
+            </a:r>
+            <a:endParaRPr lang="en-US" dirty="0">
+              <a:solidFill>
+                <a:schemeClr val="bg1"/>
+              </a:solidFill>
+            </a:endParaRPr>
+          </a:p>
+        </p:txBody>
+      </p:sp>
+      <p:sp>
+        <p:nvSpPr>
+          <p:cNvPr id="4" name="Rectangle 3">
+            <a:extLst>
+              <a:ext uri="{FF2B5EF4-FFF2-40B4-BE49-F238E27FC236}">
+                <a16:creationId xmlns:a16="http://schemas.microsoft.com/office/drawing/2014/main" id="{83F5E1A1-C00C-8611-1C93-3298E3B68BE9}"/>
+              </a:ext>
+            </a:extLst>
+          </p:cNvPr>
+          <p:cNvSpPr/>
+          <p:nvPr/>
+        </p:nvSpPr>
+        <p:spPr>
+          <a:xfrm>
+            <a:off x="4308437" y="859535"/>
+            <a:ext cx="4576195" cy="3463290"/>
+          </a:xfrm>
+          <a:prstGeom prst="rect">
+            <a:avLst/>
+          </a:prstGeom>
+          <a:solidFill>
+            <a:srgbClr val="1E1E1E"/>
+          </a:solidFill>
+          <a:ln>
+            <a:solidFill>
+              <a:srgbClr val="1E1E1E"/>
+            </a:solidFill>
+          </a:ln>
+          <a:effectLst/>
+        </p:spPr>
+        <p:style>
+          <a:lnRef idx="1">
+            <a:schemeClr val="accent1"/>
+          </a:lnRef>
+          <a:fillRef idx="3">
+            <a:schemeClr val="accent1"/>
+          </a:fillRef>
+          <a:effectRef idx="2">
+            <a:schemeClr val="accent1"/>
+          </a:effectRef>
+          <a:fontRef idx="minor">
+            <a:schemeClr val="lt1"/>
+          </a:fontRef>
+        </p:style>
+        <p:txBody>
+          <a:bodyPr rtlCol="0" anchor="ctr"/>
+          <a:lstStyle/>
+          <a:p>
+            <a:pPr algn="ctr"/>
+            <a:endParaRPr/>
+          </a:p>
+        </p:txBody>
+      </p:sp>
+      <p:sp>
+        <p:nvSpPr>
+          <p:cNvPr id="6" name="TextBox 5">
+            <a:extLst>
+              <a:ext uri="{FF2B5EF4-FFF2-40B4-BE49-F238E27FC236}">
+                <a16:creationId xmlns:a16="http://schemas.microsoft.com/office/drawing/2014/main" id="{C605725D-ABFD-622F-D90C-467E796F33C5}"/>
+              </a:ext>
+            </a:extLst>
+          </p:cNvPr>
+          <p:cNvSpPr txBox="1"/>
+          <p:nvPr/>
+        </p:nvSpPr>
+        <p:spPr>
+          <a:xfrm>
+            <a:off x="4308437" y="830526"/>
+            <a:ext cx="4576195" cy="3139321"/>
+          </a:xfrm>
+          <a:prstGeom prst="rect">
+            <a:avLst/>
+          </a:prstGeom>
+          <a:noFill/>
+        </p:spPr>
+        <p:txBody>
+          <a:bodyPr wrap="square" lIns="45720">
+            <a:spAutoFit/>
+          </a:bodyPr>
+          <a:lstStyle/>
+          <a:p>
+            <a:pPr>
+              <a:lnSpc>
+                <a:spcPct val="100000"/>
+              </a:lnSpc>
+            </a:pPr>
+            <a:r>
+              <a:rPr sz="1100" dirty="0">
+                <a:solidFill>
+                  <a:srgbClr val="D0E0E0"/>
+                </a:solidFill>
+                <a:latin typeface="Consolas"/>
+              </a:rPr>
+              <a:t>services:</a:t>
+            </a:r>
+          </a:p>
+          <a:p>
+            <a:pPr>
+              <a:lnSpc>
+                <a:spcPct val="100000"/>
+              </a:lnSpc>
+            </a:pPr>
+            <a:r>
+              <a:rPr sz="1100" dirty="0">
+                <a:solidFill>
+                  <a:srgbClr val="D0E0E0"/>
+                </a:solidFill>
+                <a:latin typeface="Consolas"/>
+              </a:rPr>
+              <a:t>  </a:t>
+            </a:r>
+            <a:r>
+              <a:rPr sz="1100" dirty="0" err="1">
+                <a:solidFill>
+                  <a:srgbClr val="D0E0E0"/>
+                </a:solidFill>
+                <a:latin typeface="Consolas"/>
+              </a:rPr>
+              <a:t>mongodb</a:t>
+            </a:r>
+            <a:r>
+              <a:rPr sz="1100" dirty="0">
+                <a:solidFill>
+                  <a:srgbClr val="D0E0E0"/>
+                </a:solidFill>
+                <a:latin typeface="Consolas"/>
+              </a:rPr>
+              <a:t>:</a:t>
+            </a:r>
+          </a:p>
+          <a:p>
+            <a:pPr>
+              <a:lnSpc>
+                <a:spcPct val="100000"/>
+              </a:lnSpc>
+            </a:pPr>
+            <a:r>
+              <a:rPr sz="1100" dirty="0">
+                <a:solidFill>
+                  <a:srgbClr val="D0E0E0"/>
+                </a:solidFill>
+                <a:latin typeface="Consolas"/>
+              </a:rPr>
+              <a:t>    build: ./</a:t>
+            </a:r>
+            <a:r>
+              <a:rPr lang="pt-PT" sz="1100" dirty="0" err="1">
+                <a:solidFill>
+                  <a:srgbClr val="D0E0E0"/>
+                </a:solidFill>
+                <a:latin typeface="Consolas"/>
+              </a:rPr>
+              <a:t>Database</a:t>
+            </a:r>
+            <a:endParaRPr sz="1100" dirty="0">
+              <a:solidFill>
+                <a:srgbClr val="D0E0E0"/>
+              </a:solidFill>
+              <a:latin typeface="Consolas"/>
+            </a:endParaRPr>
+          </a:p>
+          <a:p>
+            <a:pPr>
+              <a:lnSpc>
+                <a:spcPct val="100000"/>
+              </a:lnSpc>
+            </a:pPr>
+            <a:r>
+              <a:rPr sz="1100" dirty="0">
+                <a:solidFill>
+                  <a:srgbClr val="D0E0E0"/>
+                </a:solidFill>
+                <a:latin typeface="Consolas"/>
+              </a:rPr>
+              <a:t>    volumes: [mongo-data:/data/</a:t>
+            </a:r>
+            <a:r>
+              <a:rPr sz="1100" dirty="0" err="1">
+                <a:solidFill>
+                  <a:srgbClr val="D0E0E0"/>
+                </a:solidFill>
+                <a:latin typeface="Consolas"/>
+              </a:rPr>
+              <a:t>db</a:t>
+            </a:r>
+            <a:r>
+              <a:rPr sz="1100" dirty="0">
+                <a:solidFill>
+                  <a:srgbClr val="D0E0E0"/>
+                </a:solidFill>
+                <a:latin typeface="Consolas"/>
+              </a:rPr>
+              <a:t>]</a:t>
+            </a:r>
+            <a:endParaRPr lang="pt-PT" sz="1100" dirty="0">
+              <a:solidFill>
+                <a:srgbClr val="D0E0E0"/>
+              </a:solidFill>
+              <a:latin typeface="Consolas"/>
+            </a:endParaRPr>
+          </a:p>
+          <a:p>
+            <a:pPr>
+              <a:lnSpc>
+                <a:spcPct val="100000"/>
+              </a:lnSpc>
+            </a:pPr>
+            <a:endParaRPr sz="1100" dirty="0">
+              <a:solidFill>
+                <a:srgbClr val="D0E0E0"/>
+              </a:solidFill>
+              <a:latin typeface="Consolas"/>
+            </a:endParaRPr>
+          </a:p>
+          <a:p>
+            <a:pPr>
+              <a:lnSpc>
+                <a:spcPct val="100000"/>
+              </a:lnSpc>
+            </a:pPr>
+            <a:r>
+              <a:rPr sz="1100" dirty="0">
+                <a:solidFill>
+                  <a:srgbClr val="D0E0E0"/>
+                </a:solidFill>
+                <a:latin typeface="Consolas"/>
+              </a:rPr>
+              <a:t>  data-</a:t>
+            </a:r>
+            <a:r>
+              <a:rPr sz="1100" dirty="0" err="1">
+                <a:solidFill>
+                  <a:srgbClr val="D0E0E0"/>
+                </a:solidFill>
+                <a:latin typeface="Consolas"/>
+              </a:rPr>
+              <a:t>api</a:t>
+            </a:r>
+            <a:r>
+              <a:rPr sz="1100" dirty="0">
+                <a:solidFill>
+                  <a:srgbClr val="D0E0E0"/>
+                </a:solidFill>
+                <a:latin typeface="Consolas"/>
+              </a:rPr>
+              <a:t>:</a:t>
+            </a:r>
+          </a:p>
+          <a:p>
+            <a:pPr>
+              <a:lnSpc>
+                <a:spcPct val="100000"/>
+              </a:lnSpc>
+            </a:pPr>
+            <a:r>
+              <a:rPr sz="1100" dirty="0">
+                <a:solidFill>
+                  <a:srgbClr val="D0E0E0"/>
+                </a:solidFill>
+                <a:latin typeface="Consolas"/>
+              </a:rPr>
+              <a:t>    build: ./</a:t>
+            </a:r>
+            <a:r>
+              <a:rPr lang="pt-PT" sz="1100" dirty="0" err="1">
+                <a:solidFill>
+                  <a:srgbClr val="D0E0E0"/>
+                </a:solidFill>
+                <a:latin typeface="Consolas"/>
+              </a:rPr>
+              <a:t>Database</a:t>
+            </a:r>
+            <a:endParaRPr sz="1100" dirty="0">
+              <a:solidFill>
+                <a:srgbClr val="D0E0E0"/>
+              </a:solidFill>
+              <a:latin typeface="Consolas"/>
+            </a:endParaRPr>
+          </a:p>
+          <a:p>
+            <a:pPr>
+              <a:lnSpc>
+                <a:spcPct val="100000"/>
+              </a:lnSpc>
+            </a:pPr>
+            <a:r>
+              <a:rPr sz="1100" dirty="0">
+                <a:solidFill>
+                  <a:srgbClr val="D0E0E0"/>
+                </a:solidFill>
+                <a:latin typeface="Consolas"/>
+              </a:rPr>
+              <a:t>    </a:t>
+            </a:r>
+            <a:r>
+              <a:rPr sz="1100" dirty="0" err="1">
+                <a:solidFill>
+                  <a:srgbClr val="D0E0E0"/>
+                </a:solidFill>
+                <a:latin typeface="Consolas"/>
+              </a:rPr>
+              <a:t>depends_on</a:t>
+            </a:r>
+            <a:r>
+              <a:rPr sz="1100" dirty="0">
+                <a:solidFill>
+                  <a:srgbClr val="D0E0E0"/>
+                </a:solidFill>
+                <a:latin typeface="Consolas"/>
+              </a:rPr>
+              <a:t>: [</a:t>
+            </a:r>
+            <a:r>
+              <a:rPr sz="1100" dirty="0" err="1">
+                <a:solidFill>
+                  <a:srgbClr val="D0E0E0"/>
+                </a:solidFill>
+                <a:latin typeface="Consolas"/>
+              </a:rPr>
+              <a:t>mongodb</a:t>
+            </a:r>
+            <a:r>
+              <a:rPr sz="1100" dirty="0">
+                <a:solidFill>
+                  <a:srgbClr val="D0E0E0"/>
+                </a:solidFill>
+                <a:latin typeface="Consolas"/>
+              </a:rPr>
+              <a:t>]</a:t>
+            </a:r>
+            <a:endParaRPr lang="en-US" sz="1100" dirty="0">
+              <a:solidFill>
+                <a:srgbClr val="D0E0E0"/>
+              </a:solidFill>
+              <a:latin typeface="Consolas"/>
+            </a:endParaRPr>
+          </a:p>
+          <a:p>
+            <a:pPr>
+              <a:lnSpc>
+                <a:spcPct val="100000"/>
+              </a:lnSpc>
+            </a:pPr>
+            <a:r>
+              <a:rPr lang="en-US" sz="1100" dirty="0">
+                <a:solidFill>
+                  <a:srgbClr val="D0E0E0"/>
+                </a:solidFill>
+                <a:latin typeface="Consolas"/>
+              </a:rPr>
+              <a:t>    ports: “${DATA_API_PORT}:3001”</a:t>
+            </a:r>
+          </a:p>
+          <a:p>
+            <a:pPr>
+              <a:lnSpc>
+                <a:spcPct val="100000"/>
+              </a:lnSpc>
+            </a:pPr>
+            <a:endParaRPr lang="en-US" sz="1100" dirty="0">
+              <a:solidFill>
+                <a:srgbClr val="D0E0E0"/>
+              </a:solidFill>
+              <a:latin typeface="Consolas"/>
+            </a:endParaRPr>
+          </a:p>
+          <a:p>
+            <a:pPr>
+              <a:lnSpc>
+                <a:spcPct val="100000"/>
+              </a:lnSpc>
+            </a:pPr>
+            <a:r>
+              <a:rPr sz="1100" dirty="0">
+                <a:solidFill>
+                  <a:srgbClr val="D0E0E0"/>
+                </a:solidFill>
+                <a:latin typeface="Consolas"/>
+              </a:rPr>
+              <a:t>  </a:t>
+            </a:r>
+            <a:r>
+              <a:rPr lang="pt-PT" sz="1100" dirty="0" err="1">
+                <a:solidFill>
+                  <a:srgbClr val="D0E0E0"/>
+                </a:solidFill>
+                <a:latin typeface="Consolas"/>
+              </a:rPr>
+              <a:t>ln</a:t>
+            </a:r>
+            <a:r>
+              <a:rPr sz="1100" dirty="0">
+                <a:solidFill>
+                  <a:srgbClr val="D0E0E0"/>
+                </a:solidFill>
+                <a:latin typeface="Consolas"/>
+              </a:rPr>
+              <a:t>:</a:t>
+            </a:r>
+          </a:p>
+          <a:p>
+            <a:pPr>
+              <a:lnSpc>
+                <a:spcPct val="100000"/>
+              </a:lnSpc>
+            </a:pPr>
+            <a:r>
+              <a:rPr sz="1100" dirty="0">
+                <a:solidFill>
+                  <a:srgbClr val="D0E0E0"/>
+                </a:solidFill>
+                <a:latin typeface="Consolas"/>
+              </a:rPr>
+              <a:t>    build: ./</a:t>
+            </a:r>
+            <a:r>
+              <a:rPr lang="pt-PT" sz="1100" dirty="0" err="1">
+                <a:solidFill>
+                  <a:srgbClr val="D0E0E0"/>
+                </a:solidFill>
+                <a:latin typeface="Consolas"/>
+              </a:rPr>
+              <a:t>Backend</a:t>
+            </a:r>
+            <a:endParaRPr sz="1100" dirty="0">
+              <a:solidFill>
+                <a:srgbClr val="D0E0E0"/>
+              </a:solidFill>
+              <a:latin typeface="Consolas"/>
+            </a:endParaRPr>
+          </a:p>
+          <a:p>
+            <a:pPr>
+              <a:lnSpc>
+                <a:spcPct val="100000"/>
+              </a:lnSpc>
+            </a:pPr>
+            <a:r>
+              <a:rPr sz="1100" dirty="0">
+                <a:solidFill>
+                  <a:srgbClr val="D0E0E0"/>
+                </a:solidFill>
+                <a:latin typeface="Consolas"/>
+              </a:rPr>
+              <a:t>    </a:t>
+            </a:r>
+            <a:r>
+              <a:rPr sz="1100" dirty="0" err="1">
+                <a:solidFill>
+                  <a:srgbClr val="D0E0E0"/>
+                </a:solidFill>
+                <a:latin typeface="Consolas"/>
+              </a:rPr>
+              <a:t>depends_on</a:t>
+            </a:r>
+            <a:r>
+              <a:rPr sz="1100" dirty="0">
+                <a:solidFill>
+                  <a:srgbClr val="D0E0E0"/>
+                </a:solidFill>
+                <a:latin typeface="Consolas"/>
+              </a:rPr>
+              <a:t>: [data-</a:t>
+            </a:r>
+            <a:r>
+              <a:rPr sz="1100" dirty="0" err="1">
+                <a:solidFill>
+                  <a:srgbClr val="D0E0E0"/>
+                </a:solidFill>
+                <a:latin typeface="Consolas"/>
+              </a:rPr>
+              <a:t>api</a:t>
+            </a:r>
+            <a:r>
+              <a:rPr sz="1100" dirty="0">
+                <a:solidFill>
+                  <a:srgbClr val="D0E0E0"/>
+                </a:solidFill>
+                <a:latin typeface="Consolas"/>
+              </a:rPr>
+              <a:t>]</a:t>
+            </a:r>
+          </a:p>
+          <a:p>
+            <a:pPr>
+              <a:lnSpc>
+                <a:spcPct val="100000"/>
+              </a:lnSpc>
+            </a:pPr>
+            <a:r>
+              <a:rPr sz="1100" dirty="0">
+                <a:solidFill>
+                  <a:srgbClr val="D0E0E0"/>
+                </a:solidFill>
+                <a:latin typeface="Consolas"/>
+              </a:rPr>
+              <a:t>    </a:t>
+            </a:r>
+            <a:r>
+              <a:rPr lang="pt-PT" sz="1100" dirty="0" err="1">
+                <a:solidFill>
+                  <a:srgbClr val="D0E0E0"/>
+                </a:solidFill>
+                <a:latin typeface="Consolas"/>
+              </a:rPr>
+              <a:t>ports</a:t>
+            </a:r>
+            <a:r>
+              <a:rPr sz="1100" dirty="0">
+                <a:solidFill>
+                  <a:srgbClr val="D0E0E0"/>
+                </a:solidFill>
+                <a:latin typeface="Consolas"/>
+              </a:rPr>
+              <a:t>: </a:t>
+            </a:r>
+            <a:r>
+              <a:rPr lang="en-US" sz="1100" dirty="0">
+                <a:solidFill>
+                  <a:srgbClr val="D0E0E0"/>
+                </a:solidFill>
+                <a:latin typeface="Consolas"/>
+              </a:rPr>
+              <a:t>“${LN_API_PORT}:3001”</a:t>
+            </a:r>
+          </a:p>
+          <a:p>
+            <a:pPr>
+              <a:lnSpc>
+                <a:spcPct val="100000"/>
+              </a:lnSpc>
+            </a:pPr>
+            <a:endParaRPr sz="1100" dirty="0">
+              <a:solidFill>
+                <a:srgbClr val="D0E0E0"/>
+              </a:solidFill>
+              <a:latin typeface="Consolas"/>
+            </a:endParaRPr>
+          </a:p>
+          <a:p>
+            <a:pPr>
+              <a:lnSpc>
+                <a:spcPct val="100000"/>
+              </a:lnSpc>
+            </a:pPr>
+            <a:r>
+              <a:rPr sz="1100" dirty="0">
+                <a:solidFill>
+                  <a:srgbClr val="D0E0E0"/>
+                </a:solidFill>
+                <a:latin typeface="Consolas"/>
+              </a:rPr>
+              <a:t>  </a:t>
+            </a:r>
+            <a:r>
+              <a:rPr lang="pt-PT" sz="1100" dirty="0" err="1">
+                <a:solidFill>
+                  <a:srgbClr val="D0E0E0"/>
+                </a:solidFill>
+                <a:latin typeface="Consolas"/>
+              </a:rPr>
+              <a:t>frontend</a:t>
+            </a:r>
+            <a:r>
+              <a:rPr sz="1100" dirty="0">
+                <a:solidFill>
+                  <a:srgbClr val="D0E0E0"/>
+                </a:solidFill>
+                <a:latin typeface="Consolas"/>
+              </a:rPr>
+              <a:t>:</a:t>
+            </a:r>
+          </a:p>
+          <a:p>
+            <a:pPr>
+              <a:lnSpc>
+                <a:spcPct val="100000"/>
+              </a:lnSpc>
+            </a:pPr>
+            <a:r>
+              <a:rPr sz="1100" dirty="0">
+                <a:solidFill>
+                  <a:srgbClr val="D0E0E0"/>
+                </a:solidFill>
+                <a:latin typeface="Consolas"/>
+              </a:rPr>
+              <a:t>    build: ./</a:t>
+            </a:r>
+            <a:r>
+              <a:rPr lang="pt-PT" sz="1100" dirty="0" err="1">
+                <a:solidFill>
+                  <a:srgbClr val="D0E0E0"/>
+                </a:solidFill>
+                <a:latin typeface="Consolas"/>
+              </a:rPr>
+              <a:t>Frontend</a:t>
+            </a:r>
+            <a:endParaRPr sz="1100" dirty="0">
+              <a:solidFill>
+                <a:srgbClr val="D0E0E0"/>
+              </a:solidFill>
+              <a:latin typeface="Consolas"/>
+            </a:endParaRPr>
+          </a:p>
+          <a:p>
+            <a:pPr>
+              <a:lnSpc>
+                <a:spcPct val="100000"/>
+              </a:lnSpc>
+            </a:pPr>
+            <a:r>
+              <a:rPr lang="pt-PT" sz="1100" dirty="0">
+                <a:solidFill>
+                  <a:srgbClr val="D0E0E0"/>
+                </a:solidFill>
+                <a:latin typeface="Consolas"/>
+              </a:rPr>
+              <a:t>    </a:t>
+            </a:r>
+            <a:r>
+              <a:rPr lang="pt-PT" sz="1100" dirty="0" err="1">
+                <a:solidFill>
+                  <a:srgbClr val="D0E0E0"/>
+                </a:solidFill>
+                <a:latin typeface="Consolas"/>
+              </a:rPr>
+              <a:t>ports</a:t>
+            </a:r>
+            <a:r>
+              <a:rPr sz="1100" dirty="0">
+                <a:solidFill>
+                  <a:srgbClr val="D0E0E0"/>
+                </a:solidFill>
+                <a:latin typeface="Consolas"/>
+              </a:rPr>
+              <a:t>:</a:t>
+            </a:r>
+            <a:r>
+              <a:rPr lang="pt-PT" sz="1100" dirty="0">
+                <a:solidFill>
+                  <a:srgbClr val="D0E0E0"/>
+                </a:solidFill>
+                <a:latin typeface="Consolas"/>
+              </a:rPr>
+              <a:t>”3000:3000"</a:t>
+            </a:r>
+            <a:endParaRPr sz="1100" dirty="0">
+              <a:solidFill>
+                <a:srgbClr val="D0E0E0"/>
+              </a:solidFill>
+              <a:latin typeface="Consolas"/>
+            </a:endParaRPr>
+          </a:p>
+        </p:txBody>
+      </p:sp>
+    </p:spTree>
+    <p:extLst>
+      <p:ext uri="{BB962C8B-B14F-4D97-AF65-F5344CB8AC3E}">
+        <p14:creationId xmlns:p14="http://schemas.microsoft.com/office/powerpoint/2010/main" val="3657609351"/>
+      </p:ext>
+    </p:extLst>
+  </p:cSld>
+  <p:clrMapOvr>
+    <a:masterClrMapping/>
+  </p:clrMapOvr>
+</p:sld>
+</file>
+
+<file path=ppt/slides/slide12.xml><?xml version="1.0" encoding="utf-8"?>
+<p:sld xmlns:a="http://schemas.openxmlformats.org/drawingml/2006/main" xmlns:r="http://schemas.openxmlformats.org/officeDocument/2006/relationships" xmlns:p="http://schemas.openxmlformats.org/presentationml/2006/main">
+  <p:cSld name="Slide 7">
+    <p:bg>
+      <p:bgPr>
+        <a:solidFill>
+          <a:srgbClr val="0F172A"/>
+        </a:solidFill>
+        <a:effectLst/>
+      </p:bgPr>
+    </p:bg>
+    <p:spTree>
+      <p:nvGrpSpPr>
+        <p:cNvPr id="1" name=""/>
+        <p:cNvGrpSpPr/>
+        <p:nvPr/>
+      </p:nvGrpSpPr>
+      <p:grpSpPr>
+        <a:xfrm>
+          <a:off x="0" y="0"/>
+          <a:ext cx="0" cy="0"/>
+          <a:chOff x="0" y="0"/>
+          <a:chExt cx="0" cy="0"/>
+        </a:xfrm>
+      </p:grpSpPr>
+      <p:sp>
+        <p:nvSpPr>
+          <p:cNvPr id="2" name="Shape 0"/>
+          <p:cNvSpPr/>
+          <p:nvPr/>
+        </p:nvSpPr>
+        <p:spPr>
+          <a:xfrm>
+            <a:off x="0" y="0"/>
+            <a:ext cx="9144000" cy="64008"/>
+          </a:xfrm>
+          <a:prstGeom prst="rect">
+            <a:avLst/>
+          </a:prstGeom>
+          <a:solidFill>
+            <a:srgbClr val="0EA5E9"/>
+          </a:solidFill>
+          <a:ln w="12700">
+            <a:solidFill>
+              <a:srgbClr val="0EA5E9"/>
+            </a:solidFill>
+            <a:prstDash val="solid"/>
+          </a:ln>
+        </p:spPr>
+        <p:txBody>
+          <a:bodyPr/>
+          <a:lstStyle/>
+          <a:p>
+            <a:endParaRPr lang="en-US"/>
+          </a:p>
+        </p:txBody>
+      </p:sp>
+      <p:sp>
+        <p:nvSpPr>
+          <p:cNvPr id="3" name="Text 1"/>
+          <p:cNvSpPr/>
+          <p:nvPr/>
+        </p:nvSpPr>
+        <p:spPr>
+          <a:xfrm>
+            <a:off x="457200" y="164592"/>
+            <a:ext cx="8229600" cy="594360"/>
+          </a:xfrm>
+          <a:prstGeom prst="rect">
+            <a:avLst/>
+          </a:prstGeom>
+          <a:noFill/>
+          <a:ln/>
+        </p:spPr>
+        <p:txBody>
+          <a:bodyPr wrap="square" rtlCol="0" anchor="ctr"/>
+          <a:lstStyle/>
+          <a:p>
+            <a:pPr marL="0" indent="0">
+              <a:buNone/>
+            </a:pPr>
+            <a:r>
+              <a:rPr lang="en-US" sz="2800" b="1" dirty="0">
+                <a:solidFill>
+                  <a:srgbClr val="FFFFFF"/>
+                </a:solidFill>
+                <a:latin typeface="Calibri" pitchFamily="34" charset="0"/>
+                <a:ea typeface="Calibri" pitchFamily="34" charset="-122"/>
+                <a:cs typeface="Calibri" pitchFamily="34" charset="-120"/>
+              </a:rPr>
+              <a:t>Segurança e Controlo de Acessos</a:t>
+            </a:r>
+            <a:endParaRPr lang="en-US" sz="2800" dirty="0"/>
+          </a:p>
+        </p:txBody>
+      </p:sp>
+      <p:sp>
+        <p:nvSpPr>
+          <p:cNvPr id="4" name="Shape 2"/>
+          <p:cNvSpPr/>
+          <p:nvPr/>
+        </p:nvSpPr>
+        <p:spPr>
+          <a:xfrm>
+            <a:off x="274320" y="960120"/>
+            <a:ext cx="1371600" cy="1005840"/>
+          </a:xfrm>
+          <a:prstGeom prst="ellipse">
+            <a:avLst/>
+          </a:prstGeom>
+          <a:solidFill>
+            <a:srgbClr val="1E3A5F"/>
+          </a:solidFill>
+          <a:ln w="25400">
+            <a:solidFill>
+              <a:srgbClr val="0EA5E9"/>
+            </a:solidFill>
+            <a:prstDash val="solid"/>
+          </a:ln>
+        </p:spPr>
+        <p:txBody>
+          <a:bodyPr/>
+          <a:lstStyle/>
+          <a:p>
+            <a:endParaRPr lang="en-US"/>
+          </a:p>
+        </p:txBody>
+      </p:sp>
+      <p:sp>
+        <p:nvSpPr>
+          <p:cNvPr id="5" name="Text 3"/>
+          <p:cNvSpPr/>
+          <p:nvPr/>
+        </p:nvSpPr>
+        <p:spPr>
+          <a:xfrm>
+            <a:off x="274320" y="987552"/>
+            <a:ext cx="1371600" cy="411480"/>
+          </a:xfrm>
+          <a:prstGeom prst="rect">
+            <a:avLst/>
+          </a:prstGeom>
+          <a:noFill/>
+          <a:ln/>
+        </p:spPr>
+        <p:txBody>
+          <a:bodyPr wrap="square" rtlCol="0" anchor="ctr"/>
+          <a:lstStyle/>
+          <a:p>
+            <a:pPr marL="0" indent="0" algn="ctr">
+              <a:buNone/>
+            </a:pPr>
+            <a:r>
+              <a:rPr lang="en-US" sz="2200" b="1" dirty="0">
+                <a:solidFill>
+                  <a:srgbClr val="0EA5E9"/>
+                </a:solidFill>
+                <a:latin typeface="Calibri" pitchFamily="34" charset="0"/>
+                <a:ea typeface="Calibri" pitchFamily="34" charset="-122"/>
+                <a:cs typeface="Calibri" pitchFamily="34" charset="-120"/>
+              </a:rPr>
+              <a:t>1</a:t>
+            </a:r>
+            <a:endParaRPr lang="en-US" sz="2200" dirty="0"/>
+          </a:p>
+        </p:txBody>
+      </p:sp>
+      <p:sp>
+        <p:nvSpPr>
+          <p:cNvPr id="6" name="Text 4"/>
+          <p:cNvSpPr/>
+          <p:nvPr/>
+        </p:nvSpPr>
+        <p:spPr>
+          <a:xfrm>
+            <a:off x="274320" y="1417320"/>
+            <a:ext cx="1371600" cy="274320"/>
+          </a:xfrm>
+          <a:prstGeom prst="rect">
+            <a:avLst/>
+          </a:prstGeom>
+          <a:noFill/>
+          <a:ln/>
+        </p:spPr>
+        <p:txBody>
+          <a:bodyPr wrap="square" rtlCol="0" anchor="ctr"/>
+          <a:lstStyle/>
+          <a:p>
+            <a:pPr marL="0" indent="0" algn="ctr">
+              <a:buNone/>
+            </a:pPr>
+            <a:r>
+              <a:rPr lang="en-US" sz="1100" b="1" dirty="0">
+                <a:solidFill>
+                  <a:srgbClr val="FFFFFF"/>
+                </a:solidFill>
+                <a:latin typeface="Calibri" pitchFamily="34" charset="0"/>
+                <a:ea typeface="Calibri" pitchFamily="34" charset="-122"/>
+                <a:cs typeface="Calibri" pitchFamily="34" charset="-120"/>
+              </a:rPr>
+              <a:t>Login</a:t>
+            </a:r>
+            <a:endParaRPr lang="en-US" sz="1100" dirty="0"/>
+          </a:p>
+        </p:txBody>
+      </p:sp>
+      <p:sp>
+        <p:nvSpPr>
+          <p:cNvPr id="7" name="Text 5"/>
+          <p:cNvSpPr/>
+          <p:nvPr/>
+        </p:nvSpPr>
+        <p:spPr>
+          <a:xfrm>
+            <a:off x="274320" y="2103120"/>
+            <a:ext cx="1371600" cy="274320"/>
+          </a:xfrm>
+          <a:prstGeom prst="rect">
+            <a:avLst/>
+          </a:prstGeom>
+          <a:noFill/>
+          <a:ln/>
+        </p:spPr>
+        <p:txBody>
+          <a:bodyPr wrap="square" rtlCol="0" anchor="ctr"/>
+          <a:lstStyle/>
+          <a:p>
+            <a:pPr marL="0" indent="0" algn="ctr">
+              <a:buNone/>
+            </a:pPr>
+            <a:r>
+              <a:rPr lang="en-US" sz="1000" dirty="0">
+                <a:solidFill>
+                  <a:srgbClr val="94A3B8"/>
+                </a:solidFill>
+                <a:latin typeface="Calibri" pitchFamily="34" charset="0"/>
+                <a:ea typeface="Calibri" pitchFamily="34" charset="-122"/>
+                <a:cs typeface="Calibri" pitchFamily="34" charset="-120"/>
+              </a:rPr>
+              <a:t>NIF/Nº Mecan.</a:t>
+            </a:r>
+            <a:endParaRPr lang="en-US" sz="1000" dirty="0"/>
+          </a:p>
+        </p:txBody>
+      </p:sp>
+      <p:sp>
+        <p:nvSpPr>
+          <p:cNvPr id="8" name="Shape 6"/>
+          <p:cNvSpPr/>
+          <p:nvPr/>
+        </p:nvSpPr>
+        <p:spPr>
+          <a:xfrm>
+            <a:off x="1645920" y="1417320"/>
+            <a:ext cx="347472" cy="45720"/>
+          </a:xfrm>
+          <a:prstGeom prst="rect">
+            <a:avLst/>
+          </a:prstGeom>
+          <a:solidFill>
+            <a:srgbClr val="334155"/>
+          </a:solidFill>
+          <a:ln w="12700">
+            <a:solidFill>
+              <a:srgbClr val="334155"/>
+            </a:solidFill>
+            <a:prstDash val="solid"/>
+          </a:ln>
+        </p:spPr>
+        <p:txBody>
+          <a:bodyPr/>
+          <a:lstStyle/>
+          <a:p>
+            <a:endParaRPr lang="en-US"/>
+          </a:p>
+        </p:txBody>
+      </p:sp>
+      <p:sp>
+        <p:nvSpPr>
+          <p:cNvPr id="9" name="Shape 7"/>
+          <p:cNvSpPr/>
+          <p:nvPr/>
+        </p:nvSpPr>
+        <p:spPr>
+          <a:xfrm>
+            <a:off x="1993392" y="960120"/>
+            <a:ext cx="1371600" cy="1005840"/>
+          </a:xfrm>
+          <a:prstGeom prst="ellipse">
+            <a:avLst/>
+          </a:prstGeom>
+          <a:solidFill>
+            <a:srgbClr val="1E3A5F"/>
+          </a:solidFill>
+          <a:ln w="25400">
+            <a:solidFill>
+              <a:srgbClr val="0EA5E9"/>
+            </a:solidFill>
+            <a:prstDash val="solid"/>
+          </a:ln>
+        </p:spPr>
+        <p:txBody>
+          <a:bodyPr/>
+          <a:lstStyle/>
+          <a:p>
+            <a:endParaRPr lang="en-US"/>
+          </a:p>
+        </p:txBody>
+      </p:sp>
+      <p:sp>
+        <p:nvSpPr>
+          <p:cNvPr id="10" name="Text 8"/>
+          <p:cNvSpPr/>
+          <p:nvPr/>
+        </p:nvSpPr>
+        <p:spPr>
+          <a:xfrm>
+            <a:off x="1993392" y="987552"/>
+            <a:ext cx="1371600" cy="411480"/>
+          </a:xfrm>
+          <a:prstGeom prst="rect">
+            <a:avLst/>
+          </a:prstGeom>
+          <a:noFill/>
+          <a:ln/>
+        </p:spPr>
+        <p:txBody>
+          <a:bodyPr wrap="square" rtlCol="0" anchor="ctr"/>
+          <a:lstStyle/>
+          <a:p>
+            <a:pPr marL="0" indent="0" algn="ctr">
+              <a:buNone/>
+            </a:pPr>
+            <a:r>
+              <a:rPr lang="en-US" sz="2200" b="1" dirty="0">
+                <a:solidFill>
+                  <a:srgbClr val="0EA5E9"/>
+                </a:solidFill>
+                <a:latin typeface="Calibri" pitchFamily="34" charset="0"/>
+                <a:ea typeface="Calibri" pitchFamily="34" charset="-122"/>
+                <a:cs typeface="Calibri" pitchFamily="34" charset="-120"/>
+              </a:rPr>
+              <a:t>2</a:t>
+            </a:r>
+            <a:endParaRPr lang="en-US" sz="2200" dirty="0"/>
+          </a:p>
+        </p:txBody>
+      </p:sp>
+      <p:sp>
+        <p:nvSpPr>
+          <p:cNvPr id="11" name="Text 9"/>
+          <p:cNvSpPr/>
+          <p:nvPr/>
+        </p:nvSpPr>
+        <p:spPr>
+          <a:xfrm>
+            <a:off x="1993392" y="1417320"/>
+            <a:ext cx="1371600" cy="274320"/>
+          </a:xfrm>
+          <a:prstGeom prst="rect">
+            <a:avLst/>
+          </a:prstGeom>
+          <a:noFill/>
+          <a:ln/>
+        </p:spPr>
+        <p:txBody>
+          <a:bodyPr wrap="square" rtlCol="0" anchor="ctr"/>
+          <a:lstStyle/>
+          <a:p>
+            <a:pPr marL="0" indent="0" algn="ctr">
+              <a:buNone/>
+            </a:pPr>
+            <a:r>
+              <a:rPr lang="en-US" sz="1100" b="1" dirty="0">
+                <a:solidFill>
+                  <a:srgbClr val="FFFFFF"/>
+                </a:solidFill>
+                <a:latin typeface="Calibri" pitchFamily="34" charset="0"/>
+                <a:ea typeface="Calibri" pitchFamily="34" charset="-122"/>
+                <a:cs typeface="Calibri" pitchFamily="34" charset="-120"/>
+              </a:rPr>
+              <a:t>BCrypt</a:t>
+            </a:r>
+            <a:endParaRPr lang="en-US" sz="1100" dirty="0"/>
+          </a:p>
+        </p:txBody>
+      </p:sp>
+      <p:sp>
+        <p:nvSpPr>
+          <p:cNvPr id="12" name="Text 10"/>
+          <p:cNvSpPr/>
+          <p:nvPr/>
+        </p:nvSpPr>
+        <p:spPr>
+          <a:xfrm>
+            <a:off x="1993392" y="2103120"/>
+            <a:ext cx="1371600" cy="274320"/>
+          </a:xfrm>
+          <a:prstGeom prst="rect">
+            <a:avLst/>
+          </a:prstGeom>
+          <a:noFill/>
+          <a:ln/>
+        </p:spPr>
+        <p:txBody>
+          <a:bodyPr wrap="square" rtlCol="0" anchor="ctr"/>
+          <a:lstStyle/>
+          <a:p>
+            <a:pPr marL="0" indent="0" algn="ctr">
+              <a:buNone/>
+            </a:pPr>
+            <a:r>
+              <a:rPr lang="en-US" sz="1000" dirty="0">
+                <a:solidFill>
+                  <a:srgbClr val="94A3B8"/>
+                </a:solidFill>
+                <a:latin typeface="Calibri" pitchFamily="34" charset="0"/>
+                <a:ea typeface="Calibri" pitchFamily="34" charset="-122"/>
+                <a:cs typeface="Calibri" pitchFamily="34" charset="-120"/>
+              </a:rPr>
+              <a:t>Verificação hash</a:t>
+            </a:r>
+            <a:endParaRPr lang="en-US" sz="1000" dirty="0"/>
+          </a:p>
+        </p:txBody>
+      </p:sp>
+      <p:sp>
+        <p:nvSpPr>
+          <p:cNvPr id="13" name="Shape 11"/>
+          <p:cNvSpPr/>
+          <p:nvPr/>
+        </p:nvSpPr>
+        <p:spPr>
+          <a:xfrm>
+            <a:off x="3364992" y="1417320"/>
+            <a:ext cx="347472" cy="45720"/>
+          </a:xfrm>
+          <a:prstGeom prst="rect">
+            <a:avLst/>
+          </a:prstGeom>
+          <a:solidFill>
+            <a:srgbClr val="334155"/>
+          </a:solidFill>
+          <a:ln w="12700">
+            <a:solidFill>
+              <a:srgbClr val="334155"/>
+            </a:solidFill>
+            <a:prstDash val="solid"/>
+          </a:ln>
+        </p:spPr>
+        <p:txBody>
+          <a:bodyPr/>
+          <a:lstStyle/>
+          <a:p>
+            <a:endParaRPr lang="en-US"/>
+          </a:p>
+        </p:txBody>
+      </p:sp>
+      <p:sp>
+        <p:nvSpPr>
+          <p:cNvPr id="14" name="Shape 12"/>
+          <p:cNvSpPr/>
+          <p:nvPr/>
+        </p:nvSpPr>
+        <p:spPr>
+          <a:xfrm>
+            <a:off x="3712464" y="960120"/>
+            <a:ext cx="1371600" cy="1005840"/>
+          </a:xfrm>
+          <a:prstGeom prst="ellipse">
+            <a:avLst/>
+          </a:prstGeom>
+          <a:solidFill>
+            <a:srgbClr val="1E3A5F"/>
+          </a:solidFill>
+          <a:ln w="25400">
+            <a:solidFill>
+              <a:srgbClr val="0EA5E9"/>
+            </a:solidFill>
+            <a:prstDash val="solid"/>
+          </a:ln>
+        </p:spPr>
+        <p:txBody>
+          <a:bodyPr/>
+          <a:lstStyle/>
+          <a:p>
+            <a:endParaRPr lang="en-US"/>
+          </a:p>
+        </p:txBody>
+      </p:sp>
+      <p:sp>
+        <p:nvSpPr>
+          <p:cNvPr id="15" name="Text 13"/>
+          <p:cNvSpPr/>
+          <p:nvPr/>
+        </p:nvSpPr>
+        <p:spPr>
+          <a:xfrm>
+            <a:off x="3712464" y="987552"/>
+            <a:ext cx="1371600" cy="411480"/>
+          </a:xfrm>
+          <a:prstGeom prst="rect">
+            <a:avLst/>
+          </a:prstGeom>
+          <a:noFill/>
+          <a:ln/>
+        </p:spPr>
+        <p:txBody>
+          <a:bodyPr wrap="square" rtlCol="0" anchor="ctr"/>
+          <a:lstStyle/>
+          <a:p>
+            <a:pPr marL="0" indent="0" algn="ctr">
+              <a:buNone/>
+            </a:pPr>
+            <a:r>
+              <a:rPr lang="en-US" sz="2200" b="1" dirty="0">
+                <a:solidFill>
+                  <a:srgbClr val="0EA5E9"/>
+                </a:solidFill>
+                <a:latin typeface="Calibri" pitchFamily="34" charset="0"/>
+                <a:ea typeface="Calibri" pitchFamily="34" charset="-122"/>
+                <a:cs typeface="Calibri" pitchFamily="34" charset="-120"/>
+              </a:rPr>
+              <a:t>3</a:t>
+            </a:r>
+            <a:endParaRPr lang="en-US" sz="2200" dirty="0"/>
+          </a:p>
+        </p:txBody>
+      </p:sp>
+      <p:sp>
+        <p:nvSpPr>
+          <p:cNvPr id="16" name="Text 14"/>
+          <p:cNvSpPr/>
+          <p:nvPr/>
+        </p:nvSpPr>
+        <p:spPr>
+          <a:xfrm>
+            <a:off x="3712464" y="1417320"/>
+            <a:ext cx="1371600" cy="274320"/>
+          </a:xfrm>
+          <a:prstGeom prst="rect">
+            <a:avLst/>
+          </a:prstGeom>
+          <a:noFill/>
+          <a:ln/>
+        </p:spPr>
+        <p:txBody>
+          <a:bodyPr wrap="square" rtlCol="0" anchor="ctr"/>
+          <a:lstStyle/>
+          <a:p>
+            <a:pPr marL="0" indent="0" algn="ctr">
+              <a:buNone/>
+            </a:pPr>
+            <a:r>
+              <a:rPr lang="en-US" sz="1100" b="1" dirty="0">
+                <a:solidFill>
+                  <a:srgbClr val="FFFFFF"/>
+                </a:solidFill>
+                <a:latin typeface="Calibri" pitchFamily="34" charset="0"/>
+                <a:ea typeface="Calibri" pitchFamily="34" charset="-122"/>
+                <a:cs typeface="Calibri" pitchFamily="34" charset="-120"/>
+              </a:rPr>
+              <a:t>JWT</a:t>
+            </a:r>
+            <a:endParaRPr lang="en-US" sz="1100" dirty="0"/>
+          </a:p>
+        </p:txBody>
+      </p:sp>
+      <p:sp>
+        <p:nvSpPr>
+          <p:cNvPr id="17" name="Text 15"/>
+          <p:cNvSpPr/>
+          <p:nvPr/>
+        </p:nvSpPr>
+        <p:spPr>
+          <a:xfrm>
+            <a:off x="3712464" y="2103120"/>
+            <a:ext cx="1371600" cy="274320"/>
+          </a:xfrm>
+          <a:prstGeom prst="rect">
+            <a:avLst/>
+          </a:prstGeom>
+          <a:noFill/>
+          <a:ln/>
+        </p:spPr>
+        <p:txBody>
+          <a:bodyPr wrap="square" rtlCol="0" anchor="ctr"/>
+          <a:lstStyle/>
+          <a:p>
+            <a:pPr marL="0" indent="0" algn="ctr">
+              <a:buNone/>
+            </a:pPr>
+            <a:r>
+              <a:rPr lang="en-US" sz="1000" dirty="0">
+                <a:solidFill>
+                  <a:srgbClr val="94A3B8"/>
+                </a:solidFill>
+                <a:latin typeface="Calibri" pitchFamily="34" charset="0"/>
+                <a:ea typeface="Calibri" pitchFamily="34" charset="-122"/>
+                <a:cs typeface="Calibri" pitchFamily="34" charset="-120"/>
+              </a:rPr>
+              <a:t>Token HMAC-SHA256</a:t>
+            </a:r>
+            <a:endParaRPr lang="en-US" sz="1000" dirty="0"/>
+          </a:p>
+        </p:txBody>
+      </p:sp>
+      <p:sp>
+        <p:nvSpPr>
+          <p:cNvPr id="18" name="Shape 16"/>
+          <p:cNvSpPr/>
+          <p:nvPr/>
+        </p:nvSpPr>
+        <p:spPr>
+          <a:xfrm>
+            <a:off x="5084064" y="1417320"/>
+            <a:ext cx="347472" cy="45720"/>
+          </a:xfrm>
+          <a:prstGeom prst="rect">
+            <a:avLst/>
+          </a:prstGeom>
+          <a:solidFill>
+            <a:srgbClr val="334155"/>
+          </a:solidFill>
+          <a:ln w="12700">
+            <a:solidFill>
+              <a:srgbClr val="334155"/>
+            </a:solidFill>
+            <a:prstDash val="solid"/>
+          </a:ln>
+        </p:spPr>
+        <p:txBody>
+          <a:bodyPr/>
+          <a:lstStyle/>
+          <a:p>
+            <a:endParaRPr lang="en-US"/>
+          </a:p>
+        </p:txBody>
+      </p:sp>
+      <p:sp>
+        <p:nvSpPr>
+          <p:cNvPr id="19" name="Shape 17"/>
+          <p:cNvSpPr/>
+          <p:nvPr/>
+        </p:nvSpPr>
+        <p:spPr>
+          <a:xfrm>
+            <a:off x="5431536" y="960120"/>
+            <a:ext cx="1371600" cy="1005840"/>
+          </a:xfrm>
+          <a:prstGeom prst="ellipse">
+            <a:avLst/>
+          </a:prstGeom>
+          <a:solidFill>
+            <a:srgbClr val="1E3A5F"/>
+          </a:solidFill>
+          <a:ln w="25400">
+            <a:solidFill>
+              <a:srgbClr val="0EA5E9"/>
+            </a:solidFill>
+            <a:prstDash val="solid"/>
+          </a:ln>
+        </p:spPr>
+        <p:txBody>
+          <a:bodyPr/>
+          <a:lstStyle/>
+          <a:p>
+            <a:endParaRPr lang="en-US"/>
+          </a:p>
+        </p:txBody>
+      </p:sp>
+      <p:sp>
+        <p:nvSpPr>
+          <p:cNvPr id="20" name="Text 18"/>
+          <p:cNvSpPr/>
+          <p:nvPr/>
+        </p:nvSpPr>
+        <p:spPr>
+          <a:xfrm>
+            <a:off x="5431536" y="987552"/>
+            <a:ext cx="1371600" cy="411480"/>
+          </a:xfrm>
+          <a:prstGeom prst="rect">
+            <a:avLst/>
+          </a:prstGeom>
+          <a:noFill/>
+          <a:ln/>
+        </p:spPr>
+        <p:txBody>
+          <a:bodyPr wrap="square" rtlCol="0" anchor="ctr"/>
+          <a:lstStyle/>
+          <a:p>
+            <a:pPr marL="0" indent="0" algn="ctr">
+              <a:buNone/>
+            </a:pPr>
+            <a:r>
+              <a:rPr lang="en-US" sz="2200" b="1" dirty="0">
+                <a:solidFill>
+                  <a:srgbClr val="0EA5E9"/>
+                </a:solidFill>
+                <a:latin typeface="Calibri" pitchFamily="34" charset="0"/>
+                <a:ea typeface="Calibri" pitchFamily="34" charset="-122"/>
+                <a:cs typeface="Calibri" pitchFamily="34" charset="-120"/>
+              </a:rPr>
+              <a:t>4</a:t>
+            </a:r>
+            <a:endParaRPr lang="en-US" sz="2200" dirty="0"/>
+          </a:p>
+        </p:txBody>
+      </p:sp>
+      <p:sp>
+        <p:nvSpPr>
+          <p:cNvPr id="21" name="Text 19"/>
+          <p:cNvSpPr/>
+          <p:nvPr/>
+        </p:nvSpPr>
+        <p:spPr>
+          <a:xfrm>
+            <a:off x="5431536" y="1417320"/>
+            <a:ext cx="1371600" cy="274320"/>
+          </a:xfrm>
+          <a:prstGeom prst="rect">
+            <a:avLst/>
+          </a:prstGeom>
+          <a:noFill/>
+          <a:ln/>
+        </p:spPr>
+        <p:txBody>
+          <a:bodyPr wrap="square" rtlCol="0" anchor="ctr"/>
+          <a:lstStyle/>
+          <a:p>
+            <a:pPr marL="0" indent="0" algn="ctr">
+              <a:buNone/>
+            </a:pPr>
+            <a:r>
+              <a:rPr lang="en-US" sz="1100" b="1" dirty="0">
+                <a:solidFill>
+                  <a:srgbClr val="FFFFFF"/>
+                </a:solidFill>
+                <a:latin typeface="Calibri" pitchFamily="34" charset="0"/>
+                <a:ea typeface="Calibri" pitchFamily="34" charset="-122"/>
+                <a:cs typeface="Calibri" pitchFamily="34" charset="-120"/>
+              </a:rPr>
+              <a:t>RBAC</a:t>
+            </a:r>
+            <a:endParaRPr lang="en-US" sz="1100" dirty="0"/>
+          </a:p>
+        </p:txBody>
+      </p:sp>
+      <p:sp>
+        <p:nvSpPr>
+          <p:cNvPr id="22" name="Text 20"/>
+          <p:cNvSpPr/>
+          <p:nvPr/>
+        </p:nvSpPr>
+        <p:spPr>
+          <a:xfrm>
+            <a:off x="5431536" y="2103120"/>
+            <a:ext cx="1371600" cy="274320"/>
+          </a:xfrm>
+          <a:prstGeom prst="rect">
+            <a:avLst/>
+          </a:prstGeom>
+          <a:noFill/>
+          <a:ln/>
+        </p:spPr>
+        <p:txBody>
+          <a:bodyPr wrap="square" rtlCol="0" anchor="ctr"/>
+          <a:lstStyle/>
+          <a:p>
+            <a:pPr marL="0" indent="0" algn="ctr">
+              <a:buNone/>
+            </a:pPr>
+            <a:r>
+              <a:rPr lang="en-US" sz="1000" dirty="0">
+                <a:solidFill>
+                  <a:srgbClr val="94A3B8"/>
+                </a:solidFill>
+                <a:latin typeface="Calibri" pitchFamily="34" charset="0"/>
+                <a:ea typeface="Calibri" pitchFamily="34" charset="-122"/>
+                <a:cs typeface="Calibri" pitchFamily="34" charset="-120"/>
+              </a:rPr>
+              <a:t>Claims por cargo</a:t>
+            </a:r>
+            <a:endParaRPr lang="en-US" sz="1000" dirty="0"/>
+          </a:p>
+        </p:txBody>
+      </p:sp>
+      <p:sp>
+        <p:nvSpPr>
+          <p:cNvPr id="23" name="Shape 21"/>
+          <p:cNvSpPr/>
+          <p:nvPr/>
+        </p:nvSpPr>
+        <p:spPr>
+          <a:xfrm>
+            <a:off x="6803136" y="1417320"/>
+            <a:ext cx="347472" cy="45720"/>
+          </a:xfrm>
+          <a:prstGeom prst="rect">
+            <a:avLst/>
+          </a:prstGeom>
+          <a:solidFill>
+            <a:srgbClr val="334155"/>
+          </a:solidFill>
+          <a:ln w="12700">
+            <a:solidFill>
+              <a:srgbClr val="334155"/>
+            </a:solidFill>
+            <a:prstDash val="solid"/>
+          </a:ln>
+        </p:spPr>
+        <p:txBody>
+          <a:bodyPr/>
+          <a:lstStyle/>
+          <a:p>
+            <a:endParaRPr lang="en-US"/>
+          </a:p>
+        </p:txBody>
+      </p:sp>
+      <p:sp>
+        <p:nvSpPr>
+          <p:cNvPr id="24" name="Shape 22"/>
+          <p:cNvSpPr/>
+          <p:nvPr/>
+        </p:nvSpPr>
+        <p:spPr>
+          <a:xfrm>
+            <a:off x="7150608" y="960120"/>
+            <a:ext cx="1371600" cy="1005840"/>
+          </a:xfrm>
+          <a:prstGeom prst="ellipse">
+            <a:avLst/>
+          </a:prstGeom>
+          <a:solidFill>
+            <a:srgbClr val="1E3A5F"/>
+          </a:solidFill>
+          <a:ln w="25400">
+            <a:solidFill>
+              <a:srgbClr val="0EA5E9"/>
+            </a:solidFill>
+            <a:prstDash val="solid"/>
+          </a:ln>
+        </p:spPr>
+        <p:txBody>
+          <a:bodyPr/>
+          <a:lstStyle/>
+          <a:p>
+            <a:endParaRPr lang="en-US"/>
+          </a:p>
+        </p:txBody>
+      </p:sp>
+      <p:sp>
+        <p:nvSpPr>
+          <p:cNvPr id="25" name="Text 23"/>
+          <p:cNvSpPr/>
+          <p:nvPr/>
+        </p:nvSpPr>
+        <p:spPr>
+          <a:xfrm>
+            <a:off x="7150608" y="987552"/>
+            <a:ext cx="1371600" cy="411480"/>
+          </a:xfrm>
+          <a:prstGeom prst="rect">
+            <a:avLst/>
+          </a:prstGeom>
+          <a:noFill/>
+          <a:ln/>
+        </p:spPr>
+        <p:txBody>
+          <a:bodyPr wrap="square" rtlCol="0" anchor="ctr"/>
+          <a:lstStyle/>
+          <a:p>
+            <a:pPr marL="0" indent="0" algn="ctr">
+              <a:buNone/>
+            </a:pPr>
+            <a:r>
+              <a:rPr lang="en-US" sz="2200" b="1" dirty="0">
+                <a:solidFill>
+                  <a:srgbClr val="0EA5E9"/>
+                </a:solidFill>
+                <a:latin typeface="Calibri" pitchFamily="34" charset="0"/>
+                <a:ea typeface="Calibri" pitchFamily="34" charset="-122"/>
+                <a:cs typeface="Calibri" pitchFamily="34" charset="-120"/>
+              </a:rPr>
+              <a:t>5</a:t>
+            </a:r>
+            <a:endParaRPr lang="en-US" sz="2200" dirty="0"/>
+          </a:p>
+        </p:txBody>
+      </p:sp>
+      <p:sp>
+        <p:nvSpPr>
+          <p:cNvPr id="26" name="Text 24"/>
+          <p:cNvSpPr/>
+          <p:nvPr/>
+        </p:nvSpPr>
+        <p:spPr>
+          <a:xfrm>
+            <a:off x="7150608" y="1417320"/>
+            <a:ext cx="1371600" cy="274320"/>
+          </a:xfrm>
+          <a:prstGeom prst="rect">
+            <a:avLst/>
+          </a:prstGeom>
+          <a:noFill/>
+          <a:ln/>
+        </p:spPr>
+        <p:txBody>
+          <a:bodyPr wrap="square" rtlCol="0" anchor="ctr"/>
+          <a:lstStyle/>
+          <a:p>
+            <a:pPr marL="0" indent="0" algn="ctr">
+              <a:buNone/>
+            </a:pPr>
+            <a:r>
+              <a:rPr lang="en-US" sz="1100" b="1" dirty="0">
+                <a:solidFill>
+                  <a:srgbClr val="FFFFFF"/>
+                </a:solidFill>
+                <a:latin typeface="Calibri" pitchFamily="34" charset="0"/>
+                <a:ea typeface="Calibri" pitchFamily="34" charset="-122"/>
+                <a:cs typeface="Calibri" pitchFamily="34" charset="-120"/>
+              </a:rPr>
+              <a:t>Sessão</a:t>
+            </a:r>
+            <a:endParaRPr lang="en-US" sz="1100" dirty="0"/>
+          </a:p>
+        </p:txBody>
+      </p:sp>
+      <p:sp>
+        <p:nvSpPr>
+          <p:cNvPr id="27" name="Text 25"/>
+          <p:cNvSpPr/>
+          <p:nvPr/>
+        </p:nvSpPr>
+        <p:spPr>
+          <a:xfrm>
+            <a:off x="7150608" y="2103120"/>
+            <a:ext cx="1371600" cy="274320"/>
+          </a:xfrm>
+          <a:prstGeom prst="rect">
+            <a:avLst/>
+          </a:prstGeom>
+          <a:noFill/>
+          <a:ln/>
+        </p:spPr>
+        <p:txBody>
+          <a:bodyPr wrap="square" rtlCol="0" anchor="ctr"/>
+          <a:lstStyle/>
+          <a:p>
+            <a:pPr marL="0" indent="0" algn="ctr">
+              <a:buNone/>
+            </a:pPr>
+            <a:r>
+              <a:rPr lang="en-US" sz="1000" dirty="0">
+                <a:solidFill>
+                  <a:srgbClr val="94A3B8"/>
+                </a:solidFill>
+                <a:latin typeface="Calibri" pitchFamily="34" charset="0"/>
+                <a:ea typeface="Calibri" pitchFamily="34" charset="-122"/>
+                <a:cs typeface="Calibri" pitchFamily="34" charset="-120"/>
+              </a:rPr>
+              <a:t>8h, logout limpa</a:t>
+            </a:r>
+            <a:endParaRPr lang="en-US" sz="1000" dirty="0"/>
+          </a:p>
+        </p:txBody>
+      </p:sp>
+      <p:sp>
+        <p:nvSpPr>
+          <p:cNvPr id="28" name="Shape 26"/>
+          <p:cNvSpPr/>
+          <p:nvPr/>
+        </p:nvSpPr>
+        <p:spPr>
+          <a:xfrm>
+            <a:off x="274320" y="2514600"/>
+            <a:ext cx="8595360" cy="347472"/>
+          </a:xfrm>
+          <a:prstGeom prst="rect">
+            <a:avLst/>
+          </a:prstGeom>
+          <a:solidFill>
+            <a:srgbClr val="1E3A5F"/>
+          </a:solidFill>
+          <a:ln w="12700">
+            <a:solidFill>
+              <a:srgbClr val="0EA5E9"/>
+            </a:solidFill>
+            <a:prstDash val="solid"/>
+          </a:ln>
+        </p:spPr>
+        <p:txBody>
+          <a:bodyPr/>
+          <a:lstStyle/>
+          <a:p>
+            <a:endParaRPr lang="en-US"/>
+          </a:p>
+        </p:txBody>
+      </p:sp>
+      <p:sp>
+        <p:nvSpPr>
+          <p:cNvPr id="29" name="Text 27"/>
+          <p:cNvSpPr/>
+          <p:nvPr/>
+        </p:nvSpPr>
+        <p:spPr>
+          <a:xfrm>
+            <a:off x="365760" y="2560320"/>
+            <a:ext cx="2286000" cy="256032"/>
+          </a:xfrm>
+          <a:prstGeom prst="rect">
+            <a:avLst/>
+          </a:prstGeom>
+          <a:noFill/>
+          <a:ln/>
+        </p:spPr>
+        <p:txBody>
+          <a:bodyPr wrap="square" rtlCol="0" anchor="ctr"/>
+          <a:lstStyle/>
+          <a:p>
+            <a:pPr marL="0" indent="0">
+              <a:buNone/>
+            </a:pPr>
+            <a:r>
+              <a:rPr lang="en-US" sz="1100" b="1" dirty="0">
+                <a:solidFill>
+                  <a:srgbClr val="0EA5E9"/>
+                </a:solidFill>
+                <a:latin typeface="Calibri" pitchFamily="34" charset="0"/>
+                <a:ea typeface="Calibri" pitchFamily="34" charset="-122"/>
+                <a:cs typeface="Calibri" pitchFamily="34" charset="-120"/>
+              </a:rPr>
+              <a:t>Perfil</a:t>
+            </a:r>
+            <a:endParaRPr lang="en-US" sz="1100" dirty="0"/>
+          </a:p>
+        </p:txBody>
+      </p:sp>
+      <p:sp>
+        <p:nvSpPr>
+          <p:cNvPr id="30" name="Text 28"/>
+          <p:cNvSpPr/>
+          <p:nvPr/>
+        </p:nvSpPr>
+        <p:spPr>
+          <a:xfrm>
+            <a:off x="2286000" y="2560320"/>
+            <a:ext cx="2286000" cy="256032"/>
+          </a:xfrm>
+          <a:prstGeom prst="rect">
+            <a:avLst/>
+          </a:prstGeom>
+          <a:noFill/>
+          <a:ln/>
+        </p:spPr>
+        <p:txBody>
+          <a:bodyPr wrap="square" rtlCol="0" anchor="ctr"/>
+          <a:lstStyle/>
+          <a:p>
+            <a:pPr marL="0" indent="0">
+              <a:buNone/>
+            </a:pPr>
+            <a:r>
+              <a:rPr lang="en-US" sz="1100" b="1" dirty="0">
+                <a:solidFill>
+                  <a:srgbClr val="0EA5E9"/>
+                </a:solidFill>
+                <a:latin typeface="Calibri" pitchFamily="34" charset="0"/>
+                <a:ea typeface="Calibri" pitchFamily="34" charset="-122"/>
+                <a:cs typeface="Calibri" pitchFamily="34" charset="-120"/>
+              </a:rPr>
+              <a:t>Módulo</a:t>
+            </a:r>
+            <a:endParaRPr lang="en-US" sz="1100" dirty="0"/>
+          </a:p>
+        </p:txBody>
+      </p:sp>
+      <p:sp>
+        <p:nvSpPr>
+          <p:cNvPr id="31" name="Text 29"/>
+          <p:cNvSpPr/>
+          <p:nvPr/>
+        </p:nvSpPr>
+        <p:spPr>
+          <a:xfrm>
+            <a:off x="4754880" y="2560320"/>
+            <a:ext cx="2286000" cy="256032"/>
+          </a:xfrm>
+          <a:prstGeom prst="rect">
+            <a:avLst/>
+          </a:prstGeom>
+          <a:noFill/>
+          <a:ln/>
+        </p:spPr>
+        <p:txBody>
+          <a:bodyPr wrap="square" rtlCol="0" anchor="ctr"/>
+          <a:lstStyle/>
+          <a:p>
+            <a:pPr marL="0" indent="0">
+              <a:buNone/>
+            </a:pPr>
+            <a:r>
+              <a:rPr lang="en-US" sz="1100" b="1" dirty="0">
+                <a:solidFill>
+                  <a:srgbClr val="0EA5E9"/>
+                </a:solidFill>
+                <a:latin typeface="Calibri" pitchFamily="34" charset="0"/>
+                <a:ea typeface="Calibri" pitchFamily="34" charset="-122"/>
+                <a:cs typeface="Calibri" pitchFamily="34" charset="-120"/>
+              </a:rPr>
+              <a:t>Permissões Principais</a:t>
+            </a:r>
+            <a:endParaRPr lang="en-US" sz="1100" dirty="0"/>
+          </a:p>
+        </p:txBody>
+      </p:sp>
+      <p:sp>
+        <p:nvSpPr>
+          <p:cNvPr id="32" name="Shape 30"/>
+          <p:cNvSpPr/>
+          <p:nvPr/>
+        </p:nvSpPr>
+        <p:spPr>
+          <a:xfrm>
+            <a:off x="274320" y="2907792"/>
+            <a:ext cx="8595360" cy="393192"/>
+          </a:xfrm>
+          <a:prstGeom prst="rect">
+            <a:avLst/>
+          </a:prstGeom>
+          <a:solidFill>
+            <a:srgbClr val="192133"/>
+          </a:solidFill>
+          <a:ln w="6350">
+            <a:solidFill>
+              <a:srgbClr val="334155"/>
+            </a:solidFill>
+            <a:prstDash val="solid"/>
+          </a:ln>
+        </p:spPr>
+        <p:txBody>
+          <a:bodyPr/>
+          <a:lstStyle/>
+          <a:p>
+            <a:endParaRPr lang="en-US"/>
+          </a:p>
+        </p:txBody>
+      </p:sp>
+      <p:sp>
+        <p:nvSpPr>
+          <p:cNvPr id="33" name="Text 31"/>
+          <p:cNvSpPr/>
+          <p:nvPr/>
+        </p:nvSpPr>
+        <p:spPr>
+          <a:xfrm>
+            <a:off x="365760" y="2944368"/>
+            <a:ext cx="1737360" cy="320040"/>
+          </a:xfrm>
+          <a:prstGeom prst="rect">
+            <a:avLst/>
+          </a:prstGeom>
+          <a:noFill/>
+          <a:ln/>
+        </p:spPr>
+        <p:txBody>
+          <a:bodyPr wrap="square" rtlCol="0" anchor="ctr"/>
+          <a:lstStyle/>
+          <a:p>
+            <a:pPr marL="0" indent="0">
+              <a:buNone/>
+            </a:pPr>
+            <a:r>
+              <a:rPr lang="en-US" sz="1050" dirty="0">
+                <a:solidFill>
+                  <a:srgbClr val="F59E0B"/>
+                </a:solidFill>
+                <a:latin typeface="Calibri" pitchFamily="34" charset="0"/>
+                <a:ea typeface="Calibri" pitchFamily="34" charset="-122"/>
+                <a:cs typeface="Calibri" pitchFamily="34" charset="-120"/>
+              </a:rPr>
+              <a:t>CLIENTE</a:t>
+            </a:r>
+            <a:endParaRPr lang="en-US" sz="1050" dirty="0"/>
+          </a:p>
+        </p:txBody>
+      </p:sp>
+      <p:sp>
+        <p:nvSpPr>
+          <p:cNvPr id="34" name="Text 32"/>
+          <p:cNvSpPr/>
+          <p:nvPr/>
+        </p:nvSpPr>
+        <p:spPr>
+          <a:xfrm>
+            <a:off x="2286000" y="2944368"/>
+            <a:ext cx="1737360" cy="320040"/>
+          </a:xfrm>
+          <a:prstGeom prst="rect">
+            <a:avLst/>
+          </a:prstGeom>
+          <a:noFill/>
+          <a:ln/>
+        </p:spPr>
+        <p:txBody>
+          <a:bodyPr wrap="square" rtlCol="0" anchor="ctr"/>
+          <a:lstStyle/>
+          <a:p>
+            <a:pPr marL="0" indent="0">
+              <a:buNone/>
+            </a:pPr>
+            <a:r>
+              <a:rPr lang="en-US" sz="1050" dirty="0">
+                <a:solidFill>
+                  <a:srgbClr val="E2E8F0"/>
+                </a:solidFill>
+                <a:latin typeface="Calibri" pitchFamily="34" charset="0"/>
+                <a:ea typeface="Calibri" pitchFamily="34" charset="-122"/>
+                <a:cs typeface="Calibri" pitchFamily="34" charset="-120"/>
+              </a:rPr>
+              <a:t>/FixNRide</a:t>
+            </a:r>
+            <a:endParaRPr lang="en-US" sz="1050" dirty="0"/>
+          </a:p>
+        </p:txBody>
+      </p:sp>
+      <p:sp>
+        <p:nvSpPr>
+          <p:cNvPr id="35" name="Text 33"/>
+          <p:cNvSpPr/>
+          <p:nvPr/>
+        </p:nvSpPr>
+        <p:spPr>
+          <a:xfrm>
+            <a:off x="4754880" y="2944368"/>
+            <a:ext cx="4023360" cy="320040"/>
+          </a:xfrm>
+          <a:prstGeom prst="rect">
+            <a:avLst/>
+          </a:prstGeom>
+          <a:noFill/>
+          <a:ln/>
+        </p:spPr>
+        <p:txBody>
+          <a:bodyPr wrap="square" rtlCol="0" anchor="ctr"/>
+          <a:lstStyle/>
+          <a:p>
+            <a:pPr marL="0" indent="0">
+              <a:buNone/>
+            </a:pPr>
+            <a:r>
+              <a:rPr lang="en-US" sz="1050" dirty="0">
+                <a:solidFill>
+                  <a:srgbClr val="E2E8F0"/>
+                </a:solidFill>
+                <a:latin typeface="Calibri" pitchFamily="34" charset="0"/>
+                <a:ea typeface="Calibri" pitchFamily="34" charset="-122"/>
+                <a:cs typeface="Calibri" pitchFamily="34" charset="-120"/>
+              </a:rPr>
+              <a:t>Agendamento, faturas, catálogo, Click &amp; Collect</a:t>
+            </a:r>
+            <a:endParaRPr lang="en-US" sz="1050" dirty="0"/>
+          </a:p>
+        </p:txBody>
+      </p:sp>
+      <p:sp>
+        <p:nvSpPr>
+          <p:cNvPr id="36" name="Shape 34"/>
+          <p:cNvSpPr/>
+          <p:nvPr/>
+        </p:nvSpPr>
+        <p:spPr>
+          <a:xfrm>
+            <a:off x="274320" y="3319272"/>
+            <a:ext cx="8595360" cy="393192"/>
+          </a:xfrm>
+          <a:prstGeom prst="rect">
+            <a:avLst/>
+          </a:prstGeom>
+          <a:solidFill>
+            <a:srgbClr val="1E293B"/>
+          </a:solidFill>
+          <a:ln w="6350">
+            <a:solidFill>
+              <a:srgbClr val="334155"/>
+            </a:solidFill>
+            <a:prstDash val="solid"/>
+          </a:ln>
+        </p:spPr>
+        <p:txBody>
+          <a:bodyPr/>
+          <a:lstStyle/>
+          <a:p>
+            <a:endParaRPr lang="en-US"/>
+          </a:p>
+        </p:txBody>
+      </p:sp>
+      <p:sp>
+        <p:nvSpPr>
+          <p:cNvPr id="37" name="Text 35"/>
+          <p:cNvSpPr/>
+          <p:nvPr/>
+        </p:nvSpPr>
+        <p:spPr>
+          <a:xfrm>
+            <a:off x="365760" y="3355848"/>
+            <a:ext cx="1737360" cy="320040"/>
+          </a:xfrm>
+          <a:prstGeom prst="rect">
+            <a:avLst/>
+          </a:prstGeom>
+          <a:noFill/>
+          <a:ln/>
+        </p:spPr>
+        <p:txBody>
+          <a:bodyPr wrap="square" rtlCol="0" anchor="ctr"/>
+          <a:lstStyle/>
+          <a:p>
+            <a:pPr marL="0" indent="0">
+              <a:buNone/>
+            </a:pPr>
+            <a:r>
+              <a:rPr lang="en-US" sz="1050" dirty="0">
+                <a:solidFill>
+                  <a:srgbClr val="F59E0B"/>
+                </a:solidFill>
+                <a:latin typeface="Calibri" pitchFamily="34" charset="0"/>
+                <a:ea typeface="Calibri" pitchFamily="34" charset="-122"/>
+                <a:cs typeface="Calibri" pitchFamily="34" charset="-120"/>
+              </a:rPr>
+              <a:t>OPERADOR</a:t>
+            </a:r>
+            <a:endParaRPr lang="en-US" sz="1050" dirty="0"/>
+          </a:p>
+        </p:txBody>
+      </p:sp>
+      <p:sp>
+        <p:nvSpPr>
+          <p:cNvPr id="38" name="Text 36"/>
+          <p:cNvSpPr/>
+          <p:nvPr/>
+        </p:nvSpPr>
+        <p:spPr>
+          <a:xfrm>
+            <a:off x="2286000" y="3355848"/>
+            <a:ext cx="1737360" cy="320040"/>
+          </a:xfrm>
+          <a:prstGeom prst="rect">
+            <a:avLst/>
+          </a:prstGeom>
+          <a:noFill/>
+          <a:ln/>
+        </p:spPr>
+        <p:txBody>
+          <a:bodyPr wrap="square" rtlCol="0" anchor="ctr"/>
+          <a:lstStyle/>
+          <a:p>
+            <a:pPr marL="0" indent="0">
+              <a:buNone/>
+            </a:pPr>
+            <a:r>
+              <a:rPr lang="en-US" sz="1050" dirty="0">
+                <a:solidFill>
+                  <a:srgbClr val="E2E8F0"/>
+                </a:solidFill>
+                <a:latin typeface="Calibri" pitchFamily="34" charset="0"/>
+                <a:ea typeface="Calibri" pitchFamily="34" charset="-122"/>
+                <a:cs typeface="Calibri" pitchFamily="34" charset="-120"/>
+              </a:rPr>
+              <a:t>/FixNSell</a:t>
+            </a:r>
+            <a:endParaRPr lang="en-US" sz="1050" dirty="0"/>
+          </a:p>
+        </p:txBody>
+      </p:sp>
+      <p:sp>
+        <p:nvSpPr>
+          <p:cNvPr id="39" name="Text 37"/>
+          <p:cNvSpPr/>
+          <p:nvPr/>
+        </p:nvSpPr>
+        <p:spPr>
+          <a:xfrm>
+            <a:off x="4754880" y="3355848"/>
+            <a:ext cx="4023360" cy="320040"/>
+          </a:xfrm>
+          <a:prstGeom prst="rect">
+            <a:avLst/>
+          </a:prstGeom>
+          <a:noFill/>
+          <a:ln/>
+        </p:spPr>
+        <p:txBody>
+          <a:bodyPr wrap="square" rtlCol="0" anchor="ctr"/>
+          <a:lstStyle/>
+          <a:p>
+            <a:pPr marL="0" indent="0">
+              <a:buNone/>
+            </a:pPr>
+            <a:r>
+              <a:rPr lang="en-US" sz="1050" dirty="0">
+                <a:solidFill>
+                  <a:srgbClr val="E2E8F0"/>
+                </a:solidFill>
+                <a:latin typeface="Calibri" pitchFamily="34" charset="0"/>
+                <a:ea typeface="Calibri" pitchFamily="34" charset="-122"/>
+                <a:cs typeface="Calibri" pitchFamily="34" charset="-120"/>
+              </a:rPr>
+              <a:t>Vendas, entregas, encomendas, faturação</a:t>
+            </a:r>
+            <a:endParaRPr lang="en-US" sz="1050" dirty="0"/>
+          </a:p>
+        </p:txBody>
+      </p:sp>
+      <p:sp>
+        <p:nvSpPr>
+          <p:cNvPr id="40" name="Shape 38"/>
+          <p:cNvSpPr/>
+          <p:nvPr/>
+        </p:nvSpPr>
+        <p:spPr>
+          <a:xfrm>
+            <a:off x="274320" y="3730752"/>
+            <a:ext cx="8595360" cy="393192"/>
+          </a:xfrm>
+          <a:prstGeom prst="rect">
+            <a:avLst/>
+          </a:prstGeom>
+          <a:solidFill>
+            <a:srgbClr val="192133"/>
+          </a:solidFill>
+          <a:ln w="6350">
+            <a:solidFill>
+              <a:srgbClr val="334155"/>
+            </a:solidFill>
+            <a:prstDash val="solid"/>
+          </a:ln>
+        </p:spPr>
+        <p:txBody>
+          <a:bodyPr/>
+          <a:lstStyle/>
+          <a:p>
+            <a:endParaRPr lang="en-US"/>
+          </a:p>
+        </p:txBody>
+      </p:sp>
+      <p:sp>
+        <p:nvSpPr>
+          <p:cNvPr id="41" name="Text 39"/>
+          <p:cNvSpPr/>
+          <p:nvPr/>
+        </p:nvSpPr>
+        <p:spPr>
+          <a:xfrm>
+            <a:off x="365760" y="3767328"/>
+            <a:ext cx="1737360" cy="320040"/>
+          </a:xfrm>
+          <a:prstGeom prst="rect">
+            <a:avLst/>
+          </a:prstGeom>
+          <a:noFill/>
+          <a:ln/>
+        </p:spPr>
+        <p:txBody>
+          <a:bodyPr wrap="square" rtlCol="0" anchor="ctr"/>
+          <a:lstStyle/>
+          <a:p>
+            <a:pPr marL="0" indent="0">
+              <a:buNone/>
+            </a:pPr>
+            <a:r>
+              <a:rPr lang="en-US" sz="1050" dirty="0">
+                <a:solidFill>
+                  <a:srgbClr val="F59E0B"/>
+                </a:solidFill>
+                <a:latin typeface="Calibri" pitchFamily="34" charset="0"/>
+                <a:ea typeface="Calibri" pitchFamily="34" charset="-122"/>
+                <a:cs typeface="Calibri" pitchFamily="34" charset="-120"/>
+              </a:rPr>
+              <a:t>MECÂNICO</a:t>
+            </a:r>
+            <a:endParaRPr lang="en-US" sz="1050" dirty="0"/>
+          </a:p>
+        </p:txBody>
+      </p:sp>
+      <p:sp>
+        <p:nvSpPr>
+          <p:cNvPr id="42" name="Text 40"/>
+          <p:cNvSpPr/>
+          <p:nvPr/>
+        </p:nvSpPr>
+        <p:spPr>
+          <a:xfrm>
+            <a:off x="2286000" y="3767328"/>
+            <a:ext cx="1737360" cy="320040"/>
+          </a:xfrm>
+          <a:prstGeom prst="rect">
+            <a:avLst/>
+          </a:prstGeom>
+          <a:noFill/>
+          <a:ln/>
+        </p:spPr>
+        <p:txBody>
+          <a:bodyPr wrap="square" rtlCol="0" anchor="ctr"/>
+          <a:lstStyle/>
+          <a:p>
+            <a:pPr marL="0" indent="0">
+              <a:buNone/>
+            </a:pPr>
+            <a:r>
+              <a:rPr lang="en-US" sz="1050" dirty="0">
+                <a:solidFill>
+                  <a:srgbClr val="E2E8F0"/>
+                </a:solidFill>
+                <a:latin typeface="Calibri" pitchFamily="34" charset="0"/>
+                <a:ea typeface="Calibri" pitchFamily="34" charset="-122"/>
+                <a:cs typeface="Calibri" pitchFamily="34" charset="-120"/>
+              </a:rPr>
+              <a:t>/FixNRepair</a:t>
+            </a:r>
+            <a:endParaRPr lang="en-US" sz="1050" dirty="0"/>
+          </a:p>
+        </p:txBody>
+      </p:sp>
+      <p:sp>
+        <p:nvSpPr>
+          <p:cNvPr id="43" name="Text 41"/>
+          <p:cNvSpPr/>
+          <p:nvPr/>
+        </p:nvSpPr>
+        <p:spPr>
+          <a:xfrm>
+            <a:off x="4754880" y="3767328"/>
+            <a:ext cx="4023360" cy="320040"/>
+          </a:xfrm>
+          <a:prstGeom prst="rect">
+            <a:avLst/>
+          </a:prstGeom>
+          <a:noFill/>
+          <a:ln/>
+        </p:spPr>
+        <p:txBody>
+          <a:bodyPr wrap="square" rtlCol="0" anchor="ctr"/>
+          <a:lstStyle/>
+          <a:p>
+            <a:pPr marL="0" indent="0">
+              <a:buNone/>
+            </a:pPr>
+            <a:r>
+              <a:rPr lang="en-US" sz="1050" dirty="0">
+                <a:solidFill>
+                  <a:srgbClr val="E2E8F0"/>
+                </a:solidFill>
+                <a:latin typeface="Calibri" pitchFamily="34" charset="0"/>
+                <a:ea typeface="Calibri" pitchFamily="34" charset="-122"/>
+                <a:cs typeface="Calibri" pitchFamily="34" charset="-120"/>
+              </a:rPr>
+              <a:t>Agenda, diagnósticos, peças, estado serviços</a:t>
+            </a:r>
+            <a:endParaRPr lang="en-US" sz="1050" dirty="0"/>
+          </a:p>
+        </p:txBody>
+      </p:sp>
+      <p:sp>
+        <p:nvSpPr>
+          <p:cNvPr id="44" name="Shape 42"/>
+          <p:cNvSpPr/>
+          <p:nvPr/>
+        </p:nvSpPr>
+        <p:spPr>
+          <a:xfrm>
+            <a:off x="274320" y="4142232"/>
+            <a:ext cx="8595360" cy="393192"/>
+          </a:xfrm>
+          <a:prstGeom prst="rect">
+            <a:avLst/>
+          </a:prstGeom>
+          <a:solidFill>
+            <a:srgbClr val="1E293B"/>
+          </a:solidFill>
+          <a:ln w="6350">
+            <a:solidFill>
+              <a:srgbClr val="334155"/>
+            </a:solidFill>
+            <a:prstDash val="solid"/>
+          </a:ln>
+        </p:spPr>
+        <p:txBody>
+          <a:bodyPr/>
+          <a:lstStyle/>
+          <a:p>
+            <a:endParaRPr lang="en-US"/>
+          </a:p>
+        </p:txBody>
+      </p:sp>
+      <p:sp>
+        <p:nvSpPr>
+          <p:cNvPr id="45" name="Text 43"/>
+          <p:cNvSpPr/>
+          <p:nvPr/>
+        </p:nvSpPr>
+        <p:spPr>
+          <a:xfrm>
+            <a:off x="365760" y="4178808"/>
+            <a:ext cx="1737360" cy="320040"/>
+          </a:xfrm>
+          <a:prstGeom prst="rect">
+            <a:avLst/>
+          </a:prstGeom>
+          <a:noFill/>
+          <a:ln/>
+        </p:spPr>
+        <p:txBody>
+          <a:bodyPr wrap="square" rtlCol="0" anchor="ctr"/>
+          <a:lstStyle/>
+          <a:p>
+            <a:pPr marL="0" indent="0">
+              <a:buNone/>
+            </a:pPr>
+            <a:r>
+              <a:rPr lang="en-US" sz="1050" dirty="0">
+                <a:solidFill>
+                  <a:srgbClr val="F59E0B"/>
+                </a:solidFill>
+                <a:latin typeface="Calibri" pitchFamily="34" charset="0"/>
+                <a:ea typeface="Calibri" pitchFamily="34" charset="-122"/>
+                <a:cs typeface="Calibri" pitchFamily="34" charset="-120"/>
+              </a:rPr>
+              <a:t>ADMINISTRADOR</a:t>
+            </a:r>
+            <a:endParaRPr lang="en-US" sz="1050" dirty="0"/>
+          </a:p>
+        </p:txBody>
+      </p:sp>
+      <p:sp>
+        <p:nvSpPr>
+          <p:cNvPr id="46" name="Text 44"/>
+          <p:cNvSpPr/>
+          <p:nvPr/>
+        </p:nvSpPr>
+        <p:spPr>
+          <a:xfrm>
+            <a:off x="2286000" y="4178808"/>
+            <a:ext cx="1737360" cy="320040"/>
+          </a:xfrm>
+          <a:prstGeom prst="rect">
+            <a:avLst/>
+          </a:prstGeom>
+          <a:noFill/>
+          <a:ln/>
+        </p:spPr>
+        <p:txBody>
+          <a:bodyPr wrap="square" rtlCol="0" anchor="ctr"/>
+          <a:lstStyle/>
+          <a:p>
+            <a:pPr marL="0" indent="0">
+              <a:buNone/>
+            </a:pPr>
+            <a:r>
+              <a:rPr lang="en-US" sz="1050" dirty="0">
+                <a:solidFill>
+                  <a:srgbClr val="E2E8F0"/>
+                </a:solidFill>
+                <a:latin typeface="Calibri" pitchFamily="34" charset="0"/>
+                <a:ea typeface="Calibri" pitchFamily="34" charset="-122"/>
+                <a:cs typeface="Calibri" pitchFamily="34" charset="-120"/>
+              </a:rPr>
+              <a:t>/FixNManage + </a:t>
+            </a:r>
+            <a:r>
+              <a:rPr lang="en-US" sz="1050" dirty="0" err="1">
+                <a:solidFill>
+                  <a:srgbClr val="E2E8F0"/>
+                </a:solidFill>
+                <a:latin typeface="Calibri" pitchFamily="34" charset="0"/>
+                <a:ea typeface="Calibri" pitchFamily="34" charset="-122"/>
+                <a:cs typeface="Calibri" pitchFamily="34" charset="-120"/>
+              </a:rPr>
+              <a:t>restantes</a:t>
+            </a:r>
+            <a:r>
+              <a:rPr lang="en-US" sz="1050" dirty="0">
+                <a:solidFill>
+                  <a:srgbClr val="E2E8F0"/>
+                </a:solidFill>
+                <a:latin typeface="Calibri" pitchFamily="34" charset="0"/>
+                <a:ea typeface="Calibri" pitchFamily="34" charset="-122"/>
+                <a:cs typeface="Calibri" pitchFamily="34" charset="-120"/>
+              </a:rPr>
+              <a:t> </a:t>
+            </a:r>
+            <a:r>
+              <a:rPr lang="en-US" sz="1050" dirty="0" err="1">
+                <a:solidFill>
+                  <a:srgbClr val="E2E8F0"/>
+                </a:solidFill>
+                <a:latin typeface="Calibri" pitchFamily="34" charset="0"/>
+                <a:ea typeface="Calibri" pitchFamily="34" charset="-122"/>
+                <a:cs typeface="Calibri" pitchFamily="34" charset="-120"/>
+              </a:rPr>
+              <a:t>páginas</a:t>
+            </a:r>
+            <a:endParaRPr lang="en-US" sz="1050" dirty="0"/>
+          </a:p>
+        </p:txBody>
+      </p:sp>
+      <p:sp>
+        <p:nvSpPr>
+          <p:cNvPr id="47" name="Text 45"/>
+          <p:cNvSpPr/>
+          <p:nvPr/>
+        </p:nvSpPr>
+        <p:spPr>
+          <a:xfrm>
+            <a:off x="4754880" y="4178808"/>
+            <a:ext cx="4023360" cy="320040"/>
+          </a:xfrm>
+          <a:prstGeom prst="rect">
+            <a:avLst/>
+          </a:prstGeom>
+          <a:noFill/>
+          <a:ln/>
+        </p:spPr>
+        <p:txBody>
+          <a:bodyPr wrap="square" rtlCol="0" anchor="ctr"/>
+          <a:lstStyle/>
+          <a:p>
+            <a:pPr marL="0" indent="0">
+              <a:buNone/>
+            </a:pPr>
+            <a:r>
+              <a:rPr lang="en-US" sz="1050" dirty="0">
+                <a:solidFill>
+                  <a:srgbClr val="E2E8F0"/>
+                </a:solidFill>
+                <a:latin typeface="Calibri" pitchFamily="34" charset="0"/>
+                <a:ea typeface="Calibri" pitchFamily="34" charset="-122"/>
+                <a:cs typeface="Calibri" pitchFamily="34" charset="-120"/>
+              </a:rPr>
+              <a:t>Gestão total: utilizadores, stock, KPIs, promoções</a:t>
+            </a:r>
+            <a:endParaRPr lang="en-US" sz="1050" dirty="0"/>
+          </a:p>
+        </p:txBody>
+      </p:sp>
+      <p:sp>
+        <p:nvSpPr>
+          <p:cNvPr id="48" name="Shape 46"/>
+          <p:cNvSpPr/>
+          <p:nvPr/>
+        </p:nvSpPr>
+        <p:spPr>
+          <a:xfrm>
+            <a:off x="0" y="5074920"/>
+            <a:ext cx="9144000" cy="68580"/>
+          </a:xfrm>
+          <a:prstGeom prst="rect">
+            <a:avLst/>
+          </a:prstGeom>
+          <a:solidFill>
+            <a:srgbClr val="6366F1"/>
+          </a:solidFill>
+          <a:ln w="12700">
+            <a:solidFill>
+              <a:srgbClr val="6366F1"/>
+            </a:solidFill>
+            <a:prstDash val="solid"/>
+          </a:ln>
+        </p:spPr>
+        <p:txBody>
+          <a:bodyPr/>
+          <a:lstStyle/>
+          <a:p>
+            <a:endParaRPr lang="en-US"/>
+          </a:p>
+        </p:txBody>
+      </p:sp>
+      <p:sp>
+        <p:nvSpPr>
+          <p:cNvPr id="49" name="TextBox 48">
+            <a:extLst>
+              <a:ext uri="{FF2B5EF4-FFF2-40B4-BE49-F238E27FC236}">
+                <a16:creationId xmlns:a16="http://schemas.microsoft.com/office/drawing/2014/main" id="{568FBA7D-ECF4-C339-AF13-82AB0055F59E}"/>
+              </a:ext>
+            </a:extLst>
+          </p:cNvPr>
+          <p:cNvSpPr txBox="1"/>
+          <p:nvPr/>
+        </p:nvSpPr>
+        <p:spPr>
+          <a:xfrm>
+            <a:off x="274320" y="4636008"/>
+            <a:ext cx="8595360" cy="369332"/>
+          </a:xfrm>
+          <a:prstGeom prst="rect">
+            <a:avLst/>
+          </a:prstGeom>
+          <a:noFill/>
+        </p:spPr>
+        <p:txBody>
+          <a:bodyPr wrap="square" rtlCol="0">
+            <a:spAutoFit/>
+          </a:bodyPr>
+          <a:lstStyle/>
+          <a:p>
+            <a:r>
+              <a:rPr lang="en-US" dirty="0">
+                <a:solidFill>
+                  <a:schemeClr val="bg1"/>
+                </a:solidFill>
+              </a:rPr>
+              <a:t>Web, </a:t>
+            </a:r>
+            <a:r>
+              <a:rPr lang="en-US" dirty="0" err="1">
+                <a:solidFill>
+                  <a:schemeClr val="bg1"/>
+                </a:solidFill>
+              </a:rPr>
+              <a:t>Lógica</a:t>
+            </a:r>
+            <a:r>
+              <a:rPr lang="en-US" dirty="0">
+                <a:solidFill>
+                  <a:schemeClr val="bg1"/>
+                </a:solidFill>
+              </a:rPr>
+              <a:t> de Negócios e API de dados </a:t>
+            </a:r>
+            <a:r>
+              <a:rPr lang="en-US" dirty="0" err="1">
+                <a:solidFill>
+                  <a:schemeClr val="bg1"/>
+                </a:solidFill>
+              </a:rPr>
+              <a:t>implementam</a:t>
+            </a:r>
+            <a:r>
+              <a:rPr lang="en-US" dirty="0">
+                <a:solidFill>
+                  <a:schemeClr val="bg1"/>
+                </a:solidFill>
+              </a:rPr>
+              <a:t> </a:t>
+            </a:r>
+            <a:r>
+              <a:rPr lang="en-US" b="1" dirty="0" err="1">
+                <a:solidFill>
+                  <a:schemeClr val="bg1"/>
+                </a:solidFill>
+              </a:rPr>
+              <a:t>Autorização</a:t>
+            </a:r>
+            <a:r>
+              <a:rPr lang="en-US" dirty="0">
+                <a:solidFill>
+                  <a:schemeClr val="bg1"/>
+                </a:solidFill>
+              </a:rPr>
+              <a:t> e </a:t>
+            </a:r>
+            <a:r>
+              <a:rPr lang="en-US" b="1" dirty="0" err="1">
+                <a:solidFill>
+                  <a:schemeClr val="bg1"/>
+                </a:solidFill>
+              </a:rPr>
+              <a:t>Autenticação</a:t>
+            </a:r>
+            <a:endParaRPr lang="en-US" b="1" dirty="0">
+              <a:solidFill>
+                <a:schemeClr val="bg1"/>
+              </a:solidFill>
+            </a:endParaRPr>
+          </a:p>
+        </p:txBody>
+      </p:sp>
+    </p:spTree>
+  </p:cSld>
+  <p:clrMapOvr>
+    <a:masterClrMapping/>
+  </p:clrMapOvr>
+</p:sld>
+</file>
+
+<file path=ppt/slides/slide13.xml><?xml version="1.0" encoding="utf-8"?>
+<p:sld xmlns:a="http://schemas.openxmlformats.org/drawingml/2006/main" xmlns:r="http://schemas.openxmlformats.org/officeDocument/2006/relationships" xmlns:p="http://schemas.openxmlformats.org/presentationml/2006/main">
+  <p:cSld name="Slide 13 - IA Dev">
+    <p:bg>
+      <p:bgPr>
+        <a:solidFill>
+          <a:srgbClr val="0F172A"/>
+        </a:solidFill>
+        <a:effectLst/>
+      </p:bgPr>
+    </p:bg>
+    <p:spTree>
+      <p:nvGrpSpPr>
+        <p:cNvPr id="1" name=""/>
+        <p:cNvGrpSpPr/>
+        <p:nvPr/>
+      </p:nvGrpSpPr>
+      <p:grpSpPr>
+        <a:xfrm>
+          <a:off x="0" y="0"/>
+          <a:ext cx="0" cy="0"/>
+          <a:chOff x="0" y="0"/>
+          <a:chExt cx="0" cy="0"/>
+        </a:xfrm>
+      </p:grpSpPr>
+      <p:sp>
+        <p:nvSpPr>
+          <p:cNvPr id="2" name="TopBar"/>
+          <p:cNvSpPr/>
+          <p:nvPr/>
+        </p:nvSpPr>
+        <p:spPr>
+          <a:xfrm>
+            <a:off x="0" y="0"/>
+            <a:ext cx="9144000" cy="64008"/>
+          </a:xfrm>
+          <a:prstGeom prst="rect">
+            <a:avLst/>
+          </a:prstGeom>
+          <a:solidFill>
+            <a:srgbClr val="0EA5E9"/>
+          </a:solidFill>
+          <a:ln w="12700">
+            <a:solidFill>
+              <a:srgbClr val="0EA5E9"/>
+            </a:solidFill>
+          </a:ln>
+        </p:spPr>
+        <p:txBody>
+          <a:bodyPr/>
+          <a:lstStyle/>
+          <a:p>
+            <a:endParaRPr lang="en-US"/>
+          </a:p>
+        </p:txBody>
+      </p:sp>
+      <p:sp>
+        <p:nvSpPr>
+          <p:cNvPr id="3" name="Title"/>
+          <p:cNvSpPr/>
+          <p:nvPr/>
+        </p:nvSpPr>
+        <p:spPr>
+          <a:xfrm>
+            <a:off x="457200" y="182880"/>
+            <a:ext cx="8229600" cy="540000"/>
+          </a:xfrm>
+          <a:prstGeom prst="rect">
+            <a:avLst/>
+          </a:prstGeom>
+          <a:noFill/>
+          <a:ln/>
+        </p:spPr>
+        <p:txBody>
+          <a:bodyPr wrap="square" rtlCol="0" anchor="ctr"/>
+          <a:lstStyle/>
+          <a:p>
+            <a:pPr marL="0" indent="0">
+              <a:buNone/>
+            </a:pPr>
+            <a:r>
+              <a:rPr lang="pt-PT" sz="2800" b="1" dirty="0">
+                <a:solidFill>
+                  <a:srgbClr val="FFFFFF"/>
+                </a:solidFill>
+                <a:latin typeface="Calibri" pitchFamily="34" charset="0"/>
+              </a:rPr>
+              <a:t>3ª Fase: Desenvolvimento com Recurso a IA</a:t>
+            </a:r>
+          </a:p>
+        </p:txBody>
+      </p:sp>
+      <p:sp>
+        <p:nvSpPr>
+          <p:cNvPr id="4" name="Ref"/>
+          <p:cNvSpPr/>
+          <p:nvPr/>
+        </p:nvSpPr>
+        <p:spPr>
+          <a:xfrm>
+            <a:off x="457200" y="720000"/>
+            <a:ext cx="8229600" cy="270000"/>
+          </a:xfrm>
+          <a:prstGeom prst="rect">
+            <a:avLst/>
+          </a:prstGeom>
+          <a:noFill/>
+          <a:ln/>
+        </p:spPr>
+        <p:txBody>
+          <a:bodyPr wrap="square" rtlCol="0" anchor="ctr"/>
+          <a:lstStyle/>
+          <a:p>
+            <a:pPr marL="0" indent="0">
+              <a:buNone/>
+            </a:pPr>
+            <a:r>
+              <a:rPr lang="pt-PT" sz="1000" i="1" dirty="0">
+                <a:solidFill>
+                  <a:srgbClr val="64748B"/>
+                </a:solidFill>
+                <a:latin typeface="Calibri" pitchFamily="34" charset="0"/>
+              </a:rPr>
+              <a:t>Cap. 8 do Relatório — Geração de Código com Recurso a Inteligência Artificial</a:t>
+            </a:r>
+          </a:p>
+        </p:txBody>
+      </p:sp>
+      <p:sp>
+        <p:nvSpPr>
+          <p:cNvPr id="10" name="Left Card"/>
+          <p:cNvSpPr/>
+          <p:nvPr/>
+        </p:nvSpPr>
+        <p:spPr>
+          <a:xfrm>
+            <a:off x="274320" y="1090000"/>
+            <a:ext cx="4114800" cy="3600000"/>
+          </a:xfrm>
+          <a:prstGeom prst="rect">
+            <a:avLst/>
+          </a:prstGeom>
+          <a:solidFill>
+            <a:srgbClr val="1E293B"/>
+          </a:solidFill>
+          <a:ln w="12700">
+            <a:solidFill>
+              <a:srgbClr val="334155"/>
+            </a:solidFill>
+          </a:ln>
+          <a:effectLst>
+            <a:outerShdw blurRad="101600" dist="38100" dir="8100000" algn="bl" rotWithShape="0">
+              <a:srgbClr val="000000">
+                <a:alpha val="30000"/>
+              </a:srgbClr>
+            </a:outerShdw>
+          </a:effectLst>
+        </p:spPr>
+        <p:txBody>
+          <a:bodyPr/>
+          <a:lstStyle/>
+          <a:p>
+            <a:endParaRPr/>
+          </a:p>
+        </p:txBody>
+      </p:sp>
+      <p:sp>
+        <p:nvSpPr>
+          <p:cNvPr id="11" name="Left Title Bar"/>
+          <p:cNvSpPr/>
+          <p:nvPr/>
+        </p:nvSpPr>
+        <p:spPr>
+          <a:xfrm>
+            <a:off x="274320" y="1090000"/>
+            <a:ext cx="4114800" cy="54864"/>
+          </a:xfrm>
+          <a:prstGeom prst="rect">
+            <a:avLst/>
+          </a:prstGeom>
+          <a:solidFill>
+            <a:srgbClr val="0EA5E9"/>
+          </a:solidFill>
+          <a:ln w="0">
+            <a:noFill/>
+          </a:ln>
+        </p:spPr>
+        <p:txBody>
+          <a:bodyPr/>
+          <a:lstStyle/>
+          <a:p>
+            <a:endParaRPr/>
+          </a:p>
+        </p:txBody>
+      </p:sp>
+      <p:sp>
+        <p:nvSpPr>
+          <p:cNvPr id="12" name="Left Card Content"/>
+          <p:cNvSpPr/>
+          <p:nvPr/>
+        </p:nvSpPr>
+        <p:spPr>
+          <a:xfrm>
+            <a:off x="411480" y="1160000"/>
+            <a:ext cx="3840480" cy="3460000"/>
+          </a:xfrm>
+          <a:prstGeom prst="rect">
+            <a:avLst/>
+          </a:prstGeom>
+          <a:noFill/>
+          <a:ln/>
+        </p:spPr>
+        <p:txBody>
+          <a:bodyPr wrap="square" rtlCol="0" anchor="t"/>
+          <a:lstStyle/>
+          <a:p>
+            <a:pPr marL="0" indent="0">
+              <a:buNone/>
+            </a:pPr>
+            <a:r>
+              <a:rPr lang="pt-PT" sz="1400" b="1" dirty="0">
+                <a:solidFill>
+                  <a:srgbClr val="0EA5E9"/>
+                </a:solidFill>
+                <a:latin typeface="Calibri" pitchFamily="34" charset="0"/>
+              </a:rPr>
+              <a:t>Modelo e Estratégia</a:t>
+            </a:r>
+          </a:p>
+          <a:p>
+            <a:pPr marL="0" indent="0">
+              <a:buNone/>
+            </a:pPr>
+            <a:r>
+              <a:rPr lang="pt-PT" sz="1050" dirty="0">
+                <a:solidFill>
+                  <a:srgbClr val="E2E8F0"/>
+                </a:solidFill>
+                <a:latin typeface="Calibri" pitchFamily="34" charset="0"/>
+              </a:rPr>
+              <a:t>Claude Sonnet 4.6 (Anthropic) via Claude Code (VS Code)</a:t>
+            </a:r>
+          </a:p>
+          <a:p>
+            <a:pPr marL="0" indent="0">
+              <a:buNone/>
+            </a:pPr>
+            <a:endParaRPr lang="pt-PT" sz="1050" dirty="0"/>
+          </a:p>
+          <a:p>
+            <a:pPr marL="0" indent="0">
+              <a:buNone/>
+            </a:pPr>
+            <a:r>
+              <a:rPr lang="pt-PT" sz="1200" b="1" dirty="0">
+                <a:solidFill>
+                  <a:srgbClr val="FFFFFF"/>
+                </a:solidFill>
+                <a:latin typeface="Calibri" pitchFamily="34" charset="0"/>
+              </a:rPr>
+              <a:t>Fragmentação por Sessões</a:t>
+            </a:r>
+          </a:p>
+          <a:p>
+            <a:pPr marL="0" indent="0">
+              <a:buNone/>
+            </a:pPr>
+            <a:r>
+              <a:rPr lang="pt-PT" sz="1000" dirty="0">
+                <a:solidFill>
+                  <a:srgbClr val="94A3B8"/>
+                </a:solidFill>
+                <a:latin typeface="Calibri" pitchFamily="34" charset="0"/>
+              </a:rPr>
+              <a:t>Sessões isoladas por microsserviço para evitar degradação da janela de contexto. Cada sessão iniciada com system brief estruturado (arquitetura + Schemas + endpoints + regras de negócio).</a:t>
+            </a:r>
+          </a:p>
+          <a:p>
+            <a:pPr marL="0" indent="0">
+              <a:buNone/>
+            </a:pPr>
+            <a:endParaRPr lang="pt-PT" sz="1000" dirty="0"/>
+          </a:p>
+          <a:p>
+            <a:pPr marL="0" indent="0">
+              <a:buNone/>
+            </a:pPr>
+            <a:r>
+              <a:rPr lang="pt-PT" sz="1200" b="1" dirty="0">
+                <a:solidFill>
+                  <a:srgbClr val="FFFFFF"/>
+                </a:solidFill>
+                <a:latin typeface="Calibri" pitchFamily="34" charset="0"/>
+              </a:rPr>
+              <a:t>Taxonomia de 3 Tipos</a:t>
+            </a:r>
+          </a:p>
+          <a:p>
+            <a:pPr marL="0" indent="0">
+              <a:buNone/>
+            </a:pPr>
+            <a:r>
+              <a:rPr lang="pt-PT" sz="1000" dirty="0">
+                <a:solidFill>
+                  <a:srgbClr val="94A3B8"/>
+                </a:solidFill>
+                <a:latin typeface="Calibri" pitchFamily="34" charset="0"/>
+              </a:rPr>
+              <a:t>Sessões de camada • Sessões de módulo • Sessões de correção cirúrgica</a:t>
+            </a:r>
+          </a:p>
+          <a:p>
+            <a:pPr marL="0" indent="0">
+              <a:buNone/>
+            </a:pPr>
+            <a:endParaRPr lang="pt-PT" sz="1000" dirty="0"/>
+          </a:p>
+          <a:p>
+            <a:pPr marL="0" indent="0">
+              <a:buNone/>
+            </a:pPr>
+            <a:r>
+              <a:rPr lang="pt-PT" sz="1200" b="1" dirty="0">
+                <a:solidFill>
+                  <a:srgbClr val="FFFFFF"/>
+                </a:solidFill>
+                <a:latin typeface="Calibri" pitchFamily="34" charset="0"/>
+              </a:rPr>
+              <a:t>Cobertura por Camada</a:t>
+            </a:r>
+          </a:p>
+          <a:p>
+            <a:pPr marL="0" indent="0">
+              <a:buNone/>
+            </a:pPr>
+            <a:r>
+              <a:rPr lang="pt-PT" sz="1000" dirty="0">
+                <a:solidFill>
+                  <a:srgbClr val="94A3B8"/>
+                </a:solidFill>
+                <a:latin typeface="Calibri" pitchFamily="34" charset="0"/>
+              </a:rPr>
+              <a:t>Schemas Mongoose • Controllers Node.js • Services .NET • Componentes React + TanStack Query</a:t>
+            </a:r>
+          </a:p>
+        </p:txBody>
+      </p:sp>
+      <p:sp>
+        <p:nvSpPr>
+          <p:cNvPr id="20" name="Right Card"/>
+          <p:cNvSpPr/>
+          <p:nvPr/>
+        </p:nvSpPr>
+        <p:spPr>
+          <a:xfrm>
+            <a:off x="4754880" y="1090000"/>
+            <a:ext cx="4114800" cy="3600000"/>
+          </a:xfrm>
+          <a:prstGeom prst="rect">
+            <a:avLst/>
+          </a:prstGeom>
+          <a:solidFill>
+            <a:srgbClr val="1E293B"/>
+          </a:solidFill>
+          <a:ln w="12700">
+            <a:solidFill>
+              <a:srgbClr val="334155"/>
+            </a:solidFill>
+          </a:ln>
+          <a:effectLst>
+            <a:outerShdw blurRad="101600" dist="38100" dir="8100000" algn="bl" rotWithShape="0">
+              <a:srgbClr val="000000">
+                <a:alpha val="30000"/>
+              </a:srgbClr>
+            </a:outerShdw>
+          </a:effectLst>
+        </p:spPr>
+        <p:txBody>
+          <a:bodyPr/>
+          <a:lstStyle/>
+          <a:p>
+            <a:endParaRPr/>
+          </a:p>
+        </p:txBody>
+      </p:sp>
+      <p:sp>
+        <p:nvSpPr>
+          <p:cNvPr id="21" name="Right Title Bar"/>
+          <p:cNvSpPr/>
+          <p:nvPr/>
+        </p:nvSpPr>
+        <p:spPr>
+          <a:xfrm>
+            <a:off x="4754880" y="1090000"/>
+            <a:ext cx="4114800" cy="54864"/>
+          </a:xfrm>
+          <a:prstGeom prst="rect">
+            <a:avLst/>
+          </a:prstGeom>
+          <a:solidFill>
+            <a:srgbClr val="6366F1"/>
+          </a:solidFill>
+          <a:ln w="0">
+            <a:noFill/>
+          </a:ln>
+        </p:spPr>
+        <p:txBody>
+          <a:bodyPr/>
+          <a:lstStyle/>
+          <a:p>
+            <a:endParaRPr/>
+          </a:p>
+        </p:txBody>
+      </p:sp>
+      <p:sp>
+        <p:nvSpPr>
+          <p:cNvPr id="22" name="Right Card Content"/>
+          <p:cNvSpPr/>
+          <p:nvPr/>
+        </p:nvSpPr>
+        <p:spPr>
+          <a:xfrm>
+            <a:off x="4892040" y="1160000"/>
+            <a:ext cx="3840480" cy="3460000"/>
+          </a:xfrm>
+          <a:prstGeom prst="rect">
+            <a:avLst/>
+          </a:prstGeom>
+          <a:noFill/>
+          <a:ln/>
+        </p:spPr>
+        <p:txBody>
+          <a:bodyPr wrap="square" rtlCol="0" anchor="t"/>
+          <a:lstStyle/>
+          <a:p>
+            <a:pPr marL="0" indent="0">
+              <a:buNone/>
+            </a:pPr>
+            <a:r>
+              <a:rPr lang="pt-PT" sz="1400" b="1" dirty="0">
+                <a:solidFill>
+                  <a:srgbClr val="6366F1"/>
+                </a:solidFill>
+                <a:latin typeface="Calibri" pitchFamily="34" charset="0"/>
+              </a:rPr>
+              <a:t>Análise Crítica</a:t>
+            </a:r>
+          </a:p>
+          <a:p>
+            <a:pPr marL="0" indent="0">
+              <a:buNone/>
+            </a:pPr>
+            <a:endParaRPr lang="pt-PT" sz="900" dirty="0"/>
+          </a:p>
+          <a:p>
+            <a:pPr marL="0" indent="0">
+              <a:buNone/>
+            </a:pPr>
+            <a:r>
+              <a:rPr lang="pt-PT" sz="1100" b="1" dirty="0">
+                <a:solidFill>
+                  <a:srgbClr val="22C55E"/>
+                </a:solidFill>
+                <a:latin typeface="Calibri" pitchFamily="34" charset="0"/>
+              </a:rPr>
+              <a:t>✓ Vantagens</a:t>
+            </a:r>
+          </a:p>
+          <a:p>
+            <a:pPr marL="0" indent="0">
+              <a:buNone/>
+            </a:pPr>
+            <a:r>
+              <a:rPr lang="pt-PT" sz="1000" dirty="0">
+                <a:solidFill>
+                  <a:srgbClr val="94A3B8"/>
+                </a:solidFill>
+                <a:latin typeface="Calibri" pitchFamily="34" charset="0"/>
+              </a:rPr>
+              <a:t>Redução de 40–50% no tempo de implementação por camada. Código de qualidade estrutural consistente. Transferência implícita de conhecimento. Deteção proativa de lacunas de especificação.</a:t>
+            </a:r>
+          </a:p>
+          <a:p>
+            <a:pPr marL="0" indent="0">
+              <a:buNone/>
+            </a:pPr>
+            <a:endParaRPr lang="pt-PT" sz="900" dirty="0"/>
+          </a:p>
+          <a:p>
+            <a:pPr marL="0" indent="0">
+              <a:buNone/>
+            </a:pPr>
+            <a:r>
+              <a:rPr lang="pt-PT" sz="1100" b="1" dirty="0">
+                <a:solidFill>
+                  <a:srgbClr val="EF4444"/>
+                </a:solidFill>
+                <a:latin typeface="Calibri" pitchFamily="34" charset="0"/>
+              </a:rPr>
+              <a:t>✗ Limitações</a:t>
+            </a:r>
+          </a:p>
+          <a:p>
+            <a:pPr marL="0" indent="0">
+              <a:buNone/>
+            </a:pPr>
+            <a:r>
+              <a:rPr lang="pt-PT" sz="1000" dirty="0">
+                <a:solidFill>
+                  <a:srgbClr val="94A3B8"/>
+                </a:solidFill>
+                <a:latin typeface="Calibri" pitchFamily="34" charset="0"/>
+              </a:rPr>
+              <a:t>Dependência da qualidade do prompt. Riscos de alucinações (código plausível mas incorreto). Tendência para soluções genéricas. Sem visão sistémica entre sessões.</a:t>
+            </a:r>
+          </a:p>
+          <a:p>
+            <a:pPr marL="0" indent="0">
+              <a:buNone/>
+            </a:pPr>
+            <a:endParaRPr lang="pt-PT" sz="900" dirty="0"/>
+          </a:p>
+          <a:p>
+            <a:pPr marL="0" indent="0">
+              <a:buNone/>
+            </a:pPr>
+            <a:r>
+              <a:rPr lang="pt-PT" sz="1100" b="1" dirty="0">
+                <a:solidFill>
+                  <a:srgbClr val="F59E0B"/>
+                </a:solidFill>
+                <a:latin typeface="Calibri" pitchFamily="34" charset="0"/>
+              </a:rPr>
+              <a:t>ⓘ Code Smells Detetados</a:t>
+            </a:r>
+          </a:p>
+          <a:p>
+            <a:r>
+              <a:rPr lang="pt-PT" sz="1000" dirty="0">
+                <a:solidFill>
+                  <a:srgbClr val="94A3B8"/>
+                </a:solidFill>
+                <a:latin typeface="Calibri" pitchFamily="34" charset="0"/>
+              </a:rPr>
+              <a:t>• </a:t>
+            </a:r>
+            <a:r>
+              <a:rPr lang="pt-PT" sz="1000" dirty="0" err="1">
+                <a:solidFill>
+                  <a:srgbClr val="94A3B8"/>
+                </a:solidFill>
+                <a:latin typeface="Calibri" pitchFamily="34" charset="0"/>
+              </a:rPr>
+              <a:t>parseJwt</a:t>
+            </a:r>
+            <a:r>
+              <a:rPr lang="pt-PT" sz="1000" dirty="0">
+                <a:solidFill>
+                  <a:srgbClr val="94A3B8"/>
+                </a:solidFill>
+                <a:latin typeface="Calibri" pitchFamily="34" charset="0"/>
+              </a:rPr>
+              <a:t> duplicado (×5) </a:t>
+            </a:r>
+          </a:p>
+          <a:p>
+            <a:pPr marL="0" indent="0">
+              <a:buNone/>
+            </a:pPr>
+            <a:r>
+              <a:rPr lang="pt-PT" sz="1000" dirty="0">
+                <a:solidFill>
+                  <a:srgbClr val="94A3B8"/>
+                </a:solidFill>
+                <a:latin typeface="Calibri" pitchFamily="34" charset="0"/>
+              </a:rPr>
+              <a:t>• alert() nativo em vez de toasts </a:t>
+            </a:r>
+          </a:p>
+          <a:p>
+            <a:pPr marL="0" indent="0">
+              <a:buNone/>
+            </a:pPr>
+            <a:r>
+              <a:rPr lang="pt-PT" sz="1000" dirty="0">
+                <a:solidFill>
+                  <a:srgbClr val="94A3B8"/>
+                </a:solidFill>
+                <a:latin typeface="Calibri" pitchFamily="34" charset="0"/>
+              </a:rPr>
+              <a:t>• mapeamentos defensivos excessivos</a:t>
+            </a:r>
+          </a:p>
+        </p:txBody>
+      </p:sp>
+      <p:sp>
+        <p:nvSpPr>
+          <p:cNvPr id="30" name="Quote"/>
+          <p:cNvSpPr/>
+          <p:nvPr/>
+        </p:nvSpPr>
+        <p:spPr>
+          <a:xfrm>
+            <a:off x="274320" y="4790000"/>
+            <a:ext cx="8595360" cy="230000"/>
+          </a:xfrm>
+          <a:prstGeom prst="rect">
+            <a:avLst/>
+          </a:prstGeom>
+          <a:noFill/>
+          <a:ln/>
+        </p:spPr>
+        <p:txBody>
+          <a:bodyPr wrap="square" rtlCol="0" anchor="ctr"/>
+          <a:lstStyle/>
+          <a:p>
+            <a:pPr marL="0" indent="0" algn="ctr">
+              <a:buNone/>
+            </a:pPr>
+            <a:r>
+              <a:rPr lang="pt-PT" sz="1000" i="1" dirty="0">
+                <a:solidFill>
+                  <a:srgbClr val="64748B"/>
+                </a:solidFill>
+                <a:latin typeface="Calibri" pitchFamily="34" charset="0"/>
+              </a:rPr>
+              <a:t>“A IA funcionou como amplificador de capacidade — não como substituto do engenheiro de software.”</a:t>
+            </a:r>
+          </a:p>
+        </p:txBody>
+      </p:sp>
+      <p:sp>
+        <p:nvSpPr>
+          <p:cNvPr id="31" name="BottomBar"/>
+          <p:cNvSpPr/>
+          <p:nvPr/>
+        </p:nvSpPr>
+        <p:spPr>
+          <a:xfrm>
+            <a:off x="0" y="5074920"/>
+            <a:ext cx="9144000" cy="68580"/>
+          </a:xfrm>
+          <a:prstGeom prst="rect">
+            <a:avLst/>
+          </a:prstGeom>
+          <a:solidFill>
+            <a:srgbClr val="6366F1"/>
+          </a:solidFill>
+          <a:ln w="12700">
+            <a:solidFill>
+              <a:srgbClr val="6366F1"/>
+            </a:solidFill>
+          </a:ln>
+        </p:spPr>
+        <p:txBody>
+          <a:bodyPr/>
+          <a:lstStyle/>
+          <a:p>
+            <a:endParaRPr lang="en-US"/>
+          </a:p>
+        </p:txBody>
+      </p:sp>
+    </p:spTree>
+  </p:cSld>
+  <p:clrMapOvr>
+    <a:masterClrMapping/>
+  </p:clrMapOvr>
+</p:sld>
+</file>
+
+<file path=ppt/slides/slide14.xml><?xml version="1.0" encoding="utf-8"?>
+<p:sld xmlns:a="http://schemas.openxmlformats.org/drawingml/2006/main" xmlns:r="http://schemas.openxmlformats.org/officeDocument/2006/relationships" xmlns:p="http://schemas.openxmlformats.org/presentationml/2006/main">
   <p:cSld name="Slide 9">
     <p:bg>
       <p:bgPr>
@@ -1942,7 +6587,7 @@
                 <a:ea typeface="Calibri" pitchFamily="34" charset="-122"/>
                 <a:cs typeface="Calibri" pitchFamily="34" charset="-120"/>
               </a:rPr>
-              <a:t>Verificação, Validação &amp; Qualidade</a:t>
+              <a:t>4ª Fase: Verificação, Validação &amp; Qualidade</a:t>
             </a:r>
             <a:endParaRPr lang="en-US" sz="2800" dirty="0"/>
           </a:p>
@@ -4219,7 +8864,7 @@
 </p:sld>
 </file>
 
-<file path=ppt/slides/slide11.xml><?xml version="1.0" encoding="utf-8"?>
+<file path=ppt/slides/slide15.xml><?xml version="1.0" encoding="utf-8"?>
 <p:sld xmlns:a="http://schemas.openxmlformats.org/drawingml/2006/main" xmlns:r="http://schemas.openxmlformats.org/officeDocument/2006/relationships" xmlns:p="http://schemas.openxmlformats.org/presentationml/2006/main">
   <p:cSld name="Slide 10">
     <p:bg>
@@ -4837,13 +9482,13 @@
       </p:sp>
       <p:sp>
         <p:nvSpPr>
-          <p:cNvPr id="20" name="Shape 12"/>
-          <p:cNvSpPr/>
-          <p:nvPr/>
-        </p:nvSpPr>
-        <p:spPr>
-          <a:xfrm>
-            <a:off x="4663440" y="1307592"/>
+          <p:cNvPr id="23" name="Shape 15"/>
+          <p:cNvSpPr/>
+          <p:nvPr/>
+        </p:nvSpPr>
+        <p:spPr>
+          <a:xfrm>
+            <a:off x="4663440" y="1394460"/>
             <a:ext cx="685800" cy="292608"/>
           </a:xfrm>
           <a:prstGeom prst="rect">
@@ -4869,13 +9514,13 @@
       </p:sp>
       <p:sp>
         <p:nvSpPr>
-          <p:cNvPr id="21" name="Text 13"/>
-          <p:cNvSpPr/>
-          <p:nvPr/>
-        </p:nvSpPr>
-        <p:spPr>
-          <a:xfrm>
-            <a:off x="4663440" y="1316736"/>
+          <p:cNvPr id="24" name="Text 16"/>
+          <p:cNvSpPr/>
+          <p:nvPr/>
+        </p:nvSpPr>
+        <p:spPr>
+          <a:xfrm>
+            <a:off x="4663440" y="1429347"/>
             <a:ext cx="685800" cy="256032"/>
           </a:xfrm>
           <a:prstGeom prst="rect">
@@ -4908,13 +9553,13 @@
       </p:sp>
       <p:sp>
         <p:nvSpPr>
-          <p:cNvPr id="22" name="Text 14"/>
-          <p:cNvSpPr/>
-          <p:nvPr/>
-        </p:nvSpPr>
-        <p:spPr>
-          <a:xfrm>
-            <a:off x="5413248" y="1307592"/>
+          <p:cNvPr id="25" name="Text 17"/>
+          <p:cNvSpPr/>
+          <p:nvPr/>
+        </p:nvSpPr>
+        <p:spPr>
+          <a:xfrm>
+            <a:off x="5394960" y="1377243"/>
             <a:ext cx="3291840" cy="301752"/>
           </a:xfrm>
           <a:prstGeom prst="rect">
@@ -4939,7 +9584,7 @@
                 <a:ea typeface="Calibri" pitchFamily="34" charset="-122"/>
                 <a:cs typeface="Calibri" pitchFamily="34" charset="-120"/>
               </a:rPr>
-              <a:t>Migrar JWT de localStorage para cookies HttpOnly</a:t>
+              <a:t>Implementar refresh tokens (sessões longas)</a:t>
             </a:r>
             <a:endParaRPr lang="en-US" sz="1050" dirty="0"/>
           </a:p>
@@ -4947,123 +9592,13 @@
       </p:sp>
       <p:sp>
         <p:nvSpPr>
-          <p:cNvPr id="23" name="Shape 15"/>
-          <p:cNvSpPr/>
-          <p:nvPr/>
-        </p:nvSpPr>
-        <p:spPr>
-          <a:xfrm>
-            <a:off x="4663440" y="1682496"/>
-            <a:ext cx="685800" cy="292608"/>
-          </a:xfrm>
-          <a:prstGeom prst="rect">
-            <a:avLst/>
-          </a:prstGeom>
-          <a:solidFill>
-            <a:srgbClr val="1E293B"/>
-          </a:solidFill>
-          <a:ln w="12700">
-            <a:solidFill>
-              <a:srgbClr val="EF4444"/>
-            </a:solidFill>
-            <a:prstDash val="solid"/>
-          </a:ln>
-        </p:spPr>
-        <p:txBody>
-          <a:bodyPr/>
-          <a:lstStyle/>
-          <a:p>
-            <a:endParaRPr lang="en-US"/>
-          </a:p>
-        </p:txBody>
-      </p:sp>
-      <p:sp>
-        <p:nvSpPr>
-          <p:cNvPr id="24" name="Text 16"/>
-          <p:cNvSpPr/>
-          <p:nvPr/>
-        </p:nvSpPr>
-        <p:spPr>
-          <a:xfrm>
-            <a:off x="4663440" y="1691640"/>
-            <a:ext cx="685800" cy="256032"/>
-          </a:xfrm>
-          <a:prstGeom prst="rect">
-            <a:avLst/>
-          </a:prstGeom>
-          <a:noFill/>
-          <a:ln/>
-        </p:spPr>
-        <p:txBody>
-          <a:bodyPr wrap="square" rtlCol="0" anchor="ctr"/>
-          <a:lstStyle/>
-          <a:p>
-            <a:pPr marL="0" indent="0" algn="ctr">
-              <a:buNone/>
-            </a:pPr>
-            <a:r>
-              <a:rPr lang="en-US" sz="750" b="1" dirty="0">
-                <a:solidFill>
-                  <a:srgbClr val="EF4444"/>
-                </a:solidFill>
-                <a:latin typeface="Calibri" pitchFamily="34" charset="0"/>
-                <a:ea typeface="Calibri" pitchFamily="34" charset="-122"/>
-                <a:cs typeface="Calibri" pitchFamily="34" charset="-120"/>
-              </a:rPr>
-              <a:t>ALTA</a:t>
-            </a:r>
-            <a:endParaRPr lang="en-US" sz="750" dirty="0"/>
-          </a:p>
-        </p:txBody>
-      </p:sp>
-      <p:sp>
-        <p:nvSpPr>
-          <p:cNvPr id="25" name="Text 17"/>
-          <p:cNvSpPr/>
-          <p:nvPr/>
-        </p:nvSpPr>
-        <p:spPr>
-          <a:xfrm>
-            <a:off x="5413248" y="1682496"/>
-            <a:ext cx="3291840" cy="301752"/>
-          </a:xfrm>
-          <a:prstGeom prst="rect">
-            <a:avLst/>
-          </a:prstGeom>
-          <a:noFill/>
-          <a:ln/>
-        </p:spPr>
-        <p:txBody>
-          <a:bodyPr wrap="square" rtlCol="0" anchor="ctr"/>
-          <a:lstStyle/>
-          <a:p>
-            <a:pPr marL="0" indent="0">
-              <a:buNone/>
-            </a:pPr>
-            <a:r>
-              <a:rPr lang="en-US" sz="1050" dirty="0">
-                <a:solidFill>
-                  <a:srgbClr val="E2E8F0"/>
-                </a:solidFill>
-                <a:latin typeface="Calibri" pitchFamily="34" charset="0"/>
-                <a:ea typeface="Calibri" pitchFamily="34" charset="-122"/>
-                <a:cs typeface="Calibri" pitchFamily="34" charset="-120"/>
-              </a:rPr>
-              <a:t>Implementar refresh tokens (sessões longas)</a:t>
-            </a:r>
-            <a:endParaRPr lang="en-US" sz="1050" dirty="0"/>
-          </a:p>
-        </p:txBody>
-      </p:sp>
-      <p:sp>
-        <p:nvSpPr>
           <p:cNvPr id="29" name="Shape 21"/>
           <p:cNvSpPr/>
           <p:nvPr/>
         </p:nvSpPr>
         <p:spPr>
           <a:xfrm>
-            <a:off x="4663440" y="2057400"/>
+            <a:off x="4663440" y="1806558"/>
             <a:ext cx="685800" cy="292608"/>
           </a:xfrm>
           <a:prstGeom prst="rect">
@@ -5095,7 +9630,7 @@
         </p:nvSpPr>
         <p:spPr>
           <a:xfrm>
-            <a:off x="4663440" y="2066544"/>
+            <a:off x="4663440" y="1815702"/>
             <a:ext cx="685800" cy="256032"/>
           </a:xfrm>
           <a:prstGeom prst="rect">
@@ -5134,7 +9669,7 @@
         </p:nvSpPr>
         <p:spPr>
           <a:xfrm>
-            <a:off x="5413248" y="2029968"/>
+            <a:off x="5413248" y="1797414"/>
             <a:ext cx="3291840" cy="301752"/>
           </a:xfrm>
           <a:prstGeom prst="rect">
@@ -5173,7 +9708,7 @@
         </p:nvSpPr>
         <p:spPr>
           <a:xfrm>
-            <a:off x="4663440" y="2432304"/>
+            <a:off x="4663440" y="2181462"/>
             <a:ext cx="685800" cy="292608"/>
           </a:xfrm>
           <a:prstGeom prst="rect">
@@ -5205,7 +9740,7 @@
         </p:nvSpPr>
         <p:spPr>
           <a:xfrm>
-            <a:off x="4663440" y="2441448"/>
+            <a:off x="4663440" y="2190606"/>
             <a:ext cx="685800" cy="256032"/>
           </a:xfrm>
           <a:prstGeom prst="rect">
@@ -5244,7 +9779,7 @@
         </p:nvSpPr>
         <p:spPr>
           <a:xfrm>
-            <a:off x="5394960" y="2443178"/>
+            <a:off x="5394960" y="2210624"/>
             <a:ext cx="3291840" cy="301752"/>
           </a:xfrm>
           <a:prstGeom prst="rect">
@@ -5316,7 +9851,7 @@
         </p:nvSpPr>
         <p:spPr>
           <a:xfrm>
-            <a:off x="4663440" y="2807208"/>
+            <a:off x="4663440" y="2556366"/>
             <a:ext cx="685800" cy="292608"/>
           </a:xfrm>
           <a:prstGeom prst="rect">
@@ -5348,7 +9883,7 @@
         </p:nvSpPr>
         <p:spPr>
           <a:xfrm>
-            <a:off x="4663440" y="2816352"/>
+            <a:off x="4663440" y="2565510"/>
             <a:ext cx="685800" cy="256032"/>
           </a:xfrm>
           <a:prstGeom prst="rect">
@@ -5387,7 +9922,7 @@
         </p:nvSpPr>
         <p:spPr>
           <a:xfrm>
-            <a:off x="5394960" y="2807208"/>
+            <a:off x="5394960" y="2574654"/>
             <a:ext cx="3291840" cy="301752"/>
           </a:xfrm>
           <a:prstGeom prst="rect">
@@ -5458,7 +9993,7 @@
 </p:sld>
 </file>
 
-<file path=ppt/slides/slide12.xml><?xml version="1.0" encoding="utf-8"?>
+<file path=ppt/slides/slide16.xml><?xml version="1.0" encoding="utf-8"?>
 <p:sld xmlns:a="http://schemas.openxmlformats.org/drawingml/2006/main" xmlns:r="http://schemas.openxmlformats.org/officeDocument/2006/relationships" xmlns:p="http://schemas.openxmlformats.org/presentationml/2006/main">
   <p:cSld name="Slide 11">
     <p:bg>
@@ -5611,7 +10146,7 @@
                 <a:ea typeface="Consolas" pitchFamily="34" charset="-122"/>
                 <a:cs typeface="Consolas" pitchFamily="34" charset="-120"/>
               </a:rPr>
-              <a:t>docker compose up --build</a:t>
+              <a:t>docker compose up –build -d</a:t>
             </a:r>
             <a:endParaRPr lang="en-US" sz="1800" dirty="0"/>
           </a:p>
@@ -5911,7 +10446,7 @@
         </p:blipFill>
         <p:spPr>
           <a:xfrm>
-            <a:off x="940032" y="1880000"/>
+            <a:off x="1018728" y="1859560"/>
             <a:ext cx="380880" cy="380880"/>
           </a:xfrm>
           <a:prstGeom prst="rect">
@@ -6045,7 +10580,7 @@
         </p:blipFill>
         <p:spPr>
           <a:xfrm>
-            <a:off x="3181152" y="1880000"/>
+            <a:off x="3262152" y="1887100"/>
             <a:ext cx="380880" cy="380880"/>
           </a:xfrm>
           <a:prstGeom prst="rect">
@@ -6179,7 +10714,7 @@
         </p:blipFill>
         <p:spPr>
           <a:xfrm>
-            <a:off x="5422272" y="1880000"/>
+            <a:off x="5503272" y="1887100"/>
             <a:ext cx="380880" cy="380880"/>
           </a:xfrm>
           <a:prstGeom prst="rect">
@@ -6313,7 +10848,7 @@
         </p:blipFill>
         <p:spPr>
           <a:xfrm>
-            <a:off x="7663392" y="1880000"/>
+            <a:off x="7744392" y="1887100"/>
             <a:ext cx="380880" cy="380880"/>
           </a:xfrm>
           <a:prstGeom prst="rect">
@@ -6616,7 +11151,7 @@
         </p:blipFill>
         <p:spPr>
           <a:xfrm>
-            <a:off x="621792" y="1856232"/>
+            <a:off x="713232" y="1847088"/>
             <a:ext cx="347472" cy="347472"/>
           </a:xfrm>
           <a:prstGeom prst="rect">
@@ -6711,7 +11246,7 @@
         </p:blipFill>
         <p:spPr>
           <a:xfrm>
-            <a:off x="1737360" y="1856232"/>
+            <a:off x="1810512" y="1865376"/>
             <a:ext cx="347472" cy="347472"/>
           </a:xfrm>
           <a:prstGeom prst="rect">
@@ -6806,7 +11341,7 @@
         </p:blipFill>
         <p:spPr>
           <a:xfrm>
-            <a:off x="2852928" y="1856232"/>
+            <a:off x="2926080" y="1865376"/>
             <a:ext cx="347472" cy="347472"/>
           </a:xfrm>
           <a:prstGeom prst="rect">
@@ -6901,7 +11436,7 @@
         </p:blipFill>
         <p:spPr>
           <a:xfrm>
-            <a:off x="3968496" y="1856232"/>
+            <a:off x="4041648" y="1865376"/>
             <a:ext cx="347472" cy="347472"/>
           </a:xfrm>
           <a:prstGeom prst="rect">
@@ -8104,7 +12639,51 @@
                 <a:ea typeface="Calibri" pitchFamily="34" charset="-122"/>
                 <a:cs typeface="Calibri" pitchFamily="34" charset="-120"/>
               </a:rPr>
-              <a:t>Schemas Mongoose, services .NET, componentes React</a:t>
+              <a:t>API de dados, </a:t>
+            </a:r>
+            <a:r>
+              <a:rPr lang="en-US" sz="1050" dirty="0" err="1">
+                <a:solidFill>
+                  <a:srgbClr val="E2E8F0"/>
+                </a:solidFill>
+                <a:latin typeface="Calibri" pitchFamily="34" charset="0"/>
+                <a:ea typeface="Calibri" pitchFamily="34" charset="-122"/>
+                <a:cs typeface="Calibri" pitchFamily="34" charset="-120"/>
+              </a:rPr>
+              <a:t>servidor</a:t>
+            </a:r>
+            <a:r>
+              <a:rPr lang="en-US" sz="1050" dirty="0">
+                <a:solidFill>
+                  <a:srgbClr val="E2E8F0"/>
+                </a:solidFill>
+                <a:latin typeface="Calibri" pitchFamily="34" charset="0"/>
+                <a:ea typeface="Calibri" pitchFamily="34" charset="-122"/>
+                <a:cs typeface="Calibri" pitchFamily="34" charset="-120"/>
+              </a:rPr>
+              <a:t>  LN, </a:t>
+            </a:r>
+            <a:r>
+              <a:rPr lang="en-US" sz="1050" dirty="0" err="1">
+                <a:solidFill>
+                  <a:srgbClr val="E2E8F0"/>
+                </a:solidFill>
+                <a:latin typeface="Calibri" pitchFamily="34" charset="0"/>
+                <a:ea typeface="Calibri" pitchFamily="34" charset="-122"/>
+                <a:cs typeface="Calibri" pitchFamily="34" charset="-120"/>
+              </a:rPr>
+              <a:t>servidor</a:t>
+            </a:r>
+            <a:r>
+              <a:rPr lang="en-US" sz="1050" dirty="0">
+                <a:solidFill>
+                  <a:srgbClr val="E2E8F0"/>
+                </a:solidFill>
+                <a:latin typeface="Calibri" pitchFamily="34" charset="0"/>
+                <a:ea typeface="Calibri" pitchFamily="34" charset="-122"/>
+                <a:cs typeface="Calibri" pitchFamily="34" charset="-120"/>
+              </a:rPr>
+              <a:t> Frontend</a:t>
             </a:r>
             <a:endParaRPr lang="en-US" sz="1050" dirty="0"/>
           </a:p>
@@ -8920,7 +13499,29 @@
                 <a:ea typeface="Calibri" pitchFamily="34" charset="-122"/>
                 <a:cs typeface="Calibri" pitchFamily="34" charset="-120"/>
               </a:rPr>
-              <a:t>Engenharia de Requisitos</a:t>
+              <a:t>1ª Fase: </a:t>
+            </a:r>
+            <a:r>
+              <a:rPr lang="en-US" sz="2800" b="1" dirty="0" err="1">
+                <a:solidFill>
+                  <a:srgbClr val="FFFFFF"/>
+                </a:solidFill>
+                <a:latin typeface="Calibri" pitchFamily="34" charset="0"/>
+                <a:ea typeface="Calibri" pitchFamily="34" charset="-122"/>
+                <a:cs typeface="Calibri" pitchFamily="34" charset="-120"/>
+              </a:rPr>
+              <a:t>Engenharia</a:t>
+            </a:r>
+            <a:r>
+              <a:rPr lang="en-US" sz="2800" b="1" dirty="0">
+                <a:solidFill>
+                  <a:srgbClr val="FFFFFF"/>
+                </a:solidFill>
+                <a:latin typeface="Calibri" pitchFamily="34" charset="0"/>
+                <a:ea typeface="Calibri" pitchFamily="34" charset="-122"/>
+                <a:cs typeface="Calibri" pitchFamily="34" charset="-120"/>
+              </a:rPr>
+              <a:t> de Requisitos</a:t>
             </a:r>
             <a:endParaRPr lang="en-US" sz="2800" dirty="0"/>
           </a:p>
@@ -10434,7 +15035,29 @@
                 <a:ea typeface="Calibri" pitchFamily="34" charset="-122"/>
                 <a:cs typeface="Calibri" pitchFamily="34" charset="-120"/>
               </a:rPr>
-              <a:t>Arquitetura do Sistema</a:t>
+              <a:t>2ª Fase: </a:t>
+            </a:r>
+            <a:r>
+              <a:rPr lang="en-US" sz="2800" b="1" dirty="0" err="1">
+                <a:solidFill>
+                  <a:srgbClr val="FFFFFF"/>
+                </a:solidFill>
+                <a:latin typeface="Calibri" pitchFamily="34" charset="0"/>
+                <a:ea typeface="Calibri" pitchFamily="34" charset="-122"/>
+                <a:cs typeface="Calibri" pitchFamily="34" charset="-120"/>
+              </a:rPr>
+              <a:t>Arquitetura</a:t>
+            </a:r>
+            <a:r>
+              <a:rPr lang="en-US" sz="2800" b="1" dirty="0">
+                <a:solidFill>
+                  <a:srgbClr val="FFFFFF"/>
+                </a:solidFill>
+                <a:latin typeface="Calibri" pitchFamily="34" charset="0"/>
+                <a:ea typeface="Calibri" pitchFamily="34" charset="-122"/>
+                <a:cs typeface="Calibri" pitchFamily="34" charset="-120"/>
+              </a:rPr>
+              <a:t> do Sistema</a:t>
             </a:r>
             <a:endParaRPr lang="en-US" sz="2800" dirty="0"/>
           </a:p>
@@ -11098,7 +15721,29 @@
                 <a:ea typeface="Calibri" pitchFamily="34" charset="-122"/>
                 <a:cs typeface="Calibri" pitchFamily="34" charset="-120"/>
               </a:rPr>
-              <a:t>· 4 contentores Docker</a:t>
+              <a:t>· 4 </a:t>
+            </a:r>
+            <a:r>
+              <a:rPr lang="en-US" sz="1050" dirty="0" err="1">
+                <a:solidFill>
+                  <a:srgbClr val="E2E8F0"/>
+                </a:solidFill>
+                <a:latin typeface="Calibri" pitchFamily="34" charset="0"/>
+                <a:ea typeface="Calibri" pitchFamily="34" charset="-122"/>
+                <a:cs typeface="Calibri" pitchFamily="34" charset="-120"/>
+              </a:rPr>
+              <a:t>conainers</a:t>
+            </a:r>
+            <a:r>
+              <a:rPr lang="en-US" sz="1050" dirty="0">
+                <a:solidFill>
+                  <a:srgbClr val="E2E8F0"/>
+                </a:solidFill>
+                <a:latin typeface="Calibri" pitchFamily="34" charset="0"/>
+                <a:ea typeface="Calibri" pitchFamily="34" charset="-122"/>
+                <a:cs typeface="Calibri" pitchFamily="34" charset="-120"/>
+              </a:rPr>
+              <a:t> Docker</a:t>
             </a:r>
             <a:endParaRPr lang="en-US" sz="1050" dirty="0"/>
           </a:p>
@@ -12820,7 +17465,7 @@
 
 <file path=ppt/slides/slide8.xml><?xml version="1.0" encoding="utf-8"?>
 <p:sld xmlns:a="http://schemas.openxmlformats.org/drawingml/2006/main" xmlns:r="http://schemas.openxmlformats.org/officeDocument/2006/relationships" xmlns:p="http://schemas.openxmlformats.org/presentationml/2006/main">
-  <p:cSld name="Slide 7">
+  <p:cSld>
     <p:bg>
       <p:bgPr>
         <a:solidFill>
@@ -12831,7 +17476,13 @@
     </p:bg>
     <p:spTree>
       <p:nvGrpSpPr>
-        <p:cNvPr id="1" name=""/>
+        <p:cNvPr id="1" name="">
+          <a:extLst>
+            <a:ext uri="{FF2B5EF4-FFF2-40B4-BE49-F238E27FC236}">
+              <a16:creationId xmlns:a16="http://schemas.microsoft.com/office/drawing/2014/main" id="{8D129C7E-3145-AFC6-E306-5F0BB77185C0}"/>
+            </a:ext>
+          </a:extLst>
+        </p:cNvPr>
         <p:cNvGrpSpPr/>
         <p:nvPr/>
       </p:nvGrpSpPr>
@@ -12845,7 +17496,13 @@
       </p:grpSpPr>
       <p:sp>
         <p:nvSpPr>
-          <p:cNvPr id="2" name="Shape 0"/>
+          <p:cNvPr id="2" name="Shape 0">
+            <a:extLst>
+              <a:ext uri="{FF2B5EF4-FFF2-40B4-BE49-F238E27FC236}">
+                <a16:creationId xmlns:a16="http://schemas.microsoft.com/office/drawing/2014/main" id="{3F1AB843-295D-DFBE-2005-F6E2A45F4B74}"/>
+              </a:ext>
+            </a:extLst>
+          </p:cNvPr>
           <p:cNvSpPr/>
           <p:nvPr/>
         </p:nvSpPr>
@@ -12877,7 +17534,13 @@
       </p:sp>
       <p:sp>
         <p:nvSpPr>
-          <p:cNvPr id="3" name="Text 1"/>
+          <p:cNvPr id="3" name="Text 1">
+            <a:extLst>
+              <a:ext uri="{FF2B5EF4-FFF2-40B4-BE49-F238E27FC236}">
+                <a16:creationId xmlns:a16="http://schemas.microsoft.com/office/drawing/2014/main" id="{76F5E76C-510A-5AD2-15DF-497381F69162}"/>
+              </a:ext>
+            </a:extLst>
+          </p:cNvPr>
           <p:cNvSpPr/>
           <p:nvPr/>
         </p:nvSpPr>
@@ -12908,7 +17571,7 @@
                 <a:ea typeface="Calibri" pitchFamily="34" charset="-122"/>
                 <a:cs typeface="Calibri" pitchFamily="34" charset="-120"/>
               </a:rPr>
-              <a:t>Segurança e Controlo de Acessos</a:t>
+              <a:t>Design da Interface Web</a:t>
             </a:r>
             <a:endParaRPr lang="en-US" sz="2800" dirty="0"/>
           </a:p>
@@ -12916,1625 +17579,13 @@
       </p:sp>
       <p:sp>
         <p:nvSpPr>
-          <p:cNvPr id="4" name="Shape 2"/>
-          <p:cNvSpPr/>
-          <p:nvPr/>
-        </p:nvSpPr>
-        <p:spPr>
-          <a:xfrm>
-            <a:off x="274320" y="960120"/>
-            <a:ext cx="1371600" cy="1005840"/>
-          </a:xfrm>
-          <a:prstGeom prst="ellipse">
-            <a:avLst/>
-          </a:prstGeom>
-          <a:solidFill>
-            <a:srgbClr val="1E3A5F"/>
-          </a:solidFill>
-          <a:ln w="25400">
-            <a:solidFill>
-              <a:srgbClr val="0EA5E9"/>
-            </a:solidFill>
-            <a:prstDash val="solid"/>
-          </a:ln>
-        </p:spPr>
-        <p:txBody>
-          <a:bodyPr/>
-          <a:lstStyle/>
-          <a:p>
-            <a:endParaRPr lang="en-US"/>
-          </a:p>
-        </p:txBody>
-      </p:sp>
-      <p:sp>
-        <p:nvSpPr>
-          <p:cNvPr id="5" name="Text 3"/>
-          <p:cNvSpPr/>
-          <p:nvPr/>
-        </p:nvSpPr>
-        <p:spPr>
-          <a:xfrm>
-            <a:off x="274320" y="987552"/>
-            <a:ext cx="1371600" cy="411480"/>
-          </a:xfrm>
-          <a:prstGeom prst="rect">
-            <a:avLst/>
-          </a:prstGeom>
-          <a:noFill/>
-          <a:ln/>
-        </p:spPr>
-        <p:txBody>
-          <a:bodyPr wrap="square" rtlCol="0" anchor="ctr"/>
-          <a:lstStyle/>
-          <a:p>
-            <a:pPr marL="0" indent="0" algn="ctr">
-              <a:buNone/>
-            </a:pPr>
-            <a:r>
-              <a:rPr lang="en-US" sz="2200" b="1" dirty="0">
-                <a:solidFill>
-                  <a:srgbClr val="0EA5E9"/>
-                </a:solidFill>
-                <a:latin typeface="Calibri" pitchFamily="34" charset="0"/>
-                <a:ea typeface="Calibri" pitchFamily="34" charset="-122"/>
-                <a:cs typeface="Calibri" pitchFamily="34" charset="-120"/>
-              </a:rPr>
-              <a:t>1</a:t>
-            </a:r>
-            <a:endParaRPr lang="en-US" sz="2200" dirty="0"/>
-          </a:p>
-        </p:txBody>
-      </p:sp>
-      <p:sp>
-        <p:nvSpPr>
-          <p:cNvPr id="6" name="Text 4"/>
-          <p:cNvSpPr/>
-          <p:nvPr/>
-        </p:nvSpPr>
-        <p:spPr>
-          <a:xfrm>
-            <a:off x="274320" y="1417320"/>
-            <a:ext cx="1371600" cy="274320"/>
-          </a:xfrm>
-          <a:prstGeom prst="rect">
-            <a:avLst/>
-          </a:prstGeom>
-          <a:noFill/>
-          <a:ln/>
-        </p:spPr>
-        <p:txBody>
-          <a:bodyPr wrap="square" rtlCol="0" anchor="ctr"/>
-          <a:lstStyle/>
-          <a:p>
-            <a:pPr marL="0" indent="0" algn="ctr">
-              <a:buNone/>
-            </a:pPr>
-            <a:r>
-              <a:rPr lang="en-US" sz="1100" b="1" dirty="0">
-                <a:solidFill>
-                  <a:srgbClr val="FFFFFF"/>
-                </a:solidFill>
-                <a:latin typeface="Calibri" pitchFamily="34" charset="0"/>
-                <a:ea typeface="Calibri" pitchFamily="34" charset="-122"/>
-                <a:cs typeface="Calibri" pitchFamily="34" charset="-120"/>
-              </a:rPr>
-              <a:t>Login</a:t>
-            </a:r>
-            <a:endParaRPr lang="en-US" sz="1100" dirty="0"/>
-          </a:p>
-        </p:txBody>
-      </p:sp>
-      <p:sp>
-        <p:nvSpPr>
-          <p:cNvPr id="7" name="Text 5"/>
-          <p:cNvSpPr/>
-          <p:nvPr/>
-        </p:nvSpPr>
-        <p:spPr>
-          <a:xfrm>
-            <a:off x="274320" y="2103120"/>
-            <a:ext cx="1371600" cy="274320"/>
-          </a:xfrm>
-          <a:prstGeom prst="rect">
-            <a:avLst/>
-          </a:prstGeom>
-          <a:noFill/>
-          <a:ln/>
-        </p:spPr>
-        <p:txBody>
-          <a:bodyPr wrap="square" rtlCol="0" anchor="ctr"/>
-          <a:lstStyle/>
-          <a:p>
-            <a:pPr marL="0" indent="0" algn="ctr">
-              <a:buNone/>
-            </a:pPr>
-            <a:r>
-              <a:rPr lang="en-US" sz="1000" dirty="0">
-                <a:solidFill>
-                  <a:srgbClr val="94A3B8"/>
-                </a:solidFill>
-                <a:latin typeface="Calibri" pitchFamily="34" charset="0"/>
-                <a:ea typeface="Calibri" pitchFamily="34" charset="-122"/>
-                <a:cs typeface="Calibri" pitchFamily="34" charset="-120"/>
-              </a:rPr>
-              <a:t>NIF/Nº Mecan.</a:t>
-            </a:r>
-            <a:endParaRPr lang="en-US" sz="1000" dirty="0"/>
-          </a:p>
-        </p:txBody>
-      </p:sp>
-      <p:sp>
-        <p:nvSpPr>
-          <p:cNvPr id="8" name="Shape 6"/>
-          <p:cNvSpPr/>
-          <p:nvPr/>
-        </p:nvSpPr>
-        <p:spPr>
-          <a:xfrm>
-            <a:off x="1645920" y="1417320"/>
-            <a:ext cx="347472" cy="45720"/>
-          </a:xfrm>
-          <a:prstGeom prst="rect">
-            <a:avLst/>
-          </a:prstGeom>
-          <a:solidFill>
-            <a:srgbClr val="334155"/>
-          </a:solidFill>
-          <a:ln w="12700">
-            <a:solidFill>
-              <a:srgbClr val="334155"/>
-            </a:solidFill>
-            <a:prstDash val="solid"/>
-          </a:ln>
-        </p:spPr>
-        <p:txBody>
-          <a:bodyPr/>
-          <a:lstStyle/>
-          <a:p>
-            <a:endParaRPr lang="en-US"/>
-          </a:p>
-        </p:txBody>
-      </p:sp>
-      <p:sp>
-        <p:nvSpPr>
-          <p:cNvPr id="9" name="Shape 7"/>
-          <p:cNvSpPr/>
-          <p:nvPr/>
-        </p:nvSpPr>
-        <p:spPr>
-          <a:xfrm>
-            <a:off x="1993392" y="960120"/>
-            <a:ext cx="1371600" cy="1005840"/>
-          </a:xfrm>
-          <a:prstGeom prst="ellipse">
-            <a:avLst/>
-          </a:prstGeom>
-          <a:solidFill>
-            <a:srgbClr val="1E3A5F"/>
-          </a:solidFill>
-          <a:ln w="25400">
-            <a:solidFill>
-              <a:srgbClr val="0EA5E9"/>
-            </a:solidFill>
-            <a:prstDash val="solid"/>
-          </a:ln>
-        </p:spPr>
-        <p:txBody>
-          <a:bodyPr/>
-          <a:lstStyle/>
-          <a:p>
-            <a:endParaRPr lang="en-US"/>
-          </a:p>
-        </p:txBody>
-      </p:sp>
-      <p:sp>
-        <p:nvSpPr>
-          <p:cNvPr id="10" name="Text 8"/>
-          <p:cNvSpPr/>
-          <p:nvPr/>
-        </p:nvSpPr>
-        <p:spPr>
-          <a:xfrm>
-            <a:off x="1993392" y="987552"/>
-            <a:ext cx="1371600" cy="411480"/>
-          </a:xfrm>
-          <a:prstGeom prst="rect">
-            <a:avLst/>
-          </a:prstGeom>
-          <a:noFill/>
-          <a:ln/>
-        </p:spPr>
-        <p:txBody>
-          <a:bodyPr wrap="square" rtlCol="0" anchor="ctr"/>
-          <a:lstStyle/>
-          <a:p>
-            <a:pPr marL="0" indent="0" algn="ctr">
-              <a:buNone/>
-            </a:pPr>
-            <a:r>
-              <a:rPr lang="en-US" sz="2200" b="1" dirty="0">
-                <a:solidFill>
-                  <a:srgbClr val="0EA5E9"/>
-                </a:solidFill>
-                <a:latin typeface="Calibri" pitchFamily="34" charset="0"/>
-                <a:ea typeface="Calibri" pitchFamily="34" charset="-122"/>
-                <a:cs typeface="Calibri" pitchFamily="34" charset="-120"/>
-              </a:rPr>
-              <a:t>2</a:t>
-            </a:r>
-            <a:endParaRPr lang="en-US" sz="2200" dirty="0"/>
-          </a:p>
-        </p:txBody>
-      </p:sp>
-      <p:sp>
-        <p:nvSpPr>
-          <p:cNvPr id="11" name="Text 9"/>
-          <p:cNvSpPr/>
-          <p:nvPr/>
-        </p:nvSpPr>
-        <p:spPr>
-          <a:xfrm>
-            <a:off x="1993392" y="1417320"/>
-            <a:ext cx="1371600" cy="274320"/>
-          </a:xfrm>
-          <a:prstGeom prst="rect">
-            <a:avLst/>
-          </a:prstGeom>
-          <a:noFill/>
-          <a:ln/>
-        </p:spPr>
-        <p:txBody>
-          <a:bodyPr wrap="square" rtlCol="0" anchor="ctr"/>
-          <a:lstStyle/>
-          <a:p>
-            <a:pPr marL="0" indent="0" algn="ctr">
-              <a:buNone/>
-            </a:pPr>
-            <a:r>
-              <a:rPr lang="en-US" sz="1100" b="1" dirty="0">
-                <a:solidFill>
-                  <a:srgbClr val="FFFFFF"/>
-                </a:solidFill>
-                <a:latin typeface="Calibri" pitchFamily="34" charset="0"/>
-                <a:ea typeface="Calibri" pitchFamily="34" charset="-122"/>
-                <a:cs typeface="Calibri" pitchFamily="34" charset="-120"/>
-              </a:rPr>
-              <a:t>BCrypt</a:t>
-            </a:r>
-            <a:endParaRPr lang="en-US" sz="1100" dirty="0"/>
-          </a:p>
-        </p:txBody>
-      </p:sp>
-      <p:sp>
-        <p:nvSpPr>
-          <p:cNvPr id="12" name="Text 10"/>
-          <p:cNvSpPr/>
-          <p:nvPr/>
-        </p:nvSpPr>
-        <p:spPr>
-          <a:xfrm>
-            <a:off x="1993392" y="2103120"/>
-            <a:ext cx="1371600" cy="274320"/>
-          </a:xfrm>
-          <a:prstGeom prst="rect">
-            <a:avLst/>
-          </a:prstGeom>
-          <a:noFill/>
-          <a:ln/>
-        </p:spPr>
-        <p:txBody>
-          <a:bodyPr wrap="square" rtlCol="0" anchor="ctr"/>
-          <a:lstStyle/>
-          <a:p>
-            <a:pPr marL="0" indent="0" algn="ctr">
-              <a:buNone/>
-            </a:pPr>
-            <a:r>
-              <a:rPr lang="en-US" sz="1000" dirty="0">
-                <a:solidFill>
-                  <a:srgbClr val="94A3B8"/>
-                </a:solidFill>
-                <a:latin typeface="Calibri" pitchFamily="34" charset="0"/>
-                <a:ea typeface="Calibri" pitchFamily="34" charset="-122"/>
-                <a:cs typeface="Calibri" pitchFamily="34" charset="-120"/>
-              </a:rPr>
-              <a:t>Verificação hash</a:t>
-            </a:r>
-            <a:endParaRPr lang="en-US" sz="1000" dirty="0"/>
-          </a:p>
-        </p:txBody>
-      </p:sp>
-      <p:sp>
-        <p:nvSpPr>
-          <p:cNvPr id="13" name="Shape 11"/>
-          <p:cNvSpPr/>
-          <p:nvPr/>
-        </p:nvSpPr>
-        <p:spPr>
-          <a:xfrm>
-            <a:off x="3364992" y="1417320"/>
-            <a:ext cx="347472" cy="45720"/>
-          </a:xfrm>
-          <a:prstGeom prst="rect">
-            <a:avLst/>
-          </a:prstGeom>
-          <a:solidFill>
-            <a:srgbClr val="334155"/>
-          </a:solidFill>
-          <a:ln w="12700">
-            <a:solidFill>
-              <a:srgbClr val="334155"/>
-            </a:solidFill>
-            <a:prstDash val="solid"/>
-          </a:ln>
-        </p:spPr>
-        <p:txBody>
-          <a:bodyPr/>
-          <a:lstStyle/>
-          <a:p>
-            <a:endParaRPr lang="en-US"/>
-          </a:p>
-        </p:txBody>
-      </p:sp>
-      <p:sp>
-        <p:nvSpPr>
-          <p:cNvPr id="14" name="Shape 12"/>
-          <p:cNvSpPr/>
-          <p:nvPr/>
-        </p:nvSpPr>
-        <p:spPr>
-          <a:xfrm>
-            <a:off x="3712464" y="960120"/>
-            <a:ext cx="1371600" cy="1005840"/>
-          </a:xfrm>
-          <a:prstGeom prst="ellipse">
-            <a:avLst/>
-          </a:prstGeom>
-          <a:solidFill>
-            <a:srgbClr val="1E3A5F"/>
-          </a:solidFill>
-          <a:ln w="25400">
-            <a:solidFill>
-              <a:srgbClr val="0EA5E9"/>
-            </a:solidFill>
-            <a:prstDash val="solid"/>
-          </a:ln>
-        </p:spPr>
-        <p:txBody>
-          <a:bodyPr/>
-          <a:lstStyle/>
-          <a:p>
-            <a:endParaRPr lang="en-US"/>
-          </a:p>
-        </p:txBody>
-      </p:sp>
-      <p:sp>
-        <p:nvSpPr>
-          <p:cNvPr id="15" name="Text 13"/>
-          <p:cNvSpPr/>
-          <p:nvPr/>
-        </p:nvSpPr>
-        <p:spPr>
-          <a:xfrm>
-            <a:off x="3712464" y="987552"/>
-            <a:ext cx="1371600" cy="411480"/>
-          </a:xfrm>
-          <a:prstGeom prst="rect">
-            <a:avLst/>
-          </a:prstGeom>
-          <a:noFill/>
-          <a:ln/>
-        </p:spPr>
-        <p:txBody>
-          <a:bodyPr wrap="square" rtlCol="0" anchor="ctr"/>
-          <a:lstStyle/>
-          <a:p>
-            <a:pPr marL="0" indent="0" algn="ctr">
-              <a:buNone/>
-            </a:pPr>
-            <a:r>
-              <a:rPr lang="en-US" sz="2200" b="1" dirty="0">
-                <a:solidFill>
-                  <a:srgbClr val="0EA5E9"/>
-                </a:solidFill>
-                <a:latin typeface="Calibri" pitchFamily="34" charset="0"/>
-                <a:ea typeface="Calibri" pitchFamily="34" charset="-122"/>
-                <a:cs typeface="Calibri" pitchFamily="34" charset="-120"/>
-              </a:rPr>
-              <a:t>3</a:t>
-            </a:r>
-            <a:endParaRPr lang="en-US" sz="2200" dirty="0"/>
-          </a:p>
-        </p:txBody>
-      </p:sp>
-      <p:sp>
-        <p:nvSpPr>
-          <p:cNvPr id="16" name="Text 14"/>
-          <p:cNvSpPr/>
-          <p:nvPr/>
-        </p:nvSpPr>
-        <p:spPr>
-          <a:xfrm>
-            <a:off x="3712464" y="1417320"/>
-            <a:ext cx="1371600" cy="274320"/>
-          </a:xfrm>
-          <a:prstGeom prst="rect">
-            <a:avLst/>
-          </a:prstGeom>
-          <a:noFill/>
-          <a:ln/>
-        </p:spPr>
-        <p:txBody>
-          <a:bodyPr wrap="square" rtlCol="0" anchor="ctr"/>
-          <a:lstStyle/>
-          <a:p>
-            <a:pPr marL="0" indent="0" algn="ctr">
-              <a:buNone/>
-            </a:pPr>
-            <a:r>
-              <a:rPr lang="en-US" sz="1100" b="1" dirty="0">
-                <a:solidFill>
-                  <a:srgbClr val="FFFFFF"/>
-                </a:solidFill>
-                <a:latin typeface="Calibri" pitchFamily="34" charset="0"/>
-                <a:ea typeface="Calibri" pitchFamily="34" charset="-122"/>
-                <a:cs typeface="Calibri" pitchFamily="34" charset="-120"/>
-              </a:rPr>
-              <a:t>JWT</a:t>
-            </a:r>
-            <a:endParaRPr lang="en-US" sz="1100" dirty="0"/>
-          </a:p>
-        </p:txBody>
-      </p:sp>
-      <p:sp>
-        <p:nvSpPr>
-          <p:cNvPr id="17" name="Text 15"/>
-          <p:cNvSpPr/>
-          <p:nvPr/>
-        </p:nvSpPr>
-        <p:spPr>
-          <a:xfrm>
-            <a:off x="3712464" y="2103120"/>
-            <a:ext cx="1371600" cy="274320"/>
-          </a:xfrm>
-          <a:prstGeom prst="rect">
-            <a:avLst/>
-          </a:prstGeom>
-          <a:noFill/>
-          <a:ln/>
-        </p:spPr>
-        <p:txBody>
-          <a:bodyPr wrap="square" rtlCol="0" anchor="ctr"/>
-          <a:lstStyle/>
-          <a:p>
-            <a:pPr marL="0" indent="0" algn="ctr">
-              <a:buNone/>
-            </a:pPr>
-            <a:r>
-              <a:rPr lang="en-US" sz="1000" dirty="0">
-                <a:solidFill>
-                  <a:srgbClr val="94A3B8"/>
-                </a:solidFill>
-                <a:latin typeface="Calibri" pitchFamily="34" charset="0"/>
-                <a:ea typeface="Calibri" pitchFamily="34" charset="-122"/>
-                <a:cs typeface="Calibri" pitchFamily="34" charset="-120"/>
-              </a:rPr>
-              <a:t>Token HMAC-SHA256</a:t>
-            </a:r>
-            <a:endParaRPr lang="en-US" sz="1000" dirty="0"/>
-          </a:p>
-        </p:txBody>
-      </p:sp>
-      <p:sp>
-        <p:nvSpPr>
-          <p:cNvPr id="18" name="Shape 16"/>
-          <p:cNvSpPr/>
-          <p:nvPr/>
-        </p:nvSpPr>
-        <p:spPr>
-          <a:xfrm>
-            <a:off x="5084064" y="1417320"/>
-            <a:ext cx="347472" cy="45720"/>
-          </a:xfrm>
-          <a:prstGeom prst="rect">
-            <a:avLst/>
-          </a:prstGeom>
-          <a:solidFill>
-            <a:srgbClr val="334155"/>
-          </a:solidFill>
-          <a:ln w="12700">
-            <a:solidFill>
-              <a:srgbClr val="334155"/>
-            </a:solidFill>
-            <a:prstDash val="solid"/>
-          </a:ln>
-        </p:spPr>
-        <p:txBody>
-          <a:bodyPr/>
-          <a:lstStyle/>
-          <a:p>
-            <a:endParaRPr lang="en-US"/>
-          </a:p>
-        </p:txBody>
-      </p:sp>
-      <p:sp>
-        <p:nvSpPr>
-          <p:cNvPr id="19" name="Shape 17"/>
-          <p:cNvSpPr/>
-          <p:nvPr/>
-        </p:nvSpPr>
-        <p:spPr>
-          <a:xfrm>
-            <a:off x="5431536" y="960120"/>
-            <a:ext cx="1371600" cy="1005840"/>
-          </a:xfrm>
-          <a:prstGeom prst="ellipse">
-            <a:avLst/>
-          </a:prstGeom>
-          <a:solidFill>
-            <a:srgbClr val="1E3A5F"/>
-          </a:solidFill>
-          <a:ln w="25400">
-            <a:solidFill>
-              <a:srgbClr val="0EA5E9"/>
-            </a:solidFill>
-            <a:prstDash val="solid"/>
-          </a:ln>
-        </p:spPr>
-        <p:txBody>
-          <a:bodyPr/>
-          <a:lstStyle/>
-          <a:p>
-            <a:endParaRPr lang="en-US"/>
-          </a:p>
-        </p:txBody>
-      </p:sp>
-      <p:sp>
-        <p:nvSpPr>
-          <p:cNvPr id="20" name="Text 18"/>
-          <p:cNvSpPr/>
-          <p:nvPr/>
-        </p:nvSpPr>
-        <p:spPr>
-          <a:xfrm>
-            <a:off x="5431536" y="987552"/>
-            <a:ext cx="1371600" cy="411480"/>
-          </a:xfrm>
-          <a:prstGeom prst="rect">
-            <a:avLst/>
-          </a:prstGeom>
-          <a:noFill/>
-          <a:ln/>
-        </p:spPr>
-        <p:txBody>
-          <a:bodyPr wrap="square" rtlCol="0" anchor="ctr"/>
-          <a:lstStyle/>
-          <a:p>
-            <a:pPr marL="0" indent="0" algn="ctr">
-              <a:buNone/>
-            </a:pPr>
-            <a:r>
-              <a:rPr lang="en-US" sz="2200" b="1" dirty="0">
-                <a:solidFill>
-                  <a:srgbClr val="0EA5E9"/>
-                </a:solidFill>
-                <a:latin typeface="Calibri" pitchFamily="34" charset="0"/>
-                <a:ea typeface="Calibri" pitchFamily="34" charset="-122"/>
-                <a:cs typeface="Calibri" pitchFamily="34" charset="-120"/>
-              </a:rPr>
-              <a:t>4</a:t>
-            </a:r>
-            <a:endParaRPr lang="en-US" sz="2200" dirty="0"/>
-          </a:p>
-        </p:txBody>
-      </p:sp>
-      <p:sp>
-        <p:nvSpPr>
-          <p:cNvPr id="21" name="Text 19"/>
-          <p:cNvSpPr/>
-          <p:nvPr/>
-        </p:nvSpPr>
-        <p:spPr>
-          <a:xfrm>
-            <a:off x="5431536" y="1417320"/>
-            <a:ext cx="1371600" cy="274320"/>
-          </a:xfrm>
-          <a:prstGeom prst="rect">
-            <a:avLst/>
-          </a:prstGeom>
-          <a:noFill/>
-          <a:ln/>
-        </p:spPr>
-        <p:txBody>
-          <a:bodyPr wrap="square" rtlCol="0" anchor="ctr"/>
-          <a:lstStyle/>
-          <a:p>
-            <a:pPr marL="0" indent="0" algn="ctr">
-              <a:buNone/>
-            </a:pPr>
-            <a:r>
-              <a:rPr lang="en-US" sz="1100" b="1" dirty="0">
-                <a:solidFill>
-                  <a:srgbClr val="FFFFFF"/>
-                </a:solidFill>
-                <a:latin typeface="Calibri" pitchFamily="34" charset="0"/>
-                <a:ea typeface="Calibri" pitchFamily="34" charset="-122"/>
-                <a:cs typeface="Calibri" pitchFamily="34" charset="-120"/>
-              </a:rPr>
-              <a:t>RBAC</a:t>
-            </a:r>
-            <a:endParaRPr lang="en-US" sz="1100" dirty="0"/>
-          </a:p>
-        </p:txBody>
-      </p:sp>
-      <p:sp>
-        <p:nvSpPr>
-          <p:cNvPr id="22" name="Text 20"/>
-          <p:cNvSpPr/>
-          <p:nvPr/>
-        </p:nvSpPr>
-        <p:spPr>
-          <a:xfrm>
-            <a:off x="5431536" y="2103120"/>
-            <a:ext cx="1371600" cy="274320"/>
-          </a:xfrm>
-          <a:prstGeom prst="rect">
-            <a:avLst/>
-          </a:prstGeom>
-          <a:noFill/>
-          <a:ln/>
-        </p:spPr>
-        <p:txBody>
-          <a:bodyPr wrap="square" rtlCol="0" anchor="ctr"/>
-          <a:lstStyle/>
-          <a:p>
-            <a:pPr marL="0" indent="0" algn="ctr">
-              <a:buNone/>
-            </a:pPr>
-            <a:r>
-              <a:rPr lang="en-US" sz="1000" dirty="0">
-                <a:solidFill>
-                  <a:srgbClr val="94A3B8"/>
-                </a:solidFill>
-                <a:latin typeface="Calibri" pitchFamily="34" charset="0"/>
-                <a:ea typeface="Calibri" pitchFamily="34" charset="-122"/>
-                <a:cs typeface="Calibri" pitchFamily="34" charset="-120"/>
-              </a:rPr>
-              <a:t>Claims por cargo</a:t>
-            </a:r>
-            <a:endParaRPr lang="en-US" sz="1000" dirty="0"/>
-          </a:p>
-        </p:txBody>
-      </p:sp>
-      <p:sp>
-        <p:nvSpPr>
-          <p:cNvPr id="23" name="Shape 21"/>
-          <p:cNvSpPr/>
-          <p:nvPr/>
-        </p:nvSpPr>
-        <p:spPr>
-          <a:xfrm>
-            <a:off x="6803136" y="1417320"/>
-            <a:ext cx="347472" cy="45720"/>
-          </a:xfrm>
-          <a:prstGeom prst="rect">
-            <a:avLst/>
-          </a:prstGeom>
-          <a:solidFill>
-            <a:srgbClr val="334155"/>
-          </a:solidFill>
-          <a:ln w="12700">
-            <a:solidFill>
-              <a:srgbClr val="334155"/>
-            </a:solidFill>
-            <a:prstDash val="solid"/>
-          </a:ln>
-        </p:spPr>
-        <p:txBody>
-          <a:bodyPr/>
-          <a:lstStyle/>
-          <a:p>
-            <a:endParaRPr lang="en-US"/>
-          </a:p>
-        </p:txBody>
-      </p:sp>
-      <p:sp>
-        <p:nvSpPr>
-          <p:cNvPr id="24" name="Shape 22"/>
-          <p:cNvSpPr/>
-          <p:nvPr/>
-        </p:nvSpPr>
-        <p:spPr>
-          <a:xfrm>
-            <a:off x="7150608" y="960120"/>
-            <a:ext cx="1371600" cy="1005840"/>
-          </a:xfrm>
-          <a:prstGeom prst="ellipse">
-            <a:avLst/>
-          </a:prstGeom>
-          <a:solidFill>
-            <a:srgbClr val="1E3A5F"/>
-          </a:solidFill>
-          <a:ln w="25400">
-            <a:solidFill>
-              <a:srgbClr val="0EA5E9"/>
-            </a:solidFill>
-            <a:prstDash val="solid"/>
-          </a:ln>
-        </p:spPr>
-        <p:txBody>
-          <a:bodyPr/>
-          <a:lstStyle/>
-          <a:p>
-            <a:endParaRPr lang="en-US"/>
-          </a:p>
-        </p:txBody>
-      </p:sp>
-      <p:sp>
-        <p:nvSpPr>
-          <p:cNvPr id="25" name="Text 23"/>
-          <p:cNvSpPr/>
-          <p:nvPr/>
-        </p:nvSpPr>
-        <p:spPr>
-          <a:xfrm>
-            <a:off x="7150608" y="987552"/>
-            <a:ext cx="1371600" cy="411480"/>
-          </a:xfrm>
-          <a:prstGeom prst="rect">
-            <a:avLst/>
-          </a:prstGeom>
-          <a:noFill/>
-          <a:ln/>
-        </p:spPr>
-        <p:txBody>
-          <a:bodyPr wrap="square" rtlCol="0" anchor="ctr"/>
-          <a:lstStyle/>
-          <a:p>
-            <a:pPr marL="0" indent="0" algn="ctr">
-              <a:buNone/>
-            </a:pPr>
-            <a:r>
-              <a:rPr lang="en-US" sz="2200" b="1" dirty="0">
-                <a:solidFill>
-                  <a:srgbClr val="0EA5E9"/>
-                </a:solidFill>
-                <a:latin typeface="Calibri" pitchFamily="34" charset="0"/>
-                <a:ea typeface="Calibri" pitchFamily="34" charset="-122"/>
-                <a:cs typeface="Calibri" pitchFamily="34" charset="-120"/>
-              </a:rPr>
-              <a:t>5</a:t>
-            </a:r>
-            <a:endParaRPr lang="en-US" sz="2200" dirty="0"/>
-          </a:p>
-        </p:txBody>
-      </p:sp>
-      <p:sp>
-        <p:nvSpPr>
-          <p:cNvPr id="26" name="Text 24"/>
-          <p:cNvSpPr/>
-          <p:nvPr/>
-        </p:nvSpPr>
-        <p:spPr>
-          <a:xfrm>
-            <a:off x="7150608" y="1417320"/>
-            <a:ext cx="1371600" cy="274320"/>
-          </a:xfrm>
-          <a:prstGeom prst="rect">
-            <a:avLst/>
-          </a:prstGeom>
-          <a:noFill/>
-          <a:ln/>
-        </p:spPr>
-        <p:txBody>
-          <a:bodyPr wrap="square" rtlCol="0" anchor="ctr"/>
-          <a:lstStyle/>
-          <a:p>
-            <a:pPr marL="0" indent="0" algn="ctr">
-              <a:buNone/>
-            </a:pPr>
-            <a:r>
-              <a:rPr lang="en-US" sz="1100" b="1" dirty="0">
-                <a:solidFill>
-                  <a:srgbClr val="FFFFFF"/>
-                </a:solidFill>
-                <a:latin typeface="Calibri" pitchFamily="34" charset="0"/>
-                <a:ea typeface="Calibri" pitchFamily="34" charset="-122"/>
-                <a:cs typeface="Calibri" pitchFamily="34" charset="-120"/>
-              </a:rPr>
-              <a:t>Sessão</a:t>
-            </a:r>
-            <a:endParaRPr lang="en-US" sz="1100" dirty="0"/>
-          </a:p>
-        </p:txBody>
-      </p:sp>
-      <p:sp>
-        <p:nvSpPr>
-          <p:cNvPr id="27" name="Text 25"/>
-          <p:cNvSpPr/>
-          <p:nvPr/>
-        </p:nvSpPr>
-        <p:spPr>
-          <a:xfrm>
-            <a:off x="7150608" y="2103120"/>
-            <a:ext cx="1371600" cy="274320"/>
-          </a:xfrm>
-          <a:prstGeom prst="rect">
-            <a:avLst/>
-          </a:prstGeom>
-          <a:noFill/>
-          <a:ln/>
-        </p:spPr>
-        <p:txBody>
-          <a:bodyPr wrap="square" rtlCol="0" anchor="ctr"/>
-          <a:lstStyle/>
-          <a:p>
-            <a:pPr marL="0" indent="0" algn="ctr">
-              <a:buNone/>
-            </a:pPr>
-            <a:r>
-              <a:rPr lang="en-US" sz="1000" dirty="0">
-                <a:solidFill>
-                  <a:srgbClr val="94A3B8"/>
-                </a:solidFill>
-                <a:latin typeface="Calibri" pitchFamily="34" charset="0"/>
-                <a:ea typeface="Calibri" pitchFamily="34" charset="-122"/>
-                <a:cs typeface="Calibri" pitchFamily="34" charset="-120"/>
-              </a:rPr>
-              <a:t>8h, logout limpa</a:t>
-            </a:r>
-            <a:endParaRPr lang="en-US" sz="1000" dirty="0"/>
-          </a:p>
-        </p:txBody>
-      </p:sp>
-      <p:sp>
-        <p:nvSpPr>
-          <p:cNvPr id="28" name="Shape 26"/>
-          <p:cNvSpPr/>
-          <p:nvPr/>
-        </p:nvSpPr>
-        <p:spPr>
-          <a:xfrm>
-            <a:off x="274320" y="2514600"/>
-            <a:ext cx="8595360" cy="347472"/>
-          </a:xfrm>
-          <a:prstGeom prst="rect">
-            <a:avLst/>
-          </a:prstGeom>
-          <a:solidFill>
-            <a:srgbClr val="1E3A5F"/>
-          </a:solidFill>
-          <a:ln w="12700">
-            <a:solidFill>
-              <a:srgbClr val="0EA5E9"/>
-            </a:solidFill>
-            <a:prstDash val="solid"/>
-          </a:ln>
-        </p:spPr>
-        <p:txBody>
-          <a:bodyPr/>
-          <a:lstStyle/>
-          <a:p>
-            <a:endParaRPr lang="en-US"/>
-          </a:p>
-        </p:txBody>
-      </p:sp>
-      <p:sp>
-        <p:nvSpPr>
-          <p:cNvPr id="29" name="Text 27"/>
-          <p:cNvSpPr/>
-          <p:nvPr/>
-        </p:nvSpPr>
-        <p:spPr>
-          <a:xfrm>
-            <a:off x="365760" y="2560320"/>
-            <a:ext cx="2286000" cy="256032"/>
-          </a:xfrm>
-          <a:prstGeom prst="rect">
-            <a:avLst/>
-          </a:prstGeom>
-          <a:noFill/>
-          <a:ln/>
-        </p:spPr>
-        <p:txBody>
-          <a:bodyPr wrap="square" rtlCol="0" anchor="ctr"/>
-          <a:lstStyle/>
-          <a:p>
-            <a:pPr marL="0" indent="0">
-              <a:buNone/>
-            </a:pPr>
-            <a:r>
-              <a:rPr lang="en-US" sz="1100" b="1" dirty="0">
-                <a:solidFill>
-                  <a:srgbClr val="0EA5E9"/>
-                </a:solidFill>
-                <a:latin typeface="Calibri" pitchFamily="34" charset="0"/>
-                <a:ea typeface="Calibri" pitchFamily="34" charset="-122"/>
-                <a:cs typeface="Calibri" pitchFamily="34" charset="-120"/>
-              </a:rPr>
-              <a:t>Perfil</a:t>
-            </a:r>
-            <a:endParaRPr lang="en-US" sz="1100" dirty="0"/>
-          </a:p>
-        </p:txBody>
-      </p:sp>
-      <p:sp>
-        <p:nvSpPr>
-          <p:cNvPr id="30" name="Text 28"/>
-          <p:cNvSpPr/>
-          <p:nvPr/>
-        </p:nvSpPr>
-        <p:spPr>
-          <a:xfrm>
-            <a:off x="2286000" y="2560320"/>
-            <a:ext cx="2286000" cy="256032"/>
-          </a:xfrm>
-          <a:prstGeom prst="rect">
-            <a:avLst/>
-          </a:prstGeom>
-          <a:noFill/>
-          <a:ln/>
-        </p:spPr>
-        <p:txBody>
-          <a:bodyPr wrap="square" rtlCol="0" anchor="ctr"/>
-          <a:lstStyle/>
-          <a:p>
-            <a:pPr marL="0" indent="0">
-              <a:buNone/>
-            </a:pPr>
-            <a:r>
-              <a:rPr lang="en-US" sz="1100" b="1" dirty="0">
-                <a:solidFill>
-                  <a:srgbClr val="0EA5E9"/>
-                </a:solidFill>
-                <a:latin typeface="Calibri" pitchFamily="34" charset="0"/>
-                <a:ea typeface="Calibri" pitchFamily="34" charset="-122"/>
-                <a:cs typeface="Calibri" pitchFamily="34" charset="-120"/>
-              </a:rPr>
-              <a:t>Módulo</a:t>
-            </a:r>
-            <a:endParaRPr lang="en-US" sz="1100" dirty="0"/>
-          </a:p>
-        </p:txBody>
-      </p:sp>
-      <p:sp>
-        <p:nvSpPr>
-          <p:cNvPr id="31" name="Text 29"/>
-          <p:cNvSpPr/>
-          <p:nvPr/>
-        </p:nvSpPr>
-        <p:spPr>
-          <a:xfrm>
-            <a:off x="4754880" y="2560320"/>
-            <a:ext cx="2286000" cy="256032"/>
-          </a:xfrm>
-          <a:prstGeom prst="rect">
-            <a:avLst/>
-          </a:prstGeom>
-          <a:noFill/>
-          <a:ln/>
-        </p:spPr>
-        <p:txBody>
-          <a:bodyPr wrap="square" rtlCol="0" anchor="ctr"/>
-          <a:lstStyle/>
-          <a:p>
-            <a:pPr marL="0" indent="0">
-              <a:buNone/>
-            </a:pPr>
-            <a:r>
-              <a:rPr lang="en-US" sz="1100" b="1" dirty="0">
-                <a:solidFill>
-                  <a:srgbClr val="0EA5E9"/>
-                </a:solidFill>
-                <a:latin typeface="Calibri" pitchFamily="34" charset="0"/>
-                <a:ea typeface="Calibri" pitchFamily="34" charset="-122"/>
-                <a:cs typeface="Calibri" pitchFamily="34" charset="-120"/>
-              </a:rPr>
-              <a:t>Permissões Principais</a:t>
-            </a:r>
-            <a:endParaRPr lang="en-US" sz="1100" dirty="0"/>
-          </a:p>
-        </p:txBody>
-      </p:sp>
-      <p:sp>
-        <p:nvSpPr>
-          <p:cNvPr id="32" name="Shape 30"/>
-          <p:cNvSpPr/>
-          <p:nvPr/>
-        </p:nvSpPr>
-        <p:spPr>
-          <a:xfrm>
-            <a:off x="274320" y="2907792"/>
-            <a:ext cx="8595360" cy="393192"/>
-          </a:xfrm>
-          <a:prstGeom prst="rect">
-            <a:avLst/>
-          </a:prstGeom>
-          <a:solidFill>
-            <a:srgbClr val="192133"/>
-          </a:solidFill>
-          <a:ln w="6350">
-            <a:solidFill>
-              <a:srgbClr val="334155"/>
-            </a:solidFill>
-            <a:prstDash val="solid"/>
-          </a:ln>
-        </p:spPr>
-        <p:txBody>
-          <a:bodyPr/>
-          <a:lstStyle/>
-          <a:p>
-            <a:endParaRPr lang="en-US"/>
-          </a:p>
-        </p:txBody>
-      </p:sp>
-      <p:sp>
-        <p:nvSpPr>
-          <p:cNvPr id="33" name="Text 31"/>
-          <p:cNvSpPr/>
-          <p:nvPr/>
-        </p:nvSpPr>
-        <p:spPr>
-          <a:xfrm>
-            <a:off x="365760" y="2944368"/>
-            <a:ext cx="1737360" cy="320040"/>
-          </a:xfrm>
-          <a:prstGeom prst="rect">
-            <a:avLst/>
-          </a:prstGeom>
-          <a:noFill/>
-          <a:ln/>
-        </p:spPr>
-        <p:txBody>
-          <a:bodyPr wrap="square" rtlCol="0" anchor="ctr"/>
-          <a:lstStyle/>
-          <a:p>
-            <a:pPr marL="0" indent="0">
-              <a:buNone/>
-            </a:pPr>
-            <a:r>
-              <a:rPr lang="en-US" sz="1050" dirty="0">
-                <a:solidFill>
-                  <a:srgbClr val="F59E0B"/>
-                </a:solidFill>
-                <a:latin typeface="Calibri" pitchFamily="34" charset="0"/>
-                <a:ea typeface="Calibri" pitchFamily="34" charset="-122"/>
-                <a:cs typeface="Calibri" pitchFamily="34" charset="-120"/>
-              </a:rPr>
-              <a:t>CLIENTE</a:t>
-            </a:r>
-            <a:endParaRPr lang="en-US" sz="1050" dirty="0"/>
-          </a:p>
-        </p:txBody>
-      </p:sp>
-      <p:sp>
-        <p:nvSpPr>
-          <p:cNvPr id="34" name="Text 32"/>
-          <p:cNvSpPr/>
-          <p:nvPr/>
-        </p:nvSpPr>
-        <p:spPr>
-          <a:xfrm>
-            <a:off x="2286000" y="2944368"/>
-            <a:ext cx="1737360" cy="320040"/>
-          </a:xfrm>
-          <a:prstGeom prst="rect">
-            <a:avLst/>
-          </a:prstGeom>
-          <a:noFill/>
-          <a:ln/>
-        </p:spPr>
-        <p:txBody>
-          <a:bodyPr wrap="square" rtlCol="0" anchor="ctr"/>
-          <a:lstStyle/>
-          <a:p>
-            <a:pPr marL="0" indent="0">
-              <a:buNone/>
-            </a:pPr>
-            <a:r>
-              <a:rPr lang="en-US" sz="1050" dirty="0">
-                <a:solidFill>
-                  <a:srgbClr val="E2E8F0"/>
-                </a:solidFill>
-                <a:latin typeface="Calibri" pitchFamily="34" charset="0"/>
-                <a:ea typeface="Calibri" pitchFamily="34" charset="-122"/>
-                <a:cs typeface="Calibri" pitchFamily="34" charset="-120"/>
-              </a:rPr>
-              <a:t>/FixNRide</a:t>
-            </a:r>
-            <a:endParaRPr lang="en-US" sz="1050" dirty="0"/>
-          </a:p>
-        </p:txBody>
-      </p:sp>
-      <p:sp>
-        <p:nvSpPr>
-          <p:cNvPr id="35" name="Text 33"/>
-          <p:cNvSpPr/>
-          <p:nvPr/>
-        </p:nvSpPr>
-        <p:spPr>
-          <a:xfrm>
-            <a:off x="4754880" y="2944368"/>
-            <a:ext cx="4023360" cy="320040"/>
-          </a:xfrm>
-          <a:prstGeom prst="rect">
-            <a:avLst/>
-          </a:prstGeom>
-          <a:noFill/>
-          <a:ln/>
-        </p:spPr>
-        <p:txBody>
-          <a:bodyPr wrap="square" rtlCol="0" anchor="ctr"/>
-          <a:lstStyle/>
-          <a:p>
-            <a:pPr marL="0" indent="0">
-              <a:buNone/>
-            </a:pPr>
-            <a:r>
-              <a:rPr lang="en-US" sz="1050" dirty="0">
-                <a:solidFill>
-                  <a:srgbClr val="E2E8F0"/>
-                </a:solidFill>
-                <a:latin typeface="Calibri" pitchFamily="34" charset="0"/>
-                <a:ea typeface="Calibri" pitchFamily="34" charset="-122"/>
-                <a:cs typeface="Calibri" pitchFamily="34" charset="-120"/>
-              </a:rPr>
-              <a:t>Agendamento, faturas, catálogo, Click &amp; Collect</a:t>
-            </a:r>
-            <a:endParaRPr lang="en-US" sz="1050" dirty="0"/>
-          </a:p>
-        </p:txBody>
-      </p:sp>
-      <p:sp>
-        <p:nvSpPr>
-          <p:cNvPr id="36" name="Shape 34"/>
-          <p:cNvSpPr/>
-          <p:nvPr/>
-        </p:nvSpPr>
-        <p:spPr>
-          <a:xfrm>
-            <a:off x="274320" y="3319272"/>
-            <a:ext cx="8595360" cy="393192"/>
-          </a:xfrm>
-          <a:prstGeom prst="rect">
-            <a:avLst/>
-          </a:prstGeom>
-          <a:solidFill>
-            <a:srgbClr val="1E293B"/>
-          </a:solidFill>
-          <a:ln w="6350">
-            <a:solidFill>
-              <a:srgbClr val="334155"/>
-            </a:solidFill>
-            <a:prstDash val="solid"/>
-          </a:ln>
-        </p:spPr>
-        <p:txBody>
-          <a:bodyPr/>
-          <a:lstStyle/>
-          <a:p>
-            <a:endParaRPr lang="en-US"/>
-          </a:p>
-        </p:txBody>
-      </p:sp>
-      <p:sp>
-        <p:nvSpPr>
-          <p:cNvPr id="37" name="Text 35"/>
-          <p:cNvSpPr/>
-          <p:nvPr/>
-        </p:nvSpPr>
-        <p:spPr>
-          <a:xfrm>
-            <a:off x="365760" y="3355848"/>
-            <a:ext cx="1737360" cy="320040"/>
-          </a:xfrm>
-          <a:prstGeom prst="rect">
-            <a:avLst/>
-          </a:prstGeom>
-          <a:noFill/>
-          <a:ln/>
-        </p:spPr>
-        <p:txBody>
-          <a:bodyPr wrap="square" rtlCol="0" anchor="ctr"/>
-          <a:lstStyle/>
-          <a:p>
-            <a:pPr marL="0" indent="0">
-              <a:buNone/>
-            </a:pPr>
-            <a:r>
-              <a:rPr lang="en-US" sz="1050" dirty="0">
-                <a:solidFill>
-                  <a:srgbClr val="F59E0B"/>
-                </a:solidFill>
-                <a:latin typeface="Calibri" pitchFamily="34" charset="0"/>
-                <a:ea typeface="Calibri" pitchFamily="34" charset="-122"/>
-                <a:cs typeface="Calibri" pitchFamily="34" charset="-120"/>
-              </a:rPr>
-              <a:t>OPERADOR</a:t>
-            </a:r>
-            <a:endParaRPr lang="en-US" sz="1050" dirty="0"/>
-          </a:p>
-        </p:txBody>
-      </p:sp>
-      <p:sp>
-        <p:nvSpPr>
-          <p:cNvPr id="38" name="Text 36"/>
-          <p:cNvSpPr/>
-          <p:nvPr/>
-        </p:nvSpPr>
-        <p:spPr>
-          <a:xfrm>
-            <a:off x="2286000" y="3355848"/>
-            <a:ext cx="1737360" cy="320040"/>
-          </a:xfrm>
-          <a:prstGeom prst="rect">
-            <a:avLst/>
-          </a:prstGeom>
-          <a:noFill/>
-          <a:ln/>
-        </p:spPr>
-        <p:txBody>
-          <a:bodyPr wrap="square" rtlCol="0" anchor="ctr"/>
-          <a:lstStyle/>
-          <a:p>
-            <a:pPr marL="0" indent="0">
-              <a:buNone/>
-            </a:pPr>
-            <a:r>
-              <a:rPr lang="en-US" sz="1050" dirty="0">
-                <a:solidFill>
-                  <a:srgbClr val="E2E8F0"/>
-                </a:solidFill>
-                <a:latin typeface="Calibri" pitchFamily="34" charset="0"/>
-                <a:ea typeface="Calibri" pitchFamily="34" charset="-122"/>
-                <a:cs typeface="Calibri" pitchFamily="34" charset="-120"/>
-              </a:rPr>
-              <a:t>/FixNSell</a:t>
-            </a:r>
-            <a:endParaRPr lang="en-US" sz="1050" dirty="0"/>
-          </a:p>
-        </p:txBody>
-      </p:sp>
-      <p:sp>
-        <p:nvSpPr>
-          <p:cNvPr id="39" name="Text 37"/>
-          <p:cNvSpPr/>
-          <p:nvPr/>
-        </p:nvSpPr>
-        <p:spPr>
-          <a:xfrm>
-            <a:off x="4754880" y="3355848"/>
-            <a:ext cx="4023360" cy="320040"/>
-          </a:xfrm>
-          <a:prstGeom prst="rect">
-            <a:avLst/>
-          </a:prstGeom>
-          <a:noFill/>
-          <a:ln/>
-        </p:spPr>
-        <p:txBody>
-          <a:bodyPr wrap="square" rtlCol="0" anchor="ctr"/>
-          <a:lstStyle/>
-          <a:p>
-            <a:pPr marL="0" indent="0">
-              <a:buNone/>
-            </a:pPr>
-            <a:r>
-              <a:rPr lang="en-US" sz="1050" dirty="0">
-                <a:solidFill>
-                  <a:srgbClr val="E2E8F0"/>
-                </a:solidFill>
-                <a:latin typeface="Calibri" pitchFamily="34" charset="0"/>
-                <a:ea typeface="Calibri" pitchFamily="34" charset="-122"/>
-                <a:cs typeface="Calibri" pitchFamily="34" charset="-120"/>
-              </a:rPr>
-              <a:t>Vendas, entregas, encomendas, faturação</a:t>
-            </a:r>
-            <a:endParaRPr lang="en-US" sz="1050" dirty="0"/>
-          </a:p>
-        </p:txBody>
-      </p:sp>
-      <p:sp>
-        <p:nvSpPr>
-          <p:cNvPr id="40" name="Shape 38"/>
-          <p:cNvSpPr/>
-          <p:nvPr/>
-        </p:nvSpPr>
-        <p:spPr>
-          <a:xfrm>
-            <a:off x="274320" y="3730752"/>
-            <a:ext cx="8595360" cy="393192"/>
-          </a:xfrm>
-          <a:prstGeom prst="rect">
-            <a:avLst/>
-          </a:prstGeom>
-          <a:solidFill>
-            <a:srgbClr val="192133"/>
-          </a:solidFill>
-          <a:ln w="6350">
-            <a:solidFill>
-              <a:srgbClr val="334155"/>
-            </a:solidFill>
-            <a:prstDash val="solid"/>
-          </a:ln>
-        </p:spPr>
-        <p:txBody>
-          <a:bodyPr/>
-          <a:lstStyle/>
-          <a:p>
-            <a:endParaRPr lang="en-US"/>
-          </a:p>
-        </p:txBody>
-      </p:sp>
-      <p:sp>
-        <p:nvSpPr>
-          <p:cNvPr id="41" name="Text 39"/>
-          <p:cNvSpPr/>
-          <p:nvPr/>
-        </p:nvSpPr>
-        <p:spPr>
-          <a:xfrm>
-            <a:off x="365760" y="3767328"/>
-            <a:ext cx="1737360" cy="320040"/>
-          </a:xfrm>
-          <a:prstGeom prst="rect">
-            <a:avLst/>
-          </a:prstGeom>
-          <a:noFill/>
-          <a:ln/>
-        </p:spPr>
-        <p:txBody>
-          <a:bodyPr wrap="square" rtlCol="0" anchor="ctr"/>
-          <a:lstStyle/>
-          <a:p>
-            <a:pPr marL="0" indent="0">
-              <a:buNone/>
-            </a:pPr>
-            <a:r>
-              <a:rPr lang="en-US" sz="1050" dirty="0">
-                <a:solidFill>
-                  <a:srgbClr val="F59E0B"/>
-                </a:solidFill>
-                <a:latin typeface="Calibri" pitchFamily="34" charset="0"/>
-                <a:ea typeface="Calibri" pitchFamily="34" charset="-122"/>
-                <a:cs typeface="Calibri" pitchFamily="34" charset="-120"/>
-              </a:rPr>
-              <a:t>MECÂNICO</a:t>
-            </a:r>
-            <a:endParaRPr lang="en-US" sz="1050" dirty="0"/>
-          </a:p>
-        </p:txBody>
-      </p:sp>
-      <p:sp>
-        <p:nvSpPr>
-          <p:cNvPr id="42" name="Text 40"/>
-          <p:cNvSpPr/>
-          <p:nvPr/>
-        </p:nvSpPr>
-        <p:spPr>
-          <a:xfrm>
-            <a:off x="2286000" y="3767328"/>
-            <a:ext cx="1737360" cy="320040"/>
-          </a:xfrm>
-          <a:prstGeom prst="rect">
-            <a:avLst/>
-          </a:prstGeom>
-          <a:noFill/>
-          <a:ln/>
-        </p:spPr>
-        <p:txBody>
-          <a:bodyPr wrap="square" rtlCol="0" anchor="ctr"/>
-          <a:lstStyle/>
-          <a:p>
-            <a:pPr marL="0" indent="0">
-              <a:buNone/>
-            </a:pPr>
-            <a:r>
-              <a:rPr lang="en-US" sz="1050" dirty="0">
-                <a:solidFill>
-                  <a:srgbClr val="E2E8F0"/>
-                </a:solidFill>
-                <a:latin typeface="Calibri" pitchFamily="34" charset="0"/>
-                <a:ea typeface="Calibri" pitchFamily="34" charset="-122"/>
-                <a:cs typeface="Calibri" pitchFamily="34" charset="-120"/>
-              </a:rPr>
-              <a:t>/FixNRepair</a:t>
-            </a:r>
-            <a:endParaRPr lang="en-US" sz="1050" dirty="0"/>
-          </a:p>
-        </p:txBody>
-      </p:sp>
-      <p:sp>
-        <p:nvSpPr>
-          <p:cNvPr id="43" name="Text 41"/>
-          <p:cNvSpPr/>
-          <p:nvPr/>
-        </p:nvSpPr>
-        <p:spPr>
-          <a:xfrm>
-            <a:off x="4754880" y="3767328"/>
-            <a:ext cx="4023360" cy="320040"/>
-          </a:xfrm>
-          <a:prstGeom prst="rect">
-            <a:avLst/>
-          </a:prstGeom>
-          <a:noFill/>
-          <a:ln/>
-        </p:spPr>
-        <p:txBody>
-          <a:bodyPr wrap="square" rtlCol="0" anchor="ctr"/>
-          <a:lstStyle/>
-          <a:p>
-            <a:pPr marL="0" indent="0">
-              <a:buNone/>
-            </a:pPr>
-            <a:r>
-              <a:rPr lang="en-US" sz="1050" dirty="0">
-                <a:solidFill>
-                  <a:srgbClr val="E2E8F0"/>
-                </a:solidFill>
-                <a:latin typeface="Calibri" pitchFamily="34" charset="0"/>
-                <a:ea typeface="Calibri" pitchFamily="34" charset="-122"/>
-                <a:cs typeface="Calibri" pitchFamily="34" charset="-120"/>
-              </a:rPr>
-              <a:t>Agenda, diagnósticos, peças, estado serviços</a:t>
-            </a:r>
-            <a:endParaRPr lang="en-US" sz="1050" dirty="0"/>
-          </a:p>
-        </p:txBody>
-      </p:sp>
-      <p:sp>
-        <p:nvSpPr>
-          <p:cNvPr id="44" name="Shape 42"/>
-          <p:cNvSpPr/>
-          <p:nvPr/>
-        </p:nvSpPr>
-        <p:spPr>
-          <a:xfrm>
-            <a:off x="274320" y="4142232"/>
-            <a:ext cx="8595360" cy="393192"/>
-          </a:xfrm>
-          <a:prstGeom prst="rect">
-            <a:avLst/>
-          </a:prstGeom>
-          <a:solidFill>
-            <a:srgbClr val="1E293B"/>
-          </a:solidFill>
-          <a:ln w="6350">
-            <a:solidFill>
-              <a:srgbClr val="334155"/>
-            </a:solidFill>
-            <a:prstDash val="solid"/>
-          </a:ln>
-        </p:spPr>
-        <p:txBody>
-          <a:bodyPr/>
-          <a:lstStyle/>
-          <a:p>
-            <a:endParaRPr lang="en-US"/>
-          </a:p>
-        </p:txBody>
-      </p:sp>
-      <p:sp>
-        <p:nvSpPr>
-          <p:cNvPr id="45" name="Text 43"/>
-          <p:cNvSpPr/>
-          <p:nvPr/>
-        </p:nvSpPr>
-        <p:spPr>
-          <a:xfrm>
-            <a:off x="365760" y="4178808"/>
-            <a:ext cx="1737360" cy="320040"/>
-          </a:xfrm>
-          <a:prstGeom prst="rect">
-            <a:avLst/>
-          </a:prstGeom>
-          <a:noFill/>
-          <a:ln/>
-        </p:spPr>
-        <p:txBody>
-          <a:bodyPr wrap="square" rtlCol="0" anchor="ctr"/>
-          <a:lstStyle/>
-          <a:p>
-            <a:pPr marL="0" indent="0">
-              <a:buNone/>
-            </a:pPr>
-            <a:r>
-              <a:rPr lang="en-US" sz="1050" dirty="0">
-                <a:solidFill>
-                  <a:srgbClr val="F59E0B"/>
-                </a:solidFill>
-                <a:latin typeface="Calibri" pitchFamily="34" charset="0"/>
-                <a:ea typeface="Calibri" pitchFamily="34" charset="-122"/>
-                <a:cs typeface="Calibri" pitchFamily="34" charset="-120"/>
-              </a:rPr>
-              <a:t>ADMINISTRADOR</a:t>
-            </a:r>
-            <a:endParaRPr lang="en-US" sz="1050" dirty="0"/>
-          </a:p>
-        </p:txBody>
-      </p:sp>
-      <p:sp>
-        <p:nvSpPr>
-          <p:cNvPr id="46" name="Text 44"/>
-          <p:cNvSpPr/>
-          <p:nvPr/>
-        </p:nvSpPr>
-        <p:spPr>
-          <a:xfrm>
-            <a:off x="2286000" y="4178808"/>
-            <a:ext cx="1737360" cy="320040"/>
-          </a:xfrm>
-          <a:prstGeom prst="rect">
-            <a:avLst/>
-          </a:prstGeom>
-          <a:noFill/>
-          <a:ln/>
-        </p:spPr>
-        <p:txBody>
-          <a:bodyPr wrap="square" rtlCol="0" anchor="ctr"/>
-          <a:lstStyle/>
-          <a:p>
-            <a:pPr marL="0" indent="0">
-              <a:buNone/>
-            </a:pPr>
-            <a:r>
-              <a:rPr lang="en-US" sz="1050" dirty="0">
-                <a:solidFill>
-                  <a:srgbClr val="E2E8F0"/>
-                </a:solidFill>
-                <a:latin typeface="Calibri" pitchFamily="34" charset="0"/>
-                <a:ea typeface="Calibri" pitchFamily="34" charset="-122"/>
-                <a:cs typeface="Calibri" pitchFamily="34" charset="-120"/>
-              </a:rPr>
-              <a:t>/FixNManage + tudo</a:t>
-            </a:r>
-            <a:endParaRPr lang="en-US" sz="1050" dirty="0"/>
-          </a:p>
-        </p:txBody>
-      </p:sp>
-      <p:sp>
-        <p:nvSpPr>
-          <p:cNvPr id="47" name="Text 45"/>
-          <p:cNvSpPr/>
-          <p:nvPr/>
-        </p:nvSpPr>
-        <p:spPr>
-          <a:xfrm>
-            <a:off x="4754880" y="4178808"/>
-            <a:ext cx="4023360" cy="320040"/>
-          </a:xfrm>
-          <a:prstGeom prst="rect">
-            <a:avLst/>
-          </a:prstGeom>
-          <a:noFill/>
-          <a:ln/>
-        </p:spPr>
-        <p:txBody>
-          <a:bodyPr wrap="square" rtlCol="0" anchor="ctr"/>
-          <a:lstStyle/>
-          <a:p>
-            <a:pPr marL="0" indent="0">
-              <a:buNone/>
-            </a:pPr>
-            <a:r>
-              <a:rPr lang="en-US" sz="1050" dirty="0">
-                <a:solidFill>
-                  <a:srgbClr val="E2E8F0"/>
-                </a:solidFill>
-                <a:latin typeface="Calibri" pitchFamily="34" charset="0"/>
-                <a:ea typeface="Calibri" pitchFamily="34" charset="-122"/>
-                <a:cs typeface="Calibri" pitchFamily="34" charset="-120"/>
-              </a:rPr>
-              <a:t>Gestão total: utilizadores, stock, KPIs, promoções</a:t>
-            </a:r>
-            <a:endParaRPr lang="en-US" sz="1050" dirty="0"/>
-          </a:p>
-        </p:txBody>
-      </p:sp>
-      <p:sp>
-        <p:nvSpPr>
-          <p:cNvPr id="48" name="Shape 46"/>
+          <p:cNvPr id="44" name="Shape 32">
+            <a:extLst>
+              <a:ext uri="{FF2B5EF4-FFF2-40B4-BE49-F238E27FC236}">
+                <a16:creationId xmlns:a16="http://schemas.microsoft.com/office/drawing/2014/main" id="{FF94FBA0-9836-BF9D-44E2-76115615598E}"/>
+              </a:ext>
+            </a:extLst>
+          </p:cNvPr>
           <p:cNvSpPr/>
           <p:nvPr/>
         </p:nvSpPr>
@@ -14564,7 +17615,427 @@
           </a:p>
         </p:txBody>
       </p:sp>
+      <p:sp>
+        <p:nvSpPr>
+          <p:cNvPr id="47" name="Shape 14">
+            <a:extLst>
+              <a:ext uri="{FF2B5EF4-FFF2-40B4-BE49-F238E27FC236}">
+                <a16:creationId xmlns:a16="http://schemas.microsoft.com/office/drawing/2014/main" id="{33911265-0615-6AA4-C915-CE950503C96E}"/>
+              </a:ext>
+            </a:extLst>
+          </p:cNvPr>
+          <p:cNvSpPr/>
+          <p:nvPr/>
+        </p:nvSpPr>
+        <p:spPr>
+          <a:xfrm>
+            <a:off x="457200" y="859535"/>
+            <a:ext cx="3993704" cy="3615646"/>
+          </a:xfrm>
+          <a:prstGeom prst="rect">
+            <a:avLst/>
+          </a:prstGeom>
+          <a:solidFill>
+            <a:srgbClr val="1E293B"/>
+          </a:solidFill>
+          <a:ln w="12700">
+            <a:solidFill>
+              <a:srgbClr val="334155"/>
+            </a:solidFill>
+            <a:prstDash val="solid"/>
+          </a:ln>
+        </p:spPr>
+        <p:txBody>
+          <a:bodyPr/>
+          <a:lstStyle/>
+          <a:p>
+            <a:pPr marL="285750" indent="-285750">
+              <a:buFont typeface="Arial" panose="020B0604020202020204" pitchFamily="34" charset="0"/>
+              <a:buChar char="•"/>
+            </a:pPr>
+            <a:r>
+              <a:rPr lang="en-US" dirty="0" err="1">
+                <a:solidFill>
+                  <a:schemeClr val="bg1"/>
+                </a:solidFill>
+              </a:rPr>
+              <a:t>Geração</a:t>
+            </a:r>
+            <a:r>
+              <a:rPr lang="en-US" dirty="0">
+                <a:solidFill>
+                  <a:schemeClr val="bg1"/>
+                </a:solidFill>
+              </a:rPr>
+              <a:t> de Mockups com Figma AI</a:t>
+            </a:r>
+          </a:p>
+          <a:p>
+            <a:pPr marL="285750" indent="-285750">
+              <a:buFont typeface="Arial" panose="020B0604020202020204" pitchFamily="34" charset="0"/>
+              <a:buChar char="•"/>
+            </a:pPr>
+            <a:endParaRPr lang="en-US" dirty="0">
+              <a:solidFill>
+                <a:schemeClr val="bg1"/>
+              </a:solidFill>
+            </a:endParaRPr>
+          </a:p>
+          <a:p>
+            <a:pPr marL="285750" indent="-285750">
+              <a:buFont typeface="Arial" panose="020B0604020202020204" pitchFamily="34" charset="0"/>
+              <a:buChar char="•"/>
+            </a:pPr>
+            <a:r>
+              <a:rPr lang="en-US" dirty="0" err="1">
+                <a:solidFill>
+                  <a:schemeClr val="bg1"/>
+                </a:solidFill>
+              </a:rPr>
+              <a:t>Refinamento</a:t>
+            </a:r>
+            <a:r>
+              <a:rPr lang="en-US" dirty="0">
+                <a:solidFill>
+                  <a:schemeClr val="bg1"/>
+                </a:solidFill>
+              </a:rPr>
+              <a:t> Manual das Mockups, </a:t>
+            </a:r>
+            <a:r>
+              <a:rPr lang="en-US" dirty="0" err="1">
+                <a:solidFill>
+                  <a:schemeClr val="bg1"/>
+                </a:solidFill>
+              </a:rPr>
+              <a:t>consoante</a:t>
+            </a:r>
+            <a:r>
+              <a:rPr lang="en-US" dirty="0">
+                <a:solidFill>
+                  <a:schemeClr val="bg1"/>
+                </a:solidFill>
+              </a:rPr>
+              <a:t> </a:t>
+            </a:r>
+            <a:r>
+              <a:rPr lang="en-US" dirty="0" err="1">
+                <a:solidFill>
+                  <a:schemeClr val="bg1"/>
+                </a:solidFill>
+              </a:rPr>
+              <a:t>os</a:t>
+            </a:r>
+            <a:r>
+              <a:rPr lang="en-US" dirty="0">
+                <a:solidFill>
+                  <a:schemeClr val="bg1"/>
+                </a:solidFill>
+              </a:rPr>
+              <a:t> </a:t>
+            </a:r>
+            <a:r>
+              <a:rPr lang="en-US" dirty="0" err="1">
+                <a:solidFill>
+                  <a:schemeClr val="bg1"/>
+                </a:solidFill>
+              </a:rPr>
+              <a:t>requisitos</a:t>
+            </a:r>
+            <a:r>
+              <a:rPr lang="en-US" dirty="0">
+                <a:solidFill>
+                  <a:schemeClr val="bg1"/>
+                </a:solidFill>
+              </a:rPr>
+              <a:t> </a:t>
+            </a:r>
+          </a:p>
+          <a:p>
+            <a:pPr marL="285750" indent="-285750">
+              <a:buFont typeface="Arial" panose="020B0604020202020204" pitchFamily="34" charset="0"/>
+              <a:buChar char="•"/>
+            </a:pPr>
+            <a:endParaRPr lang="en-US" dirty="0">
+              <a:solidFill>
+                <a:schemeClr val="bg1"/>
+              </a:solidFill>
+            </a:endParaRPr>
+          </a:p>
+          <a:p>
+            <a:pPr marL="285750" indent="-285750">
+              <a:buFont typeface="Arial" panose="020B0604020202020204" pitchFamily="34" charset="0"/>
+              <a:buChar char="•"/>
+            </a:pPr>
+            <a:r>
+              <a:rPr lang="en-US" dirty="0">
+                <a:solidFill>
+                  <a:schemeClr val="bg1"/>
+                </a:solidFill>
+              </a:rPr>
+              <a:t>As Mockups </a:t>
+            </a:r>
+            <a:r>
+              <a:rPr lang="en-US" dirty="0" err="1">
+                <a:solidFill>
+                  <a:schemeClr val="bg1"/>
+                </a:solidFill>
+              </a:rPr>
+              <a:t>geradas</a:t>
+            </a:r>
+            <a:r>
+              <a:rPr lang="en-US" dirty="0">
+                <a:solidFill>
+                  <a:schemeClr val="bg1"/>
+                </a:solidFill>
+              </a:rPr>
+              <a:t> </a:t>
+            </a:r>
+            <a:r>
+              <a:rPr lang="en-US" dirty="0" err="1">
+                <a:solidFill>
+                  <a:schemeClr val="bg1"/>
+                </a:solidFill>
+              </a:rPr>
+              <a:t>foram</a:t>
+            </a:r>
+            <a:r>
+              <a:rPr lang="en-US" dirty="0">
+                <a:solidFill>
+                  <a:schemeClr val="bg1"/>
+                </a:solidFill>
+              </a:rPr>
+              <a:t> o </a:t>
+            </a:r>
+            <a:r>
+              <a:rPr lang="en-US" dirty="0" err="1">
+                <a:solidFill>
+                  <a:schemeClr val="bg1"/>
+                </a:solidFill>
+              </a:rPr>
+              <a:t>ponto</a:t>
+            </a:r>
+            <a:r>
+              <a:rPr lang="en-US" dirty="0">
+                <a:solidFill>
+                  <a:schemeClr val="bg1"/>
+                </a:solidFill>
+              </a:rPr>
+              <a:t> de </a:t>
+            </a:r>
+            <a:r>
+              <a:rPr lang="en-US" dirty="0" err="1">
+                <a:solidFill>
+                  <a:schemeClr val="bg1"/>
+                </a:solidFill>
+              </a:rPr>
+              <a:t>partida</a:t>
+            </a:r>
+            <a:r>
+              <a:rPr lang="en-US" dirty="0">
+                <a:solidFill>
+                  <a:schemeClr val="bg1"/>
+                </a:solidFill>
+              </a:rPr>
+              <a:t> para o </a:t>
+            </a:r>
+            <a:r>
+              <a:rPr lang="en-US" dirty="0" err="1">
+                <a:solidFill>
+                  <a:schemeClr val="bg1"/>
+                </a:solidFill>
+              </a:rPr>
+              <a:t>desenvolvimento</a:t>
+            </a:r>
+            <a:r>
+              <a:rPr lang="en-US" dirty="0">
+                <a:solidFill>
+                  <a:schemeClr val="bg1"/>
+                </a:solidFill>
+              </a:rPr>
+              <a:t> da Interface Web</a:t>
+            </a:r>
+          </a:p>
+          <a:p>
+            <a:pPr marL="285750" indent="-285750">
+              <a:buFont typeface="Arial" panose="020B0604020202020204" pitchFamily="34" charset="0"/>
+              <a:buChar char="•"/>
+            </a:pPr>
+            <a:endParaRPr lang="en-US" dirty="0">
+              <a:solidFill>
+                <a:schemeClr val="bg1"/>
+              </a:solidFill>
+            </a:endParaRPr>
+          </a:p>
+          <a:p>
+            <a:pPr marL="285750" indent="-285750">
+              <a:buFont typeface="Arial" panose="020B0604020202020204" pitchFamily="34" charset="0"/>
+              <a:buChar char="•"/>
+            </a:pPr>
+            <a:r>
+              <a:rPr lang="en-US" dirty="0" err="1">
+                <a:solidFill>
+                  <a:schemeClr val="bg1"/>
+                </a:solidFill>
+              </a:rPr>
+              <a:t>Melhorias</a:t>
+            </a:r>
+            <a:r>
+              <a:rPr lang="en-US" dirty="0">
+                <a:solidFill>
+                  <a:schemeClr val="bg1"/>
+                </a:solidFill>
+              </a:rPr>
+              <a:t> e </a:t>
+            </a:r>
+            <a:r>
+              <a:rPr lang="en-US" dirty="0" err="1">
+                <a:solidFill>
+                  <a:schemeClr val="bg1"/>
+                </a:solidFill>
+              </a:rPr>
+              <a:t>otimizações</a:t>
+            </a:r>
+            <a:r>
+              <a:rPr lang="en-US" dirty="0">
+                <a:solidFill>
+                  <a:schemeClr val="bg1"/>
+                </a:solidFill>
+              </a:rPr>
+              <a:t> </a:t>
+            </a:r>
+            <a:r>
+              <a:rPr lang="en-US" dirty="0" err="1">
+                <a:solidFill>
+                  <a:schemeClr val="bg1"/>
+                </a:solidFill>
+              </a:rPr>
+              <a:t>ao</a:t>
+            </a:r>
+            <a:r>
+              <a:rPr lang="en-US" dirty="0">
+                <a:solidFill>
+                  <a:schemeClr val="bg1"/>
+                </a:solidFill>
+              </a:rPr>
+              <a:t> design </a:t>
+            </a:r>
+            <a:r>
+              <a:rPr lang="en-US" dirty="0" err="1">
+                <a:solidFill>
+                  <a:schemeClr val="bg1"/>
+                </a:solidFill>
+              </a:rPr>
+              <a:t>foram</a:t>
+            </a:r>
+            <a:r>
+              <a:rPr lang="en-US" dirty="0">
+                <a:solidFill>
+                  <a:schemeClr val="bg1"/>
+                </a:solidFill>
+              </a:rPr>
+              <a:t> </a:t>
+            </a:r>
+            <a:r>
+              <a:rPr lang="en-US" dirty="0" err="1">
+                <a:solidFill>
+                  <a:schemeClr val="bg1"/>
+                </a:solidFill>
+              </a:rPr>
+              <a:t>implementadas</a:t>
+            </a:r>
+            <a:r>
+              <a:rPr lang="en-US" dirty="0">
+                <a:solidFill>
+                  <a:schemeClr val="bg1"/>
+                </a:solidFill>
+              </a:rPr>
+              <a:t> </a:t>
+            </a:r>
+            <a:r>
+              <a:rPr lang="en-US" dirty="0" err="1">
+                <a:solidFill>
+                  <a:schemeClr val="bg1"/>
+                </a:solidFill>
+              </a:rPr>
+              <a:t>na</a:t>
+            </a:r>
+            <a:r>
+              <a:rPr lang="en-US" dirty="0">
+                <a:solidFill>
+                  <a:schemeClr val="bg1"/>
+                </a:solidFill>
+              </a:rPr>
+              <a:t> </a:t>
+            </a:r>
+            <a:r>
+              <a:rPr lang="en-US" dirty="0" err="1">
+                <a:solidFill>
+                  <a:schemeClr val="bg1"/>
+                </a:solidFill>
+              </a:rPr>
+              <a:t>fase</a:t>
+            </a:r>
+            <a:r>
+              <a:rPr lang="en-US" dirty="0">
+                <a:solidFill>
+                  <a:schemeClr val="bg1"/>
+                </a:solidFill>
+              </a:rPr>
+              <a:t> </a:t>
+            </a:r>
+            <a:r>
+              <a:rPr lang="en-US" dirty="0" err="1">
+                <a:solidFill>
+                  <a:schemeClr val="bg1"/>
+                </a:solidFill>
+              </a:rPr>
+              <a:t>seguinte</a:t>
+            </a:r>
+            <a:endParaRPr lang="en-US" dirty="0">
+              <a:solidFill>
+                <a:schemeClr val="bg1"/>
+              </a:solidFill>
+            </a:endParaRPr>
+          </a:p>
+        </p:txBody>
+      </p:sp>
+      <p:pic>
+        <p:nvPicPr>
+          <p:cNvPr id="49" name="Picture 48" descr="A screenshot of a dashboard&#10;&#10;AI-generated content may be incorrect.">
+            <a:extLst>
+              <a:ext uri="{FF2B5EF4-FFF2-40B4-BE49-F238E27FC236}">
+                <a16:creationId xmlns:a16="http://schemas.microsoft.com/office/drawing/2014/main" id="{63FBD44C-08B0-1F02-6258-0925BE9C7F23}"/>
+              </a:ext>
+            </a:extLst>
+          </p:cNvPr>
+          <p:cNvPicPr>
+            <a:picLocks noChangeAspect="1"/>
+          </p:cNvPicPr>
+          <p:nvPr/>
+        </p:nvPicPr>
+        <p:blipFill>
+          <a:blip r:embed="rId3"/>
+          <a:stretch>
+            <a:fillRect/>
+          </a:stretch>
+        </p:blipFill>
+        <p:spPr>
+          <a:xfrm>
+            <a:off x="4693098" y="859535"/>
+            <a:ext cx="4377819" cy="2611056"/>
+          </a:xfrm>
+          <a:prstGeom prst="rect">
+            <a:avLst/>
+          </a:prstGeom>
+        </p:spPr>
+      </p:pic>
     </p:spTree>
+    <p:extLst>
+      <p:ext uri="{BB962C8B-B14F-4D97-AF65-F5344CB8AC3E}">
+        <p14:creationId xmlns:p14="http://schemas.microsoft.com/office/powerpoint/2010/main" val="3023387063"/>
+      </p:ext>
+    </p:extLst>
   </p:cSld>
   <p:clrMapOvr>
     <a:masterClrMapping/>
@@ -14574,7 +18045,7 @@
 
 <file path=ppt/slides/slide9.xml><?xml version="1.0" encoding="utf-8"?>
 <p:sld xmlns:a="http://schemas.openxmlformats.org/drawingml/2006/main" xmlns:r="http://schemas.openxmlformats.org/officeDocument/2006/relationships" xmlns:p="http://schemas.openxmlformats.org/presentationml/2006/main">
-  <p:cSld name="Slide 13 - IA Dev">
+  <p:cSld>
     <p:bg>
       <p:bgPr>
         <a:solidFill>
@@ -14585,7 +18056,13 @@
     </p:bg>
     <p:spTree>
       <p:nvGrpSpPr>
-        <p:cNvPr id="1" name=""/>
+        <p:cNvPr id="1" name="">
+          <a:extLst>
+            <a:ext uri="{FF2B5EF4-FFF2-40B4-BE49-F238E27FC236}">
+              <a16:creationId xmlns:a16="http://schemas.microsoft.com/office/drawing/2014/main" id="{F77AECA1-0D59-0D1F-0390-46FBF77EAEB4}"/>
+            </a:ext>
+          </a:extLst>
+        </p:cNvPr>
         <p:cNvGrpSpPr/>
         <p:nvPr/>
       </p:nvGrpSpPr>
@@ -14599,7 +18076,13 @@
       </p:grpSpPr>
       <p:sp>
         <p:nvSpPr>
-          <p:cNvPr id="2" name="TopBar"/>
+          <p:cNvPr id="2" name="Shape 0">
+            <a:extLst>
+              <a:ext uri="{FF2B5EF4-FFF2-40B4-BE49-F238E27FC236}">
+                <a16:creationId xmlns:a16="http://schemas.microsoft.com/office/drawing/2014/main" id="{193561EF-8722-2374-B39F-9134B98736AD}"/>
+              </a:ext>
+            </a:extLst>
+          </p:cNvPr>
           <p:cNvSpPr/>
           <p:nvPr/>
         </p:nvSpPr>
@@ -14618,6 +18101,7 @@
             <a:solidFill>
               <a:srgbClr val="0EA5E9"/>
             </a:solidFill>
+            <a:prstDash val="solid"/>
           </a:ln>
         </p:spPr>
         <p:txBody>
@@ -14630,14 +18114,20 @@
       </p:sp>
       <p:sp>
         <p:nvSpPr>
-          <p:cNvPr id="3" name="Title"/>
-          <p:cNvSpPr/>
-          <p:nvPr/>
-        </p:nvSpPr>
-        <p:spPr>
-          <a:xfrm>
-            <a:off x="457200" y="182880"/>
-            <a:ext cx="8229600" cy="540000"/>
+          <p:cNvPr id="3" name="Text 1">
+            <a:extLst>
+              <a:ext uri="{FF2B5EF4-FFF2-40B4-BE49-F238E27FC236}">
+                <a16:creationId xmlns:a16="http://schemas.microsoft.com/office/drawing/2014/main" id="{95EFE5BD-EDCE-7834-ADF1-67371E2D700E}"/>
+              </a:ext>
+            </a:extLst>
+          </p:cNvPr>
+          <p:cNvSpPr/>
+          <p:nvPr/>
+        </p:nvSpPr>
+        <p:spPr>
+          <a:xfrm>
+            <a:off x="457200" y="164592"/>
+            <a:ext cx="8229600" cy="594360"/>
           </a:xfrm>
           <a:prstGeom prst="rect">
             <a:avLst/>
@@ -14653,63 +18143,96 @@
               <a:buNone/>
             </a:pPr>
             <a:r>
-              <a:rPr lang="pt-PT" sz="2800" b="1" dirty="0">
+              <a:rPr lang="en-US" sz="2800" b="1" dirty="0">
                 <a:solidFill>
                   <a:srgbClr val="FFFFFF"/>
                 </a:solidFill>
                 <a:latin typeface="Calibri" pitchFamily="34" charset="0"/>
-              </a:rPr>
-              <a:t>Desenvolvimento com Recurso a IA</a:t>
-            </a:r>
-          </a:p>
-        </p:txBody>
-      </p:sp>
-      <p:sp>
-        <p:nvSpPr>
-          <p:cNvPr id="4" name="Ref"/>
-          <p:cNvSpPr/>
-          <p:nvPr/>
-        </p:nvSpPr>
-        <p:spPr>
-          <a:xfrm>
-            <a:off x="457200" y="720000"/>
-            <a:ext cx="8229600" cy="270000"/>
-          </a:xfrm>
-          <a:prstGeom prst="rect">
-            <a:avLst/>
-          </a:prstGeom>
-          <a:noFill/>
-          <a:ln/>
-        </p:spPr>
-        <p:txBody>
-          <a:bodyPr wrap="square" rtlCol="0" anchor="ctr"/>
-          <a:lstStyle/>
-          <a:p>
-            <a:pPr marL="0" indent="0">
-              <a:buNone/>
-            </a:pPr>
-            <a:r>
-              <a:rPr lang="pt-PT" sz="1000" i="1" dirty="0">
-                <a:solidFill>
-                  <a:srgbClr val="64748B"/>
-                </a:solidFill>
-                <a:latin typeface="Calibri" pitchFamily="34" charset="0"/>
-              </a:rPr>
-              <a:t>Cap. 8 do Relatório — Geração de Código com Recurso a Inteligência Artificial</a:t>
-            </a:r>
-          </a:p>
-        </p:txBody>
-      </p:sp>
-      <p:sp>
-        <p:nvSpPr>
-          <p:cNvPr id="10" name="Left Card"/>
-          <p:cNvSpPr/>
-          <p:nvPr/>
-        </p:nvSpPr>
-        <p:spPr>
-          <a:xfrm>
-            <a:off x="274320" y="1090000"/>
-            <a:ext cx="4114800" cy="3600000"/>
+                <a:ea typeface="Calibri" pitchFamily="34" charset="-122"/>
+                <a:cs typeface="Calibri" pitchFamily="34" charset="-120"/>
+              </a:rPr>
+              <a:t>Design da </a:t>
+            </a:r>
+            <a:r>
+              <a:rPr lang="en-US" sz="2800" b="1" dirty="0" err="1">
+                <a:solidFill>
+                  <a:srgbClr val="FFFFFF"/>
+                </a:solidFill>
+                <a:latin typeface="Calibri" pitchFamily="34" charset="0"/>
+                <a:ea typeface="Calibri" pitchFamily="34" charset="-122"/>
+                <a:cs typeface="Calibri" pitchFamily="34" charset="-120"/>
+              </a:rPr>
+              <a:t>Camada</a:t>
+            </a:r>
+            <a:r>
+              <a:rPr lang="en-US" sz="2800" b="1" dirty="0">
+                <a:solidFill>
+                  <a:srgbClr val="FFFFFF"/>
+                </a:solidFill>
+                <a:latin typeface="Calibri" pitchFamily="34" charset="0"/>
+                <a:ea typeface="Calibri" pitchFamily="34" charset="-122"/>
+                <a:cs typeface="Calibri" pitchFamily="34" charset="-120"/>
+              </a:rPr>
+              <a:t> de Negócios</a:t>
+            </a:r>
+            <a:endParaRPr lang="en-US" sz="2800" dirty="0"/>
+          </a:p>
+        </p:txBody>
+      </p:sp>
+      <p:sp>
+        <p:nvSpPr>
+          <p:cNvPr id="44" name="Shape 32">
+            <a:extLst>
+              <a:ext uri="{FF2B5EF4-FFF2-40B4-BE49-F238E27FC236}">
+                <a16:creationId xmlns:a16="http://schemas.microsoft.com/office/drawing/2014/main" id="{A6A2F952-6776-88EF-501A-636F1AC50167}"/>
+              </a:ext>
+            </a:extLst>
+          </p:cNvPr>
+          <p:cNvSpPr/>
+          <p:nvPr/>
+        </p:nvSpPr>
+        <p:spPr>
+          <a:xfrm>
+            <a:off x="0" y="5074920"/>
+            <a:ext cx="9144000" cy="68580"/>
+          </a:xfrm>
+          <a:prstGeom prst="rect">
+            <a:avLst/>
+          </a:prstGeom>
+          <a:solidFill>
+            <a:srgbClr val="6366F1"/>
+          </a:solidFill>
+          <a:ln w="12700">
+            <a:solidFill>
+              <a:srgbClr val="6366F1"/>
+            </a:solidFill>
+            <a:prstDash val="solid"/>
+          </a:ln>
+        </p:spPr>
+        <p:txBody>
+          <a:bodyPr/>
+          <a:lstStyle/>
+          <a:p>
+            <a:endParaRPr lang="en-US"/>
+          </a:p>
+        </p:txBody>
+      </p:sp>
+      <p:sp>
+        <p:nvSpPr>
+          <p:cNvPr id="45" name="Shape 14">
+            <a:extLst>
+              <a:ext uri="{FF2B5EF4-FFF2-40B4-BE49-F238E27FC236}">
+                <a16:creationId xmlns:a16="http://schemas.microsoft.com/office/drawing/2014/main" id="{3E2EDC54-E4C4-F87D-7E85-E4F5E9EE14B9}"/>
+              </a:ext>
+            </a:extLst>
+          </p:cNvPr>
+          <p:cNvSpPr/>
+          <p:nvPr/>
+        </p:nvSpPr>
+        <p:spPr>
+          <a:xfrm>
+            <a:off x="457200" y="859535"/>
+            <a:ext cx="5617874" cy="1769267"/>
           </a:xfrm>
           <a:prstGeom prst="rect">
             <a:avLst/>
@@ -14721,520 +18244,309 @@
             <a:solidFill>
               <a:srgbClr val="334155"/>
             </a:solidFill>
+            <a:prstDash val="solid"/>
           </a:ln>
-          <a:effectLst>
-            <a:outerShdw blurRad="101600" dist="38100" dir="8100000" algn="bl" rotWithShape="0">
-              <a:srgbClr val="000000">
-                <a:alpha val="30000"/>
-              </a:srgbClr>
-            </a:outerShdw>
-          </a:effectLst>
         </p:spPr>
         <p:txBody>
           <a:bodyPr/>
           <a:lstStyle/>
           <a:p>
-            <a:endParaRPr/>
-          </a:p>
-        </p:txBody>
-      </p:sp>
-      <p:sp>
-        <p:nvSpPr>
-          <p:cNvPr id="11" name="Left Title Bar"/>
-          <p:cNvSpPr/>
-          <p:nvPr/>
-        </p:nvSpPr>
-        <p:spPr>
-          <a:xfrm>
-            <a:off x="274320" y="1090000"/>
-            <a:ext cx="4114800" cy="54864"/>
-          </a:xfrm>
-          <a:prstGeom prst="rect">
-            <a:avLst/>
-          </a:prstGeom>
-          <a:solidFill>
-            <a:srgbClr val="0EA5E9"/>
-          </a:solidFill>
-          <a:ln w="0">
-            <a:noFill/>
-          </a:ln>
-        </p:spPr>
-        <p:txBody>
-          <a:bodyPr/>
-          <a:lstStyle/>
-          <a:p>
-            <a:endParaRPr/>
-          </a:p>
-        </p:txBody>
-      </p:sp>
-      <p:sp>
-        <p:nvSpPr>
-          <p:cNvPr id="12" name="Left Card Content"/>
-          <p:cNvSpPr/>
-          <p:nvPr/>
-        </p:nvSpPr>
-        <p:spPr>
-          <a:xfrm>
-            <a:off x="411480" y="1160000"/>
-            <a:ext cx="3840480" cy="3460000"/>
-          </a:xfrm>
-          <a:prstGeom prst="rect">
-            <a:avLst/>
-          </a:prstGeom>
-          <a:noFill/>
-          <a:ln/>
-        </p:spPr>
-        <p:txBody>
-          <a:bodyPr wrap="square" rtlCol="0" anchor="t"/>
-          <a:lstStyle/>
-          <a:p>
-            <a:pPr marL="0" indent="0">
-              <a:buNone/>
-            </a:pPr>
-            <a:r>
-              <a:rPr lang="pt-PT" sz="1400" b="1" dirty="0">
-                <a:solidFill>
-                  <a:srgbClr val="0EA5E9"/>
-                </a:solidFill>
-                <a:latin typeface="Calibri" pitchFamily="34" charset="0"/>
-              </a:rPr>
-              <a:t>Modelo e Estratégia</a:t>
-            </a:r>
-          </a:p>
-          <a:p>
-            <a:pPr marL="0" indent="0">
-              <a:buNone/>
-            </a:pPr>
-            <a:r>
-              <a:rPr lang="pt-PT" sz="1050" dirty="0">
-                <a:solidFill>
-                  <a:srgbClr val="E2E8F0"/>
-                </a:solidFill>
-                <a:latin typeface="Calibri" pitchFamily="34" charset="0"/>
-              </a:rPr>
-              <a:t>Claude Sonnet 4.6 (Anthropic) via Claude Code (VS Code)</a:t>
-            </a:r>
-          </a:p>
-          <a:p>
-            <a:pPr marL="0" indent="0">
-              <a:buNone/>
-            </a:pPr>
-            <a:endParaRPr lang="pt-PT" sz="1050"/>
-          </a:p>
-          <a:p>
-            <a:pPr marL="0" indent="0">
-              <a:buNone/>
-            </a:pPr>
-            <a:r>
-              <a:rPr lang="pt-PT" sz="1200" b="1" dirty="0">
-                <a:solidFill>
-                  <a:srgbClr val="FFFFFF"/>
-                </a:solidFill>
-                <a:latin typeface="Calibri" pitchFamily="34" charset="0"/>
-              </a:rPr>
-              <a:t>Fragmentação por Sessões</a:t>
-            </a:r>
-          </a:p>
-          <a:p>
-            <a:pPr marL="0" indent="0">
-              <a:buNone/>
-            </a:pPr>
-            <a:r>
-              <a:rPr lang="pt-PT" sz="1000" dirty="0">
-                <a:solidFill>
-                  <a:srgbClr val="94A3B8"/>
-                </a:solidFill>
-                <a:latin typeface="Calibri" pitchFamily="34" charset="0"/>
-              </a:rPr>
-              <a:t>Sessões isoladas por microsserviço para evitar degradação da janela de contexto. Cada sessão iniciada com system brief estruturado (arquitetura + Schemas + endpoints + regras de negócio).</a:t>
-            </a:r>
-          </a:p>
-          <a:p>
-            <a:pPr marL="0" indent="0">
-              <a:buNone/>
-            </a:pPr>
-            <a:endParaRPr lang="pt-PT" sz="1000"/>
-          </a:p>
-          <a:p>
-            <a:pPr marL="0" indent="0">
-              <a:buNone/>
-            </a:pPr>
-            <a:r>
-              <a:rPr lang="pt-PT" sz="1200" b="1" dirty="0">
-                <a:solidFill>
-                  <a:srgbClr val="FFFFFF"/>
-                </a:solidFill>
-                <a:latin typeface="Calibri" pitchFamily="34" charset="0"/>
-              </a:rPr>
-              <a:t>Taxonomia de 3 Tipos</a:t>
-            </a:r>
-          </a:p>
-          <a:p>
-            <a:pPr marL="0" indent="0">
-              <a:buNone/>
-            </a:pPr>
-            <a:r>
-              <a:rPr lang="pt-PT" sz="1000" dirty="0">
-                <a:solidFill>
-                  <a:srgbClr val="94A3B8"/>
-                </a:solidFill>
-                <a:latin typeface="Calibri" pitchFamily="34" charset="0"/>
-              </a:rPr>
-              <a:t>Sessões de camada • Sessões de módulo • Sessões de correção cirúrgica</a:t>
-            </a:r>
-          </a:p>
-          <a:p>
-            <a:pPr marL="0" indent="0">
-              <a:buNone/>
-            </a:pPr>
-            <a:endParaRPr lang="pt-PT" sz="1000"/>
-          </a:p>
-          <a:p>
-            <a:pPr marL="0" indent="0">
-              <a:buNone/>
-            </a:pPr>
-            <a:r>
-              <a:rPr lang="pt-PT" sz="1200" b="1" dirty="0">
-                <a:solidFill>
-                  <a:srgbClr val="FFFFFF"/>
-                </a:solidFill>
-                <a:latin typeface="Calibri" pitchFamily="34" charset="0"/>
-              </a:rPr>
-              <a:t>Cobertura por Camada</a:t>
-            </a:r>
-          </a:p>
-          <a:p>
-            <a:pPr marL="0" indent="0">
-              <a:buNone/>
-            </a:pPr>
-            <a:r>
-              <a:rPr lang="pt-PT" sz="1000" dirty="0">
-                <a:solidFill>
-                  <a:srgbClr val="94A3B8"/>
-                </a:solidFill>
-                <a:latin typeface="Calibri" pitchFamily="34" charset="0"/>
-              </a:rPr>
-              <a:t>Schemas Mongoose • Controllers Node.js • Services .NET • Componentes React + TanStack Query</a:t>
-            </a:r>
-          </a:p>
-        </p:txBody>
-      </p:sp>
-      <p:sp>
-        <p:nvSpPr>
-          <p:cNvPr id="20" name="Right Card"/>
-          <p:cNvSpPr/>
-          <p:nvPr/>
-        </p:nvSpPr>
-        <p:spPr>
-          <a:xfrm>
-            <a:off x="4754880" y="1090000"/>
-            <a:ext cx="4114800" cy="3600000"/>
-          </a:xfrm>
-          <a:prstGeom prst="rect">
-            <a:avLst/>
-          </a:prstGeom>
-          <a:solidFill>
-            <a:srgbClr val="1E293B"/>
-          </a:solidFill>
-          <a:ln w="12700">
-            <a:solidFill>
-              <a:srgbClr val="334155"/>
-            </a:solidFill>
-          </a:ln>
-          <a:effectLst>
-            <a:outerShdw blurRad="101600" dist="38100" dir="8100000" algn="bl" rotWithShape="0">
-              <a:srgbClr val="000000">
-                <a:alpha val="30000"/>
-              </a:srgbClr>
-            </a:outerShdw>
-          </a:effectLst>
-        </p:spPr>
-        <p:txBody>
-          <a:bodyPr/>
-          <a:lstStyle/>
-          <a:p>
-            <a:endParaRPr/>
-          </a:p>
-        </p:txBody>
-      </p:sp>
-      <p:sp>
-        <p:nvSpPr>
-          <p:cNvPr id="21" name="Right Title Bar"/>
-          <p:cNvSpPr/>
-          <p:nvPr/>
-        </p:nvSpPr>
-        <p:spPr>
-          <a:xfrm>
-            <a:off x="4754880" y="1090000"/>
-            <a:ext cx="4114800" cy="54864"/>
-          </a:xfrm>
-          <a:prstGeom prst="rect">
-            <a:avLst/>
-          </a:prstGeom>
-          <a:solidFill>
-            <a:srgbClr val="6366F1"/>
-          </a:solidFill>
-          <a:ln w="0">
-            <a:noFill/>
-          </a:ln>
-        </p:spPr>
-        <p:txBody>
-          <a:bodyPr/>
-          <a:lstStyle/>
-          <a:p>
-            <a:endParaRPr/>
-          </a:p>
-        </p:txBody>
-      </p:sp>
-      <p:sp>
-        <p:nvSpPr>
-          <p:cNvPr id="22" name="Right Card Content"/>
-          <p:cNvSpPr/>
-          <p:nvPr/>
-        </p:nvSpPr>
-        <p:spPr>
-          <a:xfrm>
-            <a:off x="4892040" y="1160000"/>
-            <a:ext cx="3840480" cy="3460000"/>
-          </a:xfrm>
-          <a:prstGeom prst="rect">
-            <a:avLst/>
-          </a:prstGeom>
-          <a:noFill/>
-          <a:ln/>
-        </p:spPr>
-        <p:txBody>
-          <a:bodyPr wrap="square" rtlCol="0" anchor="t"/>
-          <a:lstStyle/>
-          <a:p>
-            <a:pPr marL="0" indent="0">
-              <a:buNone/>
-            </a:pPr>
-            <a:r>
-              <a:rPr lang="pt-PT" sz="1400" b="1" dirty="0">
-                <a:solidFill>
-                  <a:srgbClr val="6366F1"/>
-                </a:solidFill>
-                <a:latin typeface="Calibri" pitchFamily="34" charset="0"/>
-              </a:rPr>
-              <a:t>Análise Crítica</a:t>
-            </a:r>
-          </a:p>
-          <a:p>
-            <a:pPr marL="0" indent="0">
-              <a:buNone/>
-            </a:pPr>
-            <a:endParaRPr lang="pt-PT" sz="900" dirty="0"/>
-          </a:p>
-          <a:p>
-            <a:pPr marL="0" indent="0">
-              <a:buNone/>
-            </a:pPr>
-            <a:r>
-              <a:rPr lang="pt-PT" sz="1100" b="1" dirty="0">
-                <a:solidFill>
-                  <a:srgbClr val="22C55E"/>
-                </a:solidFill>
-                <a:latin typeface="Calibri" pitchFamily="34" charset="0"/>
-              </a:rPr>
-              <a:t>✓ Vantagens</a:t>
-            </a:r>
-          </a:p>
-          <a:p>
-            <a:pPr marL="0" indent="0">
-              <a:buNone/>
-            </a:pPr>
-            <a:r>
-              <a:rPr lang="pt-PT" sz="1000" dirty="0">
-                <a:solidFill>
-                  <a:srgbClr val="94A3B8"/>
-                </a:solidFill>
-                <a:latin typeface="Calibri" pitchFamily="34" charset="0"/>
-              </a:rPr>
-              <a:t>Redução de 40–50% no tempo de implementação por camada. Código de qualidade estrutural consistente. Transferência implícita de conhecimento. Deteção proativa de lacunas de especificação.</a:t>
-            </a:r>
-          </a:p>
-          <a:p>
-            <a:pPr marL="0" indent="0">
-              <a:buNone/>
-            </a:pPr>
-            <a:endParaRPr lang="pt-PT" sz="900" dirty="0"/>
-          </a:p>
-          <a:p>
-            <a:pPr marL="0" indent="0">
-              <a:buNone/>
-            </a:pPr>
-            <a:r>
-              <a:rPr lang="pt-PT" sz="1100" b="1" dirty="0">
-                <a:solidFill>
-                  <a:srgbClr val="EF4444"/>
-                </a:solidFill>
-                <a:latin typeface="Calibri" pitchFamily="34" charset="0"/>
-              </a:rPr>
-              <a:t>✗ Limitações</a:t>
-            </a:r>
-          </a:p>
-          <a:p>
-            <a:pPr marL="0" indent="0">
-              <a:buNone/>
-            </a:pPr>
-            <a:r>
-              <a:rPr lang="pt-PT" sz="1000" dirty="0">
-                <a:solidFill>
-                  <a:srgbClr val="94A3B8"/>
-                </a:solidFill>
-                <a:latin typeface="Calibri" pitchFamily="34" charset="0"/>
-              </a:rPr>
-              <a:t>Dependência da qualidade do prompt. Riscos de alucinações (código plausível mas incorreto). Tendência para soluções genéricas. Sem visão sistémica entre sessões.</a:t>
-            </a:r>
-          </a:p>
-          <a:p>
-            <a:pPr marL="0" indent="0">
-              <a:buNone/>
-            </a:pPr>
-            <a:endParaRPr lang="pt-PT" sz="900" dirty="0"/>
-          </a:p>
-          <a:p>
-            <a:pPr marL="0" indent="0">
-              <a:buNone/>
-            </a:pPr>
-            <a:r>
-              <a:rPr lang="pt-PT" sz="1100" b="1" dirty="0">
-                <a:solidFill>
-                  <a:srgbClr val="F59E0B"/>
-                </a:solidFill>
-                <a:latin typeface="Calibri" pitchFamily="34" charset="0"/>
-              </a:rPr>
-              <a:t>ⓘ Code Smells Detetados</a:t>
-            </a:r>
-          </a:p>
-          <a:p>
-            <a:r>
-              <a:rPr lang="pt-PT" sz="1000" dirty="0">
-                <a:solidFill>
-                  <a:srgbClr val="94A3B8"/>
-                </a:solidFill>
-                <a:latin typeface="Calibri" pitchFamily="34" charset="0"/>
-              </a:rPr>
-              <a:t>• </a:t>
-            </a:r>
-            <a:r>
-              <a:rPr lang="pt-PT" sz="1000" dirty="0" err="1">
-                <a:solidFill>
-                  <a:srgbClr val="94A3B8"/>
-                </a:solidFill>
-                <a:latin typeface="Calibri" pitchFamily="34" charset="0"/>
-              </a:rPr>
-              <a:t>parseJwt</a:t>
-            </a:r>
-            <a:r>
-              <a:rPr lang="pt-PT" sz="1000" dirty="0">
-                <a:solidFill>
-                  <a:srgbClr val="94A3B8"/>
-                </a:solidFill>
-                <a:latin typeface="Calibri" pitchFamily="34" charset="0"/>
-              </a:rPr>
-              <a:t> duplicado (×5) </a:t>
-            </a:r>
-          </a:p>
-          <a:p>
-            <a:pPr marL="0" indent="0">
-              <a:buNone/>
-            </a:pPr>
-            <a:r>
-              <a:rPr lang="pt-PT" sz="1000" dirty="0">
-                <a:solidFill>
-                  <a:srgbClr val="94A3B8"/>
-                </a:solidFill>
-                <a:latin typeface="Calibri" pitchFamily="34" charset="0"/>
-              </a:rPr>
-              <a:t>• alert() nativo em vez de toasts </a:t>
-            </a:r>
-          </a:p>
-          <a:p>
-            <a:pPr marL="0" indent="0">
-              <a:buNone/>
-            </a:pPr>
-            <a:r>
-              <a:rPr lang="pt-PT" sz="1000" dirty="0">
-                <a:solidFill>
-                  <a:srgbClr val="94A3B8"/>
-                </a:solidFill>
-                <a:latin typeface="Calibri" pitchFamily="34" charset="0"/>
-              </a:rPr>
-              <a:t>• mapeamentos defensivos excessivos</a:t>
-            </a:r>
-          </a:p>
-        </p:txBody>
-      </p:sp>
-      <p:sp>
-        <p:nvSpPr>
-          <p:cNvPr id="30" name="Quote"/>
-          <p:cNvSpPr/>
-          <p:nvPr/>
-        </p:nvSpPr>
-        <p:spPr>
-          <a:xfrm>
-            <a:off x="274320" y="4790000"/>
-            <a:ext cx="8595360" cy="230000"/>
-          </a:xfrm>
-          <a:prstGeom prst="rect">
-            <a:avLst/>
-          </a:prstGeom>
-          <a:noFill/>
-          <a:ln/>
-        </p:spPr>
-        <p:txBody>
-          <a:bodyPr wrap="square" rtlCol="0" anchor="ctr"/>
-          <a:lstStyle/>
-          <a:p>
-            <a:pPr marL="0" indent="0" algn="ctr">
-              <a:buNone/>
-            </a:pPr>
-            <a:r>
-              <a:rPr lang="pt-PT" sz="1000" i="1" dirty="0">
-                <a:solidFill>
-                  <a:srgbClr val="64748B"/>
-                </a:solidFill>
-                <a:latin typeface="Calibri" pitchFamily="34" charset="0"/>
-              </a:rPr>
-              <a:t>“A IA funcionou como amplificador de capacidade — não como substituto do engenheiro de software.”</a:t>
-            </a:r>
-          </a:p>
-        </p:txBody>
-      </p:sp>
-      <p:sp>
-        <p:nvSpPr>
-          <p:cNvPr id="31" name="BottomBar"/>
-          <p:cNvSpPr/>
-          <p:nvPr/>
-        </p:nvSpPr>
-        <p:spPr>
-          <a:xfrm>
-            <a:off x="0" y="5074920"/>
-            <a:ext cx="9144000" cy="68580"/>
-          </a:xfrm>
-          <a:prstGeom prst="rect">
-            <a:avLst/>
-          </a:prstGeom>
-          <a:solidFill>
-            <a:srgbClr val="6366F1"/>
-          </a:solidFill>
-          <a:ln w="12700">
-            <a:solidFill>
-              <a:srgbClr val="6366F1"/>
-            </a:solidFill>
-          </a:ln>
-        </p:spPr>
-        <p:txBody>
-          <a:bodyPr/>
-          <a:lstStyle/>
-          <a:p>
-            <a:endParaRPr lang="en-US"/>
-          </a:p>
-        </p:txBody>
-      </p:sp>
+            <a:pPr marL="285750" indent="-285750">
+              <a:buFont typeface="Arial" panose="020B0604020202020204" pitchFamily="34" charset="0"/>
+              <a:buChar char="•"/>
+            </a:pPr>
+            <a:r>
+              <a:rPr lang="en-US" sz="1400" dirty="0" err="1">
+                <a:solidFill>
+                  <a:schemeClr val="bg1"/>
+                </a:solidFill>
+              </a:rPr>
+              <a:t>Modelação</a:t>
+            </a:r>
+            <a:r>
+              <a:rPr lang="en-US" sz="1400" dirty="0">
+                <a:solidFill>
+                  <a:schemeClr val="bg1"/>
+                </a:solidFill>
+              </a:rPr>
+              <a:t> do </a:t>
+            </a:r>
+            <a:r>
+              <a:rPr lang="en-US" sz="1400" dirty="0" err="1">
+                <a:solidFill>
+                  <a:schemeClr val="bg1"/>
+                </a:solidFill>
+              </a:rPr>
+              <a:t>Diagrama</a:t>
+            </a:r>
+            <a:r>
+              <a:rPr lang="en-US" sz="1400" dirty="0">
+                <a:solidFill>
+                  <a:schemeClr val="bg1"/>
+                </a:solidFill>
+              </a:rPr>
+              <a:t> de </a:t>
+            </a:r>
+            <a:r>
+              <a:rPr lang="en-US" sz="1400" dirty="0" err="1">
+                <a:solidFill>
+                  <a:schemeClr val="bg1"/>
+                </a:solidFill>
+              </a:rPr>
+              <a:t>Componentes</a:t>
+            </a:r>
+            <a:r>
+              <a:rPr lang="en-US" sz="1400" dirty="0">
+                <a:solidFill>
+                  <a:schemeClr val="bg1"/>
+                </a:solidFill>
+              </a:rPr>
+              <a:t> do Sistema</a:t>
+            </a:r>
+          </a:p>
+          <a:p>
+            <a:pPr marL="285750" indent="-285750">
+              <a:buFont typeface="Arial" panose="020B0604020202020204" pitchFamily="34" charset="0"/>
+              <a:buChar char="•"/>
+            </a:pPr>
+            <a:endParaRPr lang="en-US" sz="1400" dirty="0">
+              <a:solidFill>
+                <a:schemeClr val="bg1"/>
+              </a:solidFill>
+            </a:endParaRPr>
+          </a:p>
+          <a:p>
+            <a:pPr marL="285750" indent="-285750">
+              <a:buFont typeface="Arial" panose="020B0604020202020204" pitchFamily="34" charset="0"/>
+              <a:buChar char="•"/>
+            </a:pPr>
+            <a:r>
+              <a:rPr lang="en-US" sz="1400" dirty="0" err="1">
+                <a:solidFill>
+                  <a:schemeClr val="bg1"/>
+                </a:solidFill>
+              </a:rPr>
+              <a:t>Modelação</a:t>
+            </a:r>
+            <a:r>
+              <a:rPr lang="en-US" sz="1400" dirty="0">
+                <a:solidFill>
+                  <a:schemeClr val="bg1"/>
+                </a:solidFill>
+              </a:rPr>
+              <a:t> dos </a:t>
+            </a:r>
+            <a:r>
+              <a:rPr lang="en-US" sz="1400" dirty="0" err="1">
+                <a:solidFill>
+                  <a:schemeClr val="bg1"/>
+                </a:solidFill>
+              </a:rPr>
+              <a:t>diagramas</a:t>
+            </a:r>
+            <a:r>
+              <a:rPr lang="en-US" sz="1400" dirty="0">
+                <a:solidFill>
+                  <a:schemeClr val="bg1"/>
+                </a:solidFill>
+              </a:rPr>
+              <a:t> de </a:t>
+            </a:r>
+            <a:r>
+              <a:rPr lang="en-US" sz="1400" dirty="0" err="1">
+                <a:solidFill>
+                  <a:schemeClr val="bg1"/>
+                </a:solidFill>
+              </a:rPr>
+              <a:t>classe</a:t>
+            </a:r>
+            <a:endParaRPr lang="en-US" sz="1400" dirty="0">
+              <a:solidFill>
+                <a:schemeClr val="bg1"/>
+              </a:solidFill>
+            </a:endParaRPr>
+          </a:p>
+          <a:p>
+            <a:pPr marL="285750" indent="-285750">
+              <a:buFont typeface="Arial" panose="020B0604020202020204" pitchFamily="34" charset="0"/>
+              <a:buChar char="•"/>
+            </a:pPr>
+            <a:endParaRPr lang="en-US" sz="1400" dirty="0">
+              <a:solidFill>
+                <a:schemeClr val="bg1"/>
+              </a:solidFill>
+            </a:endParaRPr>
+          </a:p>
+          <a:p>
+            <a:pPr marL="285750" indent="-285750">
+              <a:buFont typeface="Arial" panose="020B0604020202020204" pitchFamily="34" charset="0"/>
+              <a:buChar char="•"/>
+            </a:pPr>
+            <a:r>
+              <a:rPr lang="en-US" sz="1400" dirty="0" err="1">
+                <a:solidFill>
+                  <a:schemeClr val="bg1"/>
+                </a:solidFill>
+              </a:rPr>
+              <a:t>Modelação</a:t>
+            </a:r>
+            <a:r>
+              <a:rPr lang="en-US" sz="1400" dirty="0">
+                <a:solidFill>
+                  <a:schemeClr val="bg1"/>
+                </a:solidFill>
+              </a:rPr>
+              <a:t> dos </a:t>
+            </a:r>
+            <a:r>
+              <a:rPr lang="en-US" sz="1400" dirty="0" err="1">
+                <a:solidFill>
+                  <a:schemeClr val="bg1"/>
+                </a:solidFill>
+              </a:rPr>
+              <a:t>diagramas</a:t>
+            </a:r>
+            <a:r>
+              <a:rPr lang="en-US" sz="1400" dirty="0">
+                <a:solidFill>
+                  <a:schemeClr val="bg1"/>
+                </a:solidFill>
+              </a:rPr>
+              <a:t> de </a:t>
+            </a:r>
+            <a:r>
+              <a:rPr lang="en-US" sz="1400" dirty="0" err="1">
+                <a:solidFill>
+                  <a:schemeClr val="bg1"/>
+                </a:solidFill>
+              </a:rPr>
+              <a:t>sequência</a:t>
+            </a:r>
+            <a:r>
+              <a:rPr lang="en-US" sz="1400" dirty="0">
+                <a:solidFill>
+                  <a:schemeClr val="bg1"/>
+                </a:solidFill>
+              </a:rPr>
+              <a:t> dos </a:t>
+            </a:r>
+            <a:r>
+              <a:rPr lang="en-US" sz="1400" dirty="0" err="1">
+                <a:solidFill>
+                  <a:schemeClr val="bg1"/>
+                </a:solidFill>
+              </a:rPr>
+              <a:t>principais</a:t>
+            </a:r>
+            <a:r>
+              <a:rPr lang="en-US" sz="1400" dirty="0">
+                <a:solidFill>
+                  <a:schemeClr val="bg1"/>
+                </a:solidFill>
+              </a:rPr>
+              <a:t> pipelines</a:t>
+            </a:r>
+          </a:p>
+          <a:p>
+            <a:pPr marL="285750" indent="-285750">
+              <a:buFont typeface="Arial" panose="020B0604020202020204" pitchFamily="34" charset="0"/>
+              <a:buChar char="•"/>
+            </a:pPr>
+            <a:endParaRPr lang="en-US" sz="1400" dirty="0">
+              <a:solidFill>
+                <a:schemeClr val="bg1"/>
+              </a:solidFill>
+            </a:endParaRPr>
+          </a:p>
+          <a:p>
+            <a:pPr marL="285750" indent="-285750">
+              <a:buFont typeface="Arial" panose="020B0604020202020204" pitchFamily="34" charset="0"/>
+              <a:buChar char="•"/>
+            </a:pPr>
+            <a:r>
+              <a:rPr lang="en-US" sz="1400" dirty="0" err="1">
+                <a:solidFill>
+                  <a:schemeClr val="bg1"/>
+                </a:solidFill>
+              </a:rPr>
+              <a:t>Definição</a:t>
+            </a:r>
+            <a:r>
+              <a:rPr lang="en-US" sz="1400" dirty="0">
+                <a:solidFill>
+                  <a:schemeClr val="bg1"/>
+                </a:solidFill>
+              </a:rPr>
+              <a:t> do </a:t>
+            </a:r>
+            <a:r>
+              <a:rPr lang="en-US" sz="1400" dirty="0" err="1">
+                <a:solidFill>
+                  <a:schemeClr val="bg1"/>
+                </a:solidFill>
+              </a:rPr>
+              <a:t>dicionário</a:t>
+            </a:r>
+            <a:r>
+              <a:rPr lang="en-US" sz="1400" dirty="0">
+                <a:solidFill>
+                  <a:schemeClr val="bg1"/>
+                </a:solidFill>
+              </a:rPr>
+              <a:t> de endpoints do </a:t>
+            </a:r>
+            <a:r>
+              <a:rPr lang="en-US" sz="1400" dirty="0" err="1">
+                <a:solidFill>
+                  <a:schemeClr val="bg1"/>
+                </a:solidFill>
+              </a:rPr>
+              <a:t>servidor</a:t>
+            </a:r>
+            <a:endParaRPr lang="en-US" sz="1400" dirty="0">
+              <a:solidFill>
+                <a:schemeClr val="bg1"/>
+              </a:solidFill>
+            </a:endParaRPr>
+          </a:p>
+        </p:txBody>
+      </p:sp>
+      <p:pic>
+        <p:nvPicPr>
+          <p:cNvPr id="47" name="Picture 46" descr="A diagram of a company&#10;&#10;AI-generated content may be incorrect.">
+            <a:extLst>
+              <a:ext uri="{FF2B5EF4-FFF2-40B4-BE49-F238E27FC236}">
+                <a16:creationId xmlns:a16="http://schemas.microsoft.com/office/drawing/2014/main" id="{19E59D6A-94C0-DC5F-308A-B56FD08FC4AE}"/>
+              </a:ext>
+            </a:extLst>
+          </p:cNvPr>
+          <p:cNvPicPr>
+            <a:picLocks noChangeAspect="1"/>
+          </p:cNvPicPr>
+          <p:nvPr/>
+        </p:nvPicPr>
+        <p:blipFill>
+          <a:blip r:embed="rId3"/>
+          <a:stretch>
+            <a:fillRect/>
+          </a:stretch>
+        </p:blipFill>
+        <p:spPr>
+          <a:xfrm>
+            <a:off x="457200" y="2819404"/>
+            <a:ext cx="5617874" cy="2064913"/>
+          </a:xfrm>
+          <a:prstGeom prst="rect">
+            <a:avLst/>
+          </a:prstGeom>
+        </p:spPr>
+      </p:pic>
     </p:spTree>
+    <p:extLst>
+      <p:ext uri="{BB962C8B-B14F-4D97-AF65-F5344CB8AC3E}">
+        <p14:creationId xmlns:p14="http://schemas.microsoft.com/office/powerpoint/2010/main" val="1777000102"/>
+      </p:ext>
+    </p:extLst>
   </p:cSld>
   <p:clrMapOvr>
     <a:masterClrMapping/>

--- a/FixNPresent_v2 .pptx
+++ b/FixNPresent_v2 .pptx
@@ -2131,7 +2131,106 @@
                 <a:ea typeface="Calibri" pitchFamily="34" charset="-122"/>
                 <a:cs typeface="Calibri" pitchFamily="34" charset="-120"/>
               </a:rPr>
-              <a:t>Sistema de Gestão Integrada para Oficina de Micromobilidade</a:t>
+              <a:t>Sistema de </a:t>
+            </a:r>
+            <a:r>
+              <a:rPr lang="en-US" sz="1700" dirty="0" err="1">
+                <a:solidFill>
+                  <a:srgbClr val="0EA5E9"/>
+                </a:solidFill>
+                <a:latin typeface="Calibri" pitchFamily="34" charset="0"/>
+                <a:ea typeface="Calibri" pitchFamily="34" charset="-122"/>
+                <a:cs typeface="Calibri" pitchFamily="34" charset="-120"/>
+              </a:rPr>
+              <a:t>Gestão</a:t>
+            </a:r>
+            <a:r>
+              <a:rPr lang="en-US" sz="1700" dirty="0">
+                <a:solidFill>
+                  <a:srgbClr val="0EA5E9"/>
+                </a:solidFill>
+                <a:latin typeface="Calibri" pitchFamily="34" charset="0"/>
+                <a:ea typeface="Calibri" pitchFamily="34" charset="-122"/>
+                <a:cs typeface="Calibri" pitchFamily="34" charset="-120"/>
+              </a:rPr>
+              <a:t> para </a:t>
+            </a:r>
+            <a:r>
+              <a:rPr lang="en-US" sz="1700" dirty="0" err="1">
+                <a:solidFill>
+                  <a:srgbClr val="0EA5E9"/>
+                </a:solidFill>
+                <a:latin typeface="Calibri" pitchFamily="34" charset="0"/>
+                <a:ea typeface="Calibri" pitchFamily="34" charset="-122"/>
+                <a:cs typeface="Calibri" pitchFamily="34" charset="-120"/>
+              </a:rPr>
+              <a:t>uma</a:t>
+            </a:r>
+            <a:r>
+              <a:rPr lang="en-US" sz="1700" dirty="0">
+                <a:solidFill>
+                  <a:srgbClr val="0EA5E9"/>
+                </a:solidFill>
+                <a:latin typeface="Calibri" pitchFamily="34" charset="0"/>
+                <a:ea typeface="Calibri" pitchFamily="34" charset="-122"/>
+                <a:cs typeface="Calibri" pitchFamily="34" charset="-120"/>
+              </a:rPr>
+              <a:t> </a:t>
+            </a:r>
+            <a:r>
+              <a:rPr lang="en-US" sz="1700" dirty="0" err="1">
+                <a:solidFill>
+                  <a:srgbClr val="0EA5E9"/>
+                </a:solidFill>
+                <a:latin typeface="Calibri" pitchFamily="34" charset="0"/>
+                <a:ea typeface="Calibri" pitchFamily="34" charset="-122"/>
+                <a:cs typeface="Calibri" pitchFamily="34" charset="-120"/>
+              </a:rPr>
+              <a:t>Oficina</a:t>
+            </a:r>
+            <a:r>
+              <a:rPr lang="en-US" sz="1700" dirty="0">
+                <a:solidFill>
+                  <a:srgbClr val="0EA5E9"/>
+                </a:solidFill>
+                <a:latin typeface="Calibri" pitchFamily="34" charset="0"/>
+                <a:ea typeface="Calibri" pitchFamily="34" charset="-122"/>
+                <a:cs typeface="Calibri" pitchFamily="34" charset="-120"/>
+              </a:rPr>
+              <a:t> de </a:t>
+            </a:r>
+            <a:r>
+              <a:rPr lang="en-US" sz="1700" dirty="0" err="1">
+                <a:solidFill>
+                  <a:srgbClr val="0EA5E9"/>
+                </a:solidFill>
+                <a:latin typeface="Calibri" pitchFamily="34" charset="0"/>
+                <a:ea typeface="Calibri" pitchFamily="34" charset="-122"/>
+                <a:cs typeface="Calibri" pitchFamily="34" charset="-120"/>
+              </a:rPr>
+              <a:t>Reparação</a:t>
+            </a:r>
+            <a:r>
+              <a:rPr lang="en-US" sz="1700" dirty="0">
+                <a:solidFill>
+                  <a:srgbClr val="0EA5E9"/>
+                </a:solidFill>
+                <a:latin typeface="Calibri" pitchFamily="34" charset="0"/>
+                <a:ea typeface="Calibri" pitchFamily="34" charset="-122"/>
+                <a:cs typeface="Calibri" pitchFamily="34" charset="-120"/>
+              </a:rPr>
+              <a:t> de </a:t>
+            </a:r>
+            <a:r>
+              <a:rPr lang="en-US" sz="1700" dirty="0" err="1">
+                <a:solidFill>
+                  <a:srgbClr val="0EA5E9"/>
+                </a:solidFill>
+                <a:latin typeface="Calibri" pitchFamily="34" charset="0"/>
+                <a:ea typeface="Calibri" pitchFamily="34" charset="-122"/>
+                <a:cs typeface="Calibri" pitchFamily="34" charset="-120"/>
+              </a:rPr>
+              <a:t>Trotinetes</a:t>
             </a:r>
             <a:endParaRPr lang="en-US" sz="1700" dirty="0"/>
           </a:p>
@@ -2277,6 +2376,124 @@
           <a:lstStyle/>
           <a:p>
             <a:endParaRPr lang="en-US"/>
+          </a:p>
+        </p:txBody>
+      </p:sp>
+      <p:sp>
+        <p:nvSpPr>
+          <p:cNvPr id="10" name="Rectangle 1">
+            <a:extLst>
+              <a:ext uri="{FF2B5EF4-FFF2-40B4-BE49-F238E27FC236}">
+                <a16:creationId xmlns:a16="http://schemas.microsoft.com/office/drawing/2014/main" id="{7FE90460-9FE7-5B8E-CA45-5DFFE0736A55}"/>
+              </a:ext>
+            </a:extLst>
+          </p:cNvPr>
+          <p:cNvSpPr>
+            <a:spLocks noChangeArrowheads="1"/>
+          </p:cNvSpPr>
+          <p:nvPr/>
+        </p:nvSpPr>
+        <p:spPr bwMode="auto">
+          <a:xfrm>
+            <a:off x="0" y="0"/>
+            <a:ext cx="9144000" cy="0"/>
+          </a:xfrm>
+          <a:prstGeom prst="rect">
+            <a:avLst/>
+          </a:prstGeom>
+          <a:noFill/>
+          <a:ln>
+            <a:noFill/>
+          </a:ln>
+          <a:effectLst/>
+          <a:extLst>
+            <a:ext uri="{909E8E84-426E-40DD-AFC4-6F175D3DCCD1}">
+              <a14:hiddenFill xmlns:a14="http://schemas.microsoft.com/office/drawing/2010/main">
+                <a:solidFill>
+                  <a:schemeClr val="accent1"/>
+                </a:solidFill>
+              </a14:hiddenFill>
+            </a:ext>
+            <a:ext uri="{91240B29-F687-4F45-9708-019B960494DF}">
+              <a14:hiddenLine xmlns:a14="http://schemas.microsoft.com/office/drawing/2010/main" w="9525">
+                <a:solidFill>
+                  <a:schemeClr val="tx1"/>
+                </a:solidFill>
+                <a:miter lim="800000"/>
+                <a:headEnd/>
+                <a:tailEnd/>
+              </a14:hiddenLine>
+            </a:ext>
+            <a:ext uri="{AF507438-7753-43E0-B8FC-AC1667EBCBE1}">
+              <a14:hiddenEffects xmlns:a14="http://schemas.microsoft.com/office/drawing/2010/main">
+                <a:effectLst>
+                  <a:outerShdw dist="35921" dir="2700000" algn="ctr" rotWithShape="0">
+                    <a:schemeClr val="bg2"/>
+                  </a:outerShdw>
+                </a:effectLst>
+              </a14:hiddenEffects>
+            </a:ext>
+          </a:extLst>
+        </p:spPr>
+        <p:txBody>
+          <a:bodyPr vert="horz" wrap="none" lIns="91440" tIns="45720" rIns="91440" bIns="45720" numCol="1" anchor="ctr" anchorCtr="0" compatLnSpc="1">
+            <a:prstTxWarp prst="textNoShape">
+              <a:avLst/>
+            </a:prstTxWarp>
+            <a:spAutoFit/>
+          </a:bodyPr>
+          <a:lstStyle/>
+          <a:p>
+            <a:pPr marL="0" marR="0" lvl="0" indent="0" algn="l" defTabSz="914400" rtl="0" eaLnBrk="0" fontAlgn="base" latinLnBrk="0" hangingPunct="0">
+              <a:lnSpc>
+                <a:spcPct val="100000"/>
+              </a:lnSpc>
+              <a:spcBef>
+                <a:spcPct val="0"/>
+              </a:spcBef>
+              <a:spcAft>
+                <a:spcPct val="0"/>
+              </a:spcAft>
+              <a:buClrTx/>
+              <a:buSzTx/>
+              <a:buFontTx/>
+              <a:buNone/>
+              <a:tabLst/>
+            </a:pPr>
+            <a:r>
+              <a:rPr kumimoji="0" lang="en-US" altLang="en-US" sz="1800" b="0" i="0" u="none" strike="noStrike" cap="none" normalizeH="0" baseline="0">
+                <a:ln>
+                  <a:noFill/>
+                </a:ln>
+                <a:solidFill>
+                  <a:schemeClr val="tx1"/>
+                </a:solidFill>
+                <a:effectLst/>
+                <a:latin typeface="Times New Roman" panose="02020603050405020304" pitchFamily="18" charset="0"/>
+              </a:rPr>
+              <a:t>Sistema de gestão para uma oficina de reparação de trotinetes</a:t>
+            </a:r>
+            <a:br>
+              <a:rPr kumimoji="0" lang="en-US" altLang="en-US" sz="1800" b="0" i="0" u="none" strike="noStrike" cap="none" normalizeH="0" baseline="0">
+                <a:ln>
+                  <a:noFill/>
+                </a:ln>
+                <a:solidFill>
+                  <a:schemeClr val="tx1"/>
+                </a:solidFill>
+                <a:effectLst/>
+              </a:rPr>
+            </a:br>
+            <a:endParaRPr kumimoji="0" lang="en-US" altLang="en-US" sz="1800" b="0" i="0" u="none" strike="noStrike" cap="none" normalizeH="0" baseline="0">
+              <a:ln>
+                <a:noFill/>
+              </a:ln>
+              <a:solidFill>
+                <a:schemeClr val="tx1"/>
+              </a:solidFill>
+              <a:effectLst/>
+              <a:latin typeface="Arial" panose="020B0604020202020204" pitchFamily="34" charset="0"/>
+            </a:endParaRPr>
           </a:p>
         </p:txBody>
       </p:sp>

--- a/FixNPresent_v2 .pptx
+++ b/FixNPresent_v2 .pptx
@@ -15938,29 +15938,7 @@
                 <a:ea typeface="Calibri" pitchFamily="34" charset="-122"/>
                 <a:cs typeface="Calibri" pitchFamily="34" charset="-120"/>
               </a:rPr>
-              <a:t>· 4 </a:t>
-            </a:r>
-            <a:r>
-              <a:rPr lang="en-US" sz="1050" dirty="0" err="1">
-                <a:solidFill>
-                  <a:srgbClr val="E2E8F0"/>
-                </a:solidFill>
-                <a:latin typeface="Calibri" pitchFamily="34" charset="0"/>
-                <a:ea typeface="Calibri" pitchFamily="34" charset="-122"/>
-                <a:cs typeface="Calibri" pitchFamily="34" charset="-120"/>
-              </a:rPr>
-              <a:t>conainers</a:t>
-            </a:r>
-            <a:r>
-              <a:rPr lang="en-US" sz="1050" dirty="0">
-                <a:solidFill>
-                  <a:srgbClr val="E2E8F0"/>
-                </a:solidFill>
-                <a:latin typeface="Calibri" pitchFamily="34" charset="0"/>
-                <a:ea typeface="Calibri" pitchFamily="34" charset="-122"/>
-                <a:cs typeface="Calibri" pitchFamily="34" charset="-120"/>
-              </a:rPr>
-              <a:t> Docker</a:t>
+              <a:t>· 4 containers Docker</a:t>
             </a:r>
             <a:endParaRPr lang="en-US" sz="1050" dirty="0"/>
           </a:p>

--- a/FixNPresent_v2 .pptx
+++ b/FixNPresent_v2 .pptx
@@ -3399,7 +3399,7 @@
                   <a:schemeClr val="bg1"/>
                 </a:solidFill>
               </a:rPr>
-              <a:t>Funcinalidade</a:t>
+              <a:t>Funcionalidade</a:t>
             </a:r>
             <a:r>
               <a:rPr lang="en-US" dirty="0">
@@ -4012,7 +4012,7 @@
                 </a:solidFill>
                 <a:latin typeface="Consolas"/>
               </a:rPr>
-              <a:t>“${LN_API_PORT}:3001”</a:t>
+              <a:t>“${LN_API_PORT}:3002”</a:t>
             </a:r>
           </a:p>
           <a:p>
@@ -10363,7 +10363,7 @@
                 <a:ea typeface="Consolas" pitchFamily="34" charset="-122"/>
                 <a:cs typeface="Consolas" pitchFamily="34" charset="-120"/>
               </a:rPr>
-              <a:t>docker compose up –build -d</a:t>
+              <a:t>docker compose up --build -d</a:t>
             </a:r>
             <a:endParaRPr lang="en-US" sz="1800" dirty="0"/>
           </a:p>
